--- a/lecons/F3/15_FORM4_LESSON12_Impact_of_Volcanicity_on_Man.pptx
+++ b/lecons/F3/15_FORM4_LESSON12_Impact_of_Volcanicity_on_Man.pptx
@@ -3451,7 +3451,7 @@
           <a:p>
             <a:r>
               <a:rPr lang="en-US" dirty="0"/>
-              <a:t>Before we start the new lesson, let us correct the homework I gave you at the end of Lesson 11: Volcanoes and Volcanic Features. The question was: Imagine a friend wants to farm near Buea, on Mount Cameroon. Write two good reasons to go and two dangers. Take out your exercise books.</a:t>
+              <a:t>Before we start the new lesson, let us correct the homework I gave you at the end of Lesson 11: Volcanoes. The question was: Imagine a friend wants to farm near Buea, on Mount Cameroon. Write two good reasons to go and two dangers. Take out your exercise books.</a:t>
             </a:r>
             <a:endParaRPr lang="en-US" dirty="0"/>
           </a:p>
@@ -14536,7 +14536,7 @@
         <p:spPr>
           <a:xfrm>
             <a:off x="0" y="658368"/>
-            <a:ext cx="3840480" cy="5833872"/>
+            <a:ext cx="5120640" cy="5833872"/>
           </a:xfrm>
           <a:prstGeom prst="rect">
             <a:avLst/>
@@ -14551,8 +14551,8 @@
         </p:nvSpPr>
         <p:spPr>
           <a:xfrm>
-            <a:off x="4069080" y="1005840"/>
-            <a:ext cx="7802575" cy="731520"/>
+            <a:off x="5349240" y="1005840"/>
+            <a:ext cx="6522415" cy="731520"/>
           </a:xfrm>
           <a:prstGeom prst="rect">
             <a:avLst/>
@@ -14592,8 +14592,8 @@
         </p:nvSpPr>
         <p:spPr>
           <a:xfrm>
-            <a:off x="4069080" y="1783080"/>
-            <a:ext cx="7802575" cy="4663440"/>
+            <a:off x="5349240" y="1783080"/>
+            <a:ext cx="6522415" cy="4663440"/>
           </a:xfrm>
           <a:prstGeom prst="rect">
             <a:avLst/>
@@ -14620,7 +14620,7 @@
                 <a:ea typeface="Times New Roman" pitchFamily="34" charset="-122"/>
                 <a:cs typeface="Times New Roman" pitchFamily="34" charset="-120"/>
               </a:rPr>
-              <a:t>Question (Lesson 11: Volcanoes and Volcanic Features):</a:t>
+              <a:t>Question (Lesson 11: Volcanoes):</a:t>
             </a:r>
             <a:endParaRPr lang="en-US" sz="4000" dirty="0"/>
           </a:p>

--- a/lecons/F3/15_FORM4_LESSON12_Impact_of_Volcanicity_on_Man.pptx
+++ b/lecons/F3/15_FORM4_LESSON12_Impact_of_Volcanicity_on_Man.pptx
@@ -51,9 +51,16 @@
     <p:sldId id="299" r:id="rId45"/>
     <p:sldId id="300" r:id="rId46"/>
     <p:sldId id="301" r:id="rId47"/>
+    <p:sldId id="302" r:id="rId48"/>
+    <p:sldId id="303" r:id="rId49"/>
+    <p:sldId id="304" r:id="rId50"/>
+    <p:sldId id="305" r:id="rId51"/>
+    <p:sldId id="306" r:id="rId52"/>
+    <p:sldId id="307" r:id="rId53"/>
+    <p:sldId id="308" r:id="rId54"/>
   </p:sldIdLst>
   <p:notesMasterIdLst>
-    <p:notesMasterId r:id="rId48"/>
+    <p:notesMasterId r:id="rId55"/>
   </p:notesMasterIdLst>
   <p:sldSz cx="12192000" cy="6858000"/>
   <p:notesSz cx="6858000" cy="12192000"/>
@@ -723,7 +730,7 @@
           <a:p>
             <a:r>
               <a:rPr lang="en-US" dirty="0"/>
-              <a:t>Good. The land is fertile but near a dangerous volcano.</a:t>
+              <a:t>Good. The farmer must choose between fertile land and the danger of a volcano, and does not know how to live safely there.</a:t>
             </a:r>
             <a:endParaRPr lang="en-US" dirty="0"/>
           </a:p>
@@ -987,7 +994,7 @@
           <a:p>
             <a:r>
               <a:rPr lang="en-US" dirty="0"/>
-              <a:t>Question 3: What can people do to stay safe? Think for a moment, then raise your hand to answer.</a:t>
+              <a:t>Question 3: Give one advantage of the area. Think for a moment, then raise your hand to answer.</a:t>
             </a:r>
             <a:endParaRPr lang="en-US" dirty="0"/>
           </a:p>
@@ -1075,7 +1082,7 @@
           <a:p>
             <a:r>
               <a:rPr lang="en-US" dirty="0"/>
-              <a:t>Good. Listen to warnings and leave when the volcano erupts.</a:t>
+              <a:t>Good. The volcanic soil is very fertile.</a:t>
             </a:r>
             <a:endParaRPr lang="en-US" dirty="0"/>
           </a:p>
@@ -2043,7 +2050,7 @@
           <a:p>
             <a:r>
               <a:rPr lang="en-US" dirty="0"/>
-              <a:t>Here is the question for Activity 3: How can volcanoes give electricity? Take one minute to think and write your answer in your rough notebook.</a:t>
+              <a:t>Here is the question for Activity 3: How can volcanic areas produce electricity? Take one minute to think and write your answer in your rough notebook.</a:t>
             </a:r>
             <a:endParaRPr lang="en-US" dirty="0"/>
           </a:p>
@@ -2131,7 +2138,7 @@
           <a:p>
             <a:r>
               <a:rPr lang="en-US" dirty="0"/>
-              <a:t>Let us check the answer together. Hot steam from the ground turns machines.</a:t>
+              <a:t>Let us check the answer together. Hot steam from the ground turns machines (turbines).</a:t>
             </a:r>
             <a:endParaRPr lang="en-US" dirty="0"/>
           </a:p>
@@ -2307,7 +2314,7 @@
           <a:p>
             <a:r>
               <a:rPr lang="en-US" dirty="0"/>
-              <a:t>Let us copy the definitions. The key terms of this lesson are defined as follows. On this slide we have Hazard and Geothermal energy. Write each point on a new line, with the key term first, and explain it in your own words when we revise.</a:t>
+              <a:t>Let us copy the definitions. The key terms of this lesson are defined as follows. On this slide we have Hazard and Resource. Write each point on a new line, with the key term first, and explain it in your own words when we revise. When you finish, we go to the next slide.</a:t>
             </a:r>
             <a:endParaRPr lang="en-US" dirty="0"/>
           </a:p>
@@ -2395,7 +2402,7 @@
           <a:p>
             <a:r>
               <a:rPr lang="en-US" dirty="0"/>
-              <a:t>Let us copy Volcanic Hazards. Volcanoes cause the following hazards. On this slide we have Lava and ash and Gases. Write each point on a new line, with the key term first, and explain it in your own words when we revise. When you finish, we go to the next slide.</a:t>
+              <a:t>We continue with the definitions. On this slide we have Geothermal energy. Write each point on a new line, with the key term first, and explain it in your own words when we revise.</a:t>
             </a:r>
             <a:endParaRPr lang="en-US" dirty="0"/>
           </a:p>
@@ -2571,7 +2578,7 @@
           <a:p>
             <a:r>
               <a:rPr lang="en-US" dirty="0"/>
-              <a:t>We continue with Volcanic Hazards. On this slide we have Earthquakes. Write each point on a new line, with the key term first, and explain it in your own words when we revise.</a:t>
+              <a:t>Let us copy Volcanic Hazards. Volcanoes cause the following hazards. Copy the point on Lava flows on the left, then draw the diagram on the right: lava over a road. Give it a title and label it clearly.</a:t>
             </a:r>
             <a:endParaRPr lang="en-US" dirty="0"/>
           </a:p>
@@ -2659,7 +2666,7 @@
           <a:p>
             <a:r>
               <a:rPr lang="en-US" dirty="0"/>
-              <a:t>Let us copy Importance of Volcanoes. Volcanoes are useful to man in the following ways. On this slide we have Fertile soils and Energy. Write each point on a new line, with the key term first, and explain it in your own words when we revise. When you finish, we go to the next slide.</a:t>
+              <a:t>We continue with Volcanic Hazards. On this slide we have Ash falls. Write each point on a new line, with the key term first, and explain it in your own words when we revise.</a:t>
             </a:r>
             <a:endParaRPr lang="en-US" dirty="0"/>
           </a:p>
@@ -2747,7 +2754,7 @@
           <a:p>
             <a:r>
               <a:rPr lang="en-US" dirty="0"/>
-              <a:t>We continue with Importance of Volcanoes. On this slide we have Tourism and Building materials. Write each point on a new line, with the key term first, and explain it in your own words when we revise.</a:t>
+              <a:t>Copy the point on Poisonous gases on the left, then draw the diagram on the right: lake Nyos. Give it a title and label it clearly.</a:t>
             </a:r>
             <a:endParaRPr lang="en-US" dirty="0"/>
           </a:p>
@@ -2835,7 +2842,7 @@
           <a:p>
             <a:r>
               <a:rPr lang="en-US" dirty="0"/>
-              <a:t>Let us copy Adaptation, Mitigation and Prevention. People reduce volcanic dangers with the following measures. On this slide we have Monitoring and Warning and evacuation. Write each point on a new line, with the key term first, and explain it in your own words when we revise. When you finish, we go to the next slide.</a:t>
+              <a:t>We continue with Volcanic Hazards. On this slide we have Mudflows (lahars) and Earthquakes and tsunamis. Write each point on a new line, with the key term first, and explain it in your own words when we revise.</a:t>
             </a:r>
             <a:endParaRPr lang="en-US" dirty="0"/>
           </a:p>
@@ -2923,7 +2930,7 @@
           <a:p>
             <a:r>
               <a:rPr lang="en-US" dirty="0"/>
-              <a:t>We continue with Adaptation, Mitigation and Prevention. On this slide we have Degassing. Write each point on a new line, with the key term first, and explain it in your own words when we revise.</a:t>
+              <a:t>Let us copy Importance of Volcanoes. Volcanoes are useful to man in the following ways. Copy the point on Fertile soils on the left, then draw the diagram on the right: tea on fertile highlands. Give it a title and label it clearly.</a:t>
             </a:r>
             <a:endParaRPr lang="en-US" dirty="0"/>
           </a:p>
@@ -3011,7 +3018,7 @@
           <a:p>
             <a:r>
               <a:rPr lang="en-US" dirty="0"/>
-              <a:t>Now let us check what you have understood. Question 1: Give one danger and one benefit of volcanoes. Answer in your exercise book.</a:t>
+              <a:t>Copy the point on Geothermal energy on the left, then draw the diagram on the right: a geothermal power station. Give it a title and label it clearly.</a:t>
             </a:r>
             <a:endParaRPr lang="en-US" dirty="0"/>
           </a:p>
@@ -3099,7 +3106,7 @@
           <a:p>
             <a:r>
               <a:rPr lang="en-US" dirty="0"/>
-              <a:t>The expected answer is: danger: lava. Benefit: fertile soils. If you got it right, well done.</a:t>
+              <a:t>We continue with Importance of Volcanoes. On this slide we have Tourism and Building materials and minerals. Write each point on a new line, with the key term first, and explain it in your own words when we revise. When you finish, we go to the next slide.</a:t>
             </a:r>
             <a:endParaRPr lang="en-US" dirty="0"/>
           </a:p>
@@ -3187,7 +3194,7 @@
           <a:p>
             <a:r>
               <a:rPr lang="en-US" dirty="0"/>
-              <a:t>Now let us check what you have understood. Question 2: What happened at Lake Nyos in 1986? Answer in your exercise book.</a:t>
+              <a:t>We continue with Importance of Volcanoes. On this slide we have Hot springs. Write each point on a new line, with the key term first, and explain it in your own words when we revise.</a:t>
             </a:r>
             <a:endParaRPr lang="en-US" dirty="0"/>
           </a:p>
@@ -3275,7 +3282,7 @@
           <a:p>
             <a:r>
               <a:rPr lang="en-US" dirty="0"/>
-              <a:t>The expected answer is: a cloud of gas killed about 1,700 people. If you got it right, well done.</a:t>
+              <a:t>Let us copy Adaptation, Mitigation and Preventive Measures. People reduce volcanic dangers with the following measures. Copy the point on Monitoring on the left, then draw the diagram on the right: monitoring a volcano. Give it a title and label it clearly.</a:t>
             </a:r>
             <a:endParaRPr lang="en-US" dirty="0"/>
           </a:p>
@@ -3363,7 +3370,7 @@
           <a:p>
             <a:r>
               <a:rPr lang="en-US" dirty="0"/>
-              <a:t>For those who need more practice, fill in the blanks in your exercise book. The answers are: number 1, geothermal; number 2, Nyos; number 3, fertile.</a:t>
+              <a:t>We continue with Adaptation, Mitigation and Preventive Measures. On this slide we have Warning and evacuation, Land-use planning and Degassing. Write each point on a new line, with the key term first, and explain it in your own words when we revise. When you finish, we go to the next slide.</a:t>
             </a:r>
             <a:endParaRPr lang="en-US" dirty="0"/>
           </a:p>
@@ -3539,7 +3546,7 @@
           <a:p>
             <a:r>
               <a:rPr lang="en-US" dirty="0"/>
-              <a:t>For your homework: Ask your parents if they have ever felt the ground shake. Write where and when it happened, and what they felt. We shall correct it at the beginning of our next lesson.</a:t>
+              <a:t>We continue with Adaptation, Mitigation and Preventive Measures. On this slide we have Diverting lava. Write each point on a new line, with the key term first, and explain it in your own words when we revise.</a:t>
             </a:r>
             <a:endParaRPr lang="en-US" dirty="0"/>
           </a:p>
@@ -3627,7 +3634,7 @@
           <a:p>
             <a:r>
               <a:rPr lang="en-US" dirty="0"/>
-              <a:t>Our next lesson will be on Lesson 13: Earthquakes. Thank you for your attention, and see you next time.</a:t>
+              <a:t>Now let us check what you have understood. Question 1: Give one danger and one benefit of volcanoes. Answer in your exercise book.</a:t>
             </a:r>
             <a:endParaRPr lang="en-US" dirty="0"/>
           </a:p>
@@ -3715,7 +3722,7 @@
           <a:p>
             <a:r>
               <a:rPr lang="en-US" dirty="0"/>
-              <a:t>Let us play the bilingual game. I say a word in English, and you give me the French word. Then we do the reverse.</a:t>
+              <a:t>The expected answer is: danger: lava. Benefit: fertile soils. If you got it right, well done.</a:t>
             </a:r>
             <a:endParaRPr lang="en-US" dirty="0"/>
           </a:p>
@@ -3803,7 +3810,7 @@
           <a:p>
             <a:r>
               <a:rPr lang="en-US" dirty="0"/>
-              <a:t>I record this information in the official logbook of the class after the lesson.</a:t>
+              <a:t>Now let us check what you have understood. Question 2: What happened at Lake Nyos in 1986? Answer in your exercise book.</a:t>
             </a:r>
             <a:endParaRPr lang="en-US" dirty="0"/>
           </a:p>
@@ -3891,7 +3898,7 @@
           <a:p>
             <a:r>
               <a:rPr lang="en-US" dirty="0"/>
-              <a:t>I complete the second page of the logbook: the matter taught, the evaluation, the homework and the attendance.</a:t>
+              <a:t>The expected answer is: a cloud of gas killed about 1,700 people. If you got it right, well done.</a:t>
             </a:r>
             <a:endParaRPr lang="en-US" dirty="0"/>
           </a:p>
@@ -3979,7 +3986,7 @@
           <a:p>
             <a:r>
               <a:rPr lang="en-US" dirty="0"/>
-              <a:t>This slide is for me, the teacher: it gives the timing of the lesson and what to do if the projector is not available.</a:t>
+              <a:t>For those who need more practice, fill in the blanks in your exercise book. The answers are: number 1, geothermal; number 2, Nyos; number 3, fertile.</a:t>
             </a:r>
             <a:endParaRPr lang="en-US" dirty="0"/>
           </a:p>
@@ -4067,7 +4074,7 @@
           <a:p>
             <a:r>
               <a:rPr lang="en-US" dirty="0"/>
-              <a:t>These are the references and picture credits used to prepare this lesson.</a:t>
+              <a:t>For your homework: Ask your parents if they have ever felt the ground shake. Write where and when it happened, and what they felt. We shall correct it at the beginning of our next lesson.</a:t>
             </a:r>
             <a:endParaRPr lang="en-US" dirty="0"/>
           </a:p>
@@ -4091,6 +4098,270 @@
             <a:fld id="{F7021451-1387-4CA6-816F-3879F97B5CBC}" type="slidenum">
               <a:rPr lang="en-US"/>
               <a:t>46</a:t>
+            </a:fld>
+            <a:endParaRPr lang="en-US"/>
+          </a:p>
+        </p:txBody>
+      </p:sp>
+    </p:spTree>
+    <p:extLst>
+      <p:ext uri="{BB962C8B-B14F-4D97-AF65-F5344CB8AC3E}">
+        <p14:creationId xmlns:p14="http://schemas.microsoft.com/office/powerpoint/2010/main" val="1024086991"/>
+      </p:ext>
+    </p:extLst>
+  </p:cSld>
+  <p:clrMapOvr>
+    <a:masterClrMapping/>
+  </p:clrMapOvr>
+</p:notes>
+</file>
+
+<file path=ppt/notesSlides/notesSlide47.xml><?xml version="1.0" encoding="utf-8"?>
+<p:notes xmlns:a="http://schemas.openxmlformats.org/drawingml/2006/main" xmlns:r="http://schemas.openxmlformats.org/officeDocument/2006/relationships" xmlns:p="http://schemas.openxmlformats.org/presentationml/2006/main">
+  <p:cSld>
+    <p:spTree>
+      <p:nvGrpSpPr>
+        <p:cNvPr id="1" name=""/>
+        <p:cNvGrpSpPr/>
+        <p:nvPr/>
+      </p:nvGrpSpPr>
+      <p:grpSpPr>
+        <a:xfrm>
+          <a:off x="0" y="0"/>
+          <a:ext cx="0" cy="0"/>
+          <a:chOff x="0" y="0"/>
+          <a:chExt cx="0" cy="0"/>
+        </a:xfrm>
+      </p:grpSpPr>
+      <p:sp>
+        <p:nvSpPr>
+          <p:cNvPr id="2" name="Slide Image Placeholder 1"/>
+          <p:cNvSpPr>
+            <a:spLocks noGrp="1" noRot="1" noChangeAspect="1"/>
+          </p:cNvSpPr>
+          <p:nvPr>
+            <p:ph type="sldImg"/>
+          </p:nvPr>
+        </p:nvSpPr>
+        <p:spPr/>
+      </p:sp>
+      <p:sp>
+        <p:nvSpPr>
+          <p:cNvPr id="3" name="Notes Placeholder 2"/>
+          <p:cNvSpPr>
+            <a:spLocks noGrp="1"/>
+          </p:cNvSpPr>
+          <p:nvPr>
+            <p:ph type="body" idx="1"/>
+          </p:nvPr>
+        </p:nvSpPr>
+        <p:spPr/>
+        <p:txBody>
+          <a:bodyPr/>
+          <a:lstStyle/>
+          <a:p>
+            <a:r>
+              <a:rPr lang="en-US" dirty="0"/>
+              <a:t>Our next lesson will be on Lesson 13: Earthquakes. Thank you for your attention, and see you next time.</a:t>
+            </a:r>
+            <a:endParaRPr lang="en-US" dirty="0"/>
+          </a:p>
+        </p:txBody>
+      </p:sp>
+      <p:sp>
+        <p:nvSpPr>
+          <p:cNvPr id="4" name="Slide Number Placeholder 3"/>
+          <p:cNvSpPr>
+            <a:spLocks noGrp="1"/>
+          </p:cNvSpPr>
+          <p:nvPr>
+            <p:ph type="sldNum" sz="quarter" idx="10"/>
+          </p:nvPr>
+        </p:nvSpPr>
+        <p:spPr/>
+        <p:txBody>
+          <a:bodyPr/>
+          <a:lstStyle/>
+          <a:p>
+            <a:fld id="{F7021451-1387-4CA6-816F-3879F97B5CBC}" type="slidenum">
+              <a:rPr lang="en-US"/>
+              <a:t>47</a:t>
+            </a:fld>
+            <a:endParaRPr lang="en-US"/>
+          </a:p>
+        </p:txBody>
+      </p:sp>
+    </p:spTree>
+    <p:extLst>
+      <p:ext uri="{BB962C8B-B14F-4D97-AF65-F5344CB8AC3E}">
+        <p14:creationId xmlns:p14="http://schemas.microsoft.com/office/powerpoint/2010/main" val="1024086991"/>
+      </p:ext>
+    </p:extLst>
+  </p:cSld>
+  <p:clrMapOvr>
+    <a:masterClrMapping/>
+  </p:clrMapOvr>
+</p:notes>
+</file>
+
+<file path=ppt/notesSlides/notesSlide48.xml><?xml version="1.0" encoding="utf-8"?>
+<p:notes xmlns:a="http://schemas.openxmlformats.org/drawingml/2006/main" xmlns:r="http://schemas.openxmlformats.org/officeDocument/2006/relationships" xmlns:p="http://schemas.openxmlformats.org/presentationml/2006/main">
+  <p:cSld>
+    <p:spTree>
+      <p:nvGrpSpPr>
+        <p:cNvPr id="1" name=""/>
+        <p:cNvGrpSpPr/>
+        <p:nvPr/>
+      </p:nvGrpSpPr>
+      <p:grpSpPr>
+        <a:xfrm>
+          <a:off x="0" y="0"/>
+          <a:ext cx="0" cy="0"/>
+          <a:chOff x="0" y="0"/>
+          <a:chExt cx="0" cy="0"/>
+        </a:xfrm>
+      </p:grpSpPr>
+      <p:sp>
+        <p:nvSpPr>
+          <p:cNvPr id="2" name="Slide Image Placeholder 1"/>
+          <p:cNvSpPr>
+            <a:spLocks noGrp="1" noRot="1" noChangeAspect="1"/>
+          </p:cNvSpPr>
+          <p:nvPr>
+            <p:ph type="sldImg"/>
+          </p:nvPr>
+        </p:nvSpPr>
+        <p:spPr/>
+      </p:sp>
+      <p:sp>
+        <p:nvSpPr>
+          <p:cNvPr id="3" name="Notes Placeholder 2"/>
+          <p:cNvSpPr>
+            <a:spLocks noGrp="1"/>
+          </p:cNvSpPr>
+          <p:nvPr>
+            <p:ph type="body" idx="1"/>
+          </p:nvPr>
+        </p:nvSpPr>
+        <p:spPr/>
+        <p:txBody>
+          <a:bodyPr/>
+          <a:lstStyle/>
+          <a:p>
+            <a:r>
+              <a:rPr lang="en-US" dirty="0"/>
+              <a:t>Let us play the bilingual game. I say a word in English, and you give me the French word. Then we do the reverse.</a:t>
+            </a:r>
+            <a:endParaRPr lang="en-US" dirty="0"/>
+          </a:p>
+        </p:txBody>
+      </p:sp>
+      <p:sp>
+        <p:nvSpPr>
+          <p:cNvPr id="4" name="Slide Number Placeholder 3"/>
+          <p:cNvSpPr>
+            <a:spLocks noGrp="1"/>
+          </p:cNvSpPr>
+          <p:nvPr>
+            <p:ph type="sldNum" sz="quarter" idx="10"/>
+          </p:nvPr>
+        </p:nvSpPr>
+        <p:spPr/>
+        <p:txBody>
+          <a:bodyPr/>
+          <a:lstStyle/>
+          <a:p>
+            <a:fld id="{F7021451-1387-4CA6-816F-3879F97B5CBC}" type="slidenum">
+              <a:rPr lang="en-US"/>
+              <a:t>48</a:t>
+            </a:fld>
+            <a:endParaRPr lang="en-US"/>
+          </a:p>
+        </p:txBody>
+      </p:sp>
+    </p:spTree>
+    <p:extLst>
+      <p:ext uri="{BB962C8B-B14F-4D97-AF65-F5344CB8AC3E}">
+        <p14:creationId xmlns:p14="http://schemas.microsoft.com/office/powerpoint/2010/main" val="1024086991"/>
+      </p:ext>
+    </p:extLst>
+  </p:cSld>
+  <p:clrMapOvr>
+    <a:masterClrMapping/>
+  </p:clrMapOvr>
+</p:notes>
+</file>
+
+<file path=ppt/notesSlides/notesSlide49.xml><?xml version="1.0" encoding="utf-8"?>
+<p:notes xmlns:a="http://schemas.openxmlformats.org/drawingml/2006/main" xmlns:r="http://schemas.openxmlformats.org/officeDocument/2006/relationships" xmlns:p="http://schemas.openxmlformats.org/presentationml/2006/main">
+  <p:cSld>
+    <p:spTree>
+      <p:nvGrpSpPr>
+        <p:cNvPr id="1" name=""/>
+        <p:cNvGrpSpPr/>
+        <p:nvPr/>
+      </p:nvGrpSpPr>
+      <p:grpSpPr>
+        <a:xfrm>
+          <a:off x="0" y="0"/>
+          <a:ext cx="0" cy="0"/>
+          <a:chOff x="0" y="0"/>
+          <a:chExt cx="0" cy="0"/>
+        </a:xfrm>
+      </p:grpSpPr>
+      <p:sp>
+        <p:nvSpPr>
+          <p:cNvPr id="2" name="Slide Image Placeholder 1"/>
+          <p:cNvSpPr>
+            <a:spLocks noGrp="1" noRot="1" noChangeAspect="1"/>
+          </p:cNvSpPr>
+          <p:nvPr>
+            <p:ph type="sldImg"/>
+          </p:nvPr>
+        </p:nvSpPr>
+        <p:spPr/>
+      </p:sp>
+      <p:sp>
+        <p:nvSpPr>
+          <p:cNvPr id="3" name="Notes Placeholder 2"/>
+          <p:cNvSpPr>
+            <a:spLocks noGrp="1"/>
+          </p:cNvSpPr>
+          <p:nvPr>
+            <p:ph type="body" idx="1"/>
+          </p:nvPr>
+        </p:nvSpPr>
+        <p:spPr/>
+        <p:txBody>
+          <a:bodyPr/>
+          <a:lstStyle/>
+          <a:p>
+            <a:r>
+              <a:rPr lang="en-US" dirty="0"/>
+              <a:t>I record this information in the official logbook of the class after the lesson.</a:t>
+            </a:r>
+            <a:endParaRPr lang="en-US" dirty="0"/>
+          </a:p>
+        </p:txBody>
+      </p:sp>
+      <p:sp>
+        <p:nvSpPr>
+          <p:cNvPr id="4" name="Slide Number Placeholder 3"/>
+          <p:cNvSpPr>
+            <a:spLocks noGrp="1"/>
+          </p:cNvSpPr>
+          <p:nvPr>
+            <p:ph type="sldNum" sz="quarter" idx="10"/>
+          </p:nvPr>
+        </p:nvSpPr>
+        <p:spPr/>
+        <p:txBody>
+          <a:bodyPr/>
+          <a:lstStyle/>
+          <a:p>
+            <a:fld id="{F7021451-1387-4CA6-816F-3879F97B5CBC}" type="slidenum">
+              <a:rPr lang="en-US"/>
+              <a:t>49</a:t>
             </a:fld>
             <a:endParaRPr lang="en-US"/>
           </a:p>
@@ -4197,6 +4468,358 @@
 </p:notes>
 </file>
 
+<file path=ppt/notesSlides/notesSlide50.xml><?xml version="1.0" encoding="utf-8"?>
+<p:notes xmlns:a="http://schemas.openxmlformats.org/drawingml/2006/main" xmlns:r="http://schemas.openxmlformats.org/officeDocument/2006/relationships" xmlns:p="http://schemas.openxmlformats.org/presentationml/2006/main">
+  <p:cSld>
+    <p:spTree>
+      <p:nvGrpSpPr>
+        <p:cNvPr id="1" name=""/>
+        <p:cNvGrpSpPr/>
+        <p:nvPr/>
+      </p:nvGrpSpPr>
+      <p:grpSpPr>
+        <a:xfrm>
+          <a:off x="0" y="0"/>
+          <a:ext cx="0" cy="0"/>
+          <a:chOff x="0" y="0"/>
+          <a:chExt cx="0" cy="0"/>
+        </a:xfrm>
+      </p:grpSpPr>
+      <p:sp>
+        <p:nvSpPr>
+          <p:cNvPr id="2" name="Slide Image Placeholder 1"/>
+          <p:cNvSpPr>
+            <a:spLocks noGrp="1" noRot="1" noChangeAspect="1"/>
+          </p:cNvSpPr>
+          <p:nvPr>
+            <p:ph type="sldImg"/>
+          </p:nvPr>
+        </p:nvSpPr>
+        <p:spPr/>
+      </p:sp>
+      <p:sp>
+        <p:nvSpPr>
+          <p:cNvPr id="3" name="Notes Placeholder 2"/>
+          <p:cNvSpPr>
+            <a:spLocks noGrp="1"/>
+          </p:cNvSpPr>
+          <p:nvPr>
+            <p:ph type="body" idx="1"/>
+          </p:nvPr>
+        </p:nvSpPr>
+        <p:spPr/>
+        <p:txBody>
+          <a:bodyPr/>
+          <a:lstStyle/>
+          <a:p>
+            <a:r>
+              <a:rPr lang="en-US" dirty="0"/>
+              <a:t>I complete the second page of the logbook: the matter taught, the evaluation, the homework and the attendance.</a:t>
+            </a:r>
+            <a:endParaRPr lang="en-US" dirty="0"/>
+          </a:p>
+        </p:txBody>
+      </p:sp>
+      <p:sp>
+        <p:nvSpPr>
+          <p:cNvPr id="4" name="Slide Number Placeholder 3"/>
+          <p:cNvSpPr>
+            <a:spLocks noGrp="1"/>
+          </p:cNvSpPr>
+          <p:nvPr>
+            <p:ph type="sldNum" sz="quarter" idx="10"/>
+          </p:nvPr>
+        </p:nvSpPr>
+        <p:spPr/>
+        <p:txBody>
+          <a:bodyPr/>
+          <a:lstStyle/>
+          <a:p>
+            <a:fld id="{F7021451-1387-4CA6-816F-3879F97B5CBC}" type="slidenum">
+              <a:rPr lang="en-US"/>
+              <a:t>50</a:t>
+            </a:fld>
+            <a:endParaRPr lang="en-US"/>
+          </a:p>
+        </p:txBody>
+      </p:sp>
+    </p:spTree>
+    <p:extLst>
+      <p:ext uri="{BB962C8B-B14F-4D97-AF65-F5344CB8AC3E}">
+        <p14:creationId xmlns:p14="http://schemas.microsoft.com/office/powerpoint/2010/main" val="1024086991"/>
+      </p:ext>
+    </p:extLst>
+  </p:cSld>
+  <p:clrMapOvr>
+    <a:masterClrMapping/>
+  </p:clrMapOvr>
+</p:notes>
+</file>
+
+<file path=ppt/notesSlides/notesSlide51.xml><?xml version="1.0" encoding="utf-8"?>
+<p:notes xmlns:a="http://schemas.openxmlformats.org/drawingml/2006/main" xmlns:r="http://schemas.openxmlformats.org/officeDocument/2006/relationships" xmlns:p="http://schemas.openxmlformats.org/presentationml/2006/main">
+  <p:cSld>
+    <p:spTree>
+      <p:nvGrpSpPr>
+        <p:cNvPr id="1" name=""/>
+        <p:cNvGrpSpPr/>
+        <p:nvPr/>
+      </p:nvGrpSpPr>
+      <p:grpSpPr>
+        <a:xfrm>
+          <a:off x="0" y="0"/>
+          <a:ext cx="0" cy="0"/>
+          <a:chOff x="0" y="0"/>
+          <a:chExt cx="0" cy="0"/>
+        </a:xfrm>
+      </p:grpSpPr>
+      <p:sp>
+        <p:nvSpPr>
+          <p:cNvPr id="2" name="Slide Image Placeholder 1"/>
+          <p:cNvSpPr>
+            <a:spLocks noGrp="1" noRot="1" noChangeAspect="1"/>
+          </p:cNvSpPr>
+          <p:nvPr>
+            <p:ph type="sldImg"/>
+          </p:nvPr>
+        </p:nvSpPr>
+        <p:spPr/>
+      </p:sp>
+      <p:sp>
+        <p:nvSpPr>
+          <p:cNvPr id="3" name="Notes Placeholder 2"/>
+          <p:cNvSpPr>
+            <a:spLocks noGrp="1"/>
+          </p:cNvSpPr>
+          <p:nvPr>
+            <p:ph type="body" idx="1"/>
+          </p:nvPr>
+        </p:nvSpPr>
+        <p:spPr/>
+        <p:txBody>
+          <a:bodyPr/>
+          <a:lstStyle/>
+          <a:p>
+            <a:r>
+              <a:rPr lang="en-US" dirty="0"/>
+              <a:t>This slide is for me, the teacher: it gives the timing of the lesson and what to do if the projector is not available.</a:t>
+            </a:r>
+            <a:endParaRPr lang="en-US" dirty="0"/>
+          </a:p>
+        </p:txBody>
+      </p:sp>
+      <p:sp>
+        <p:nvSpPr>
+          <p:cNvPr id="4" name="Slide Number Placeholder 3"/>
+          <p:cNvSpPr>
+            <a:spLocks noGrp="1"/>
+          </p:cNvSpPr>
+          <p:nvPr>
+            <p:ph type="sldNum" sz="quarter" idx="10"/>
+          </p:nvPr>
+        </p:nvSpPr>
+        <p:spPr/>
+        <p:txBody>
+          <a:bodyPr/>
+          <a:lstStyle/>
+          <a:p>
+            <a:fld id="{F7021451-1387-4CA6-816F-3879F97B5CBC}" type="slidenum">
+              <a:rPr lang="en-US"/>
+              <a:t>51</a:t>
+            </a:fld>
+            <a:endParaRPr lang="en-US"/>
+          </a:p>
+        </p:txBody>
+      </p:sp>
+    </p:spTree>
+    <p:extLst>
+      <p:ext uri="{BB962C8B-B14F-4D97-AF65-F5344CB8AC3E}">
+        <p14:creationId xmlns:p14="http://schemas.microsoft.com/office/powerpoint/2010/main" val="1024086991"/>
+      </p:ext>
+    </p:extLst>
+  </p:cSld>
+  <p:clrMapOvr>
+    <a:masterClrMapping/>
+  </p:clrMapOvr>
+</p:notes>
+</file>
+
+<file path=ppt/notesSlides/notesSlide52.xml><?xml version="1.0" encoding="utf-8"?>
+<p:notes xmlns:a="http://schemas.openxmlformats.org/drawingml/2006/main" xmlns:r="http://schemas.openxmlformats.org/officeDocument/2006/relationships" xmlns:p="http://schemas.openxmlformats.org/presentationml/2006/main">
+  <p:cSld>
+    <p:spTree>
+      <p:nvGrpSpPr>
+        <p:cNvPr id="1" name=""/>
+        <p:cNvGrpSpPr/>
+        <p:nvPr/>
+      </p:nvGrpSpPr>
+      <p:grpSpPr>
+        <a:xfrm>
+          <a:off x="0" y="0"/>
+          <a:ext cx="0" cy="0"/>
+          <a:chOff x="0" y="0"/>
+          <a:chExt cx="0" cy="0"/>
+        </a:xfrm>
+      </p:grpSpPr>
+      <p:sp>
+        <p:nvSpPr>
+          <p:cNvPr id="2" name="Slide Image Placeholder 1"/>
+          <p:cNvSpPr>
+            <a:spLocks noGrp="1" noRot="1" noChangeAspect="1"/>
+          </p:cNvSpPr>
+          <p:nvPr>
+            <p:ph type="sldImg"/>
+          </p:nvPr>
+        </p:nvSpPr>
+        <p:spPr/>
+      </p:sp>
+      <p:sp>
+        <p:nvSpPr>
+          <p:cNvPr id="3" name="Notes Placeholder 2"/>
+          <p:cNvSpPr>
+            <a:spLocks noGrp="1"/>
+          </p:cNvSpPr>
+          <p:nvPr>
+            <p:ph type="body" idx="1"/>
+          </p:nvPr>
+        </p:nvSpPr>
+        <p:spPr/>
+        <p:txBody>
+          <a:bodyPr/>
+          <a:lstStyle/>
+          <a:p>
+            <a:r>
+              <a:rPr lang="en-US" dirty="0"/>
+              <a:t>Take your time to copy this part; we will continue together.</a:t>
+            </a:r>
+            <a:endParaRPr lang="en-US" dirty="0"/>
+          </a:p>
+        </p:txBody>
+      </p:sp>
+      <p:sp>
+        <p:nvSpPr>
+          <p:cNvPr id="4" name="Slide Number Placeholder 3"/>
+          <p:cNvSpPr>
+            <a:spLocks noGrp="1"/>
+          </p:cNvSpPr>
+          <p:nvPr>
+            <p:ph type="sldNum" sz="quarter" idx="10"/>
+          </p:nvPr>
+        </p:nvSpPr>
+        <p:spPr/>
+        <p:txBody>
+          <a:bodyPr/>
+          <a:lstStyle/>
+          <a:p>
+            <a:fld id="{F7021451-1387-4CA6-816F-3879F97B5CBC}" type="slidenum">
+              <a:rPr lang="en-US"/>
+              <a:t>52</a:t>
+            </a:fld>
+            <a:endParaRPr lang="en-US"/>
+          </a:p>
+        </p:txBody>
+      </p:sp>
+    </p:spTree>
+    <p:extLst>
+      <p:ext uri="{BB962C8B-B14F-4D97-AF65-F5344CB8AC3E}">
+        <p14:creationId xmlns:p14="http://schemas.microsoft.com/office/powerpoint/2010/main" val="1024086991"/>
+      </p:ext>
+    </p:extLst>
+  </p:cSld>
+  <p:clrMapOvr>
+    <a:masterClrMapping/>
+  </p:clrMapOvr>
+</p:notes>
+</file>
+
+<file path=ppt/notesSlides/notesSlide53.xml><?xml version="1.0" encoding="utf-8"?>
+<p:notes xmlns:a="http://schemas.openxmlformats.org/drawingml/2006/main" xmlns:r="http://schemas.openxmlformats.org/officeDocument/2006/relationships" xmlns:p="http://schemas.openxmlformats.org/presentationml/2006/main">
+  <p:cSld>
+    <p:spTree>
+      <p:nvGrpSpPr>
+        <p:cNvPr id="1" name=""/>
+        <p:cNvGrpSpPr/>
+        <p:nvPr/>
+      </p:nvGrpSpPr>
+      <p:grpSpPr>
+        <a:xfrm>
+          <a:off x="0" y="0"/>
+          <a:ext cx="0" cy="0"/>
+          <a:chOff x="0" y="0"/>
+          <a:chExt cx="0" cy="0"/>
+        </a:xfrm>
+      </p:grpSpPr>
+      <p:sp>
+        <p:nvSpPr>
+          <p:cNvPr id="2" name="Slide Image Placeholder 1"/>
+          <p:cNvSpPr>
+            <a:spLocks noGrp="1" noRot="1" noChangeAspect="1"/>
+          </p:cNvSpPr>
+          <p:nvPr>
+            <p:ph type="sldImg"/>
+          </p:nvPr>
+        </p:nvSpPr>
+        <p:spPr/>
+      </p:sp>
+      <p:sp>
+        <p:nvSpPr>
+          <p:cNvPr id="3" name="Notes Placeholder 2"/>
+          <p:cNvSpPr>
+            <a:spLocks noGrp="1"/>
+          </p:cNvSpPr>
+          <p:nvPr>
+            <p:ph type="body" idx="1"/>
+          </p:nvPr>
+        </p:nvSpPr>
+        <p:spPr/>
+        <p:txBody>
+          <a:bodyPr/>
+          <a:lstStyle/>
+          <a:p>
+            <a:r>
+              <a:rPr lang="en-US" dirty="0"/>
+              <a:t>These are the references and picture credits used to prepare this lesson.</a:t>
+            </a:r>
+            <a:endParaRPr lang="en-US" dirty="0"/>
+          </a:p>
+        </p:txBody>
+      </p:sp>
+      <p:sp>
+        <p:nvSpPr>
+          <p:cNvPr id="4" name="Slide Number Placeholder 3"/>
+          <p:cNvSpPr>
+            <a:spLocks noGrp="1"/>
+          </p:cNvSpPr>
+          <p:nvPr>
+            <p:ph type="sldNum" sz="quarter" idx="10"/>
+          </p:nvPr>
+        </p:nvSpPr>
+        <p:spPr/>
+        <p:txBody>
+          <a:bodyPr/>
+          <a:lstStyle/>
+          <a:p>
+            <a:fld id="{F7021451-1387-4CA6-816F-3879F97B5CBC}" type="slidenum">
+              <a:rPr lang="en-US"/>
+              <a:t>53</a:t>
+            </a:fld>
+            <a:endParaRPr lang="en-US"/>
+          </a:p>
+        </p:txBody>
+      </p:sp>
+    </p:spTree>
+    <p:extLst>
+      <p:ext uri="{BB962C8B-B14F-4D97-AF65-F5344CB8AC3E}">
+        <p14:creationId xmlns:p14="http://schemas.microsoft.com/office/powerpoint/2010/main" val="1024086991"/>
+      </p:ext>
+    </p:extLst>
+  </p:cSld>
+  <p:clrMapOvr>
+    <a:masterClrMapping/>
+  </p:clrMapOvr>
+</p:notes>
+</file>
+
 <file path=ppt/notesSlides/notesSlide6.xml><?xml version="1.0" encoding="utf-8"?>
 <p:notes xmlns:a="http://schemas.openxmlformats.org/drawingml/2006/main" xmlns:r="http://schemas.openxmlformats.org/officeDocument/2006/relationships" xmlns:p="http://schemas.openxmlformats.org/presentationml/2006/main">
   <p:cSld>
@@ -4507,7 +5130,7 @@
           <a:p>
             <a:r>
               <a:rPr lang="en-US" dirty="0"/>
-              <a:t>Listen carefully to this situation from real life. A friend of Aboubakar's family wants to start a farm near Buea because the soil is very fertile. Another friend says, "It is dangerous! You will live near an active volcano." Think about it, because I am going to ask you some questions.</a:t>
+              <a:t>Listen carefully to this situation from real life. A friend of Aboubakar's family wants to start a farm near Buea because the soil is very fertile. Another friend warns him: "It is dangerous! You will live near an active volcano." The farmer asks: "Is a volcano only a danger, or can it also be useful, and how can we live safely near it?" Think about it, because I am going to ask you some questions.</a:t>
             </a:r>
             <a:endParaRPr lang="en-US" dirty="0"/>
           </a:p>
@@ -6190,7 +6813,7 @@
                 <a:ea typeface="Times New Roman" pitchFamily="34" charset="-122"/>
                 <a:cs typeface="Times New Roman" pitchFamily="34" charset="-120"/>
               </a:rPr>
-              <a:t>The land is fertile but near a dangerous volcano.</a:t>
+              <a:t>The farmer must choose between fertile land and the danger of a volcano, and does not know how to live safely there.</a:t>
             </a:r>
             <a:endParaRPr lang="en-US" sz="4000" dirty="0"/>
           </a:p>
@@ -6847,7 +7470,7 @@
                 <a:ea typeface="Times New Roman" pitchFamily="34" charset="-122"/>
                 <a:cs typeface="Times New Roman" pitchFamily="34" charset="-120"/>
               </a:rPr>
-              <a:t>What can people do to stay safe?</a:t>
+              <a:t>Give one advantage of the area.</a:t>
             </a:r>
             <a:endParaRPr lang="en-US" sz="4000" dirty="0"/>
           </a:p>
@@ -7066,7 +7689,7 @@
                 <a:ea typeface="Times New Roman" pitchFamily="34" charset="-122"/>
                 <a:cs typeface="Times New Roman" pitchFamily="34" charset="-120"/>
               </a:rPr>
-              <a:t>Listen to warnings and leave when the volcano erupts.</a:t>
+              <a:t>The volcanic soil is very fertile.</a:t>
             </a:r>
             <a:endParaRPr lang="en-US" sz="4000" dirty="0"/>
           </a:p>
@@ -9836,7 +10459,7 @@
                 <a:ea typeface="Times New Roman" pitchFamily="34" charset="-122"/>
                 <a:cs typeface="Times New Roman" pitchFamily="34" charset="-120"/>
               </a:rPr>
-              <a:t>How can volcanoes give electricity?</a:t>
+              <a:t>How can volcanic areas produce electricity?</a:t>
             </a:r>
             <a:endParaRPr lang="en-US" sz="4000" dirty="0"/>
           </a:p>
@@ -10055,7 +10678,7 @@
                 <a:ea typeface="Times New Roman" pitchFamily="34" charset="-122"/>
                 <a:cs typeface="Times New Roman" pitchFamily="34" charset="-120"/>
               </a:rPr>
-              <a:t>Hot steam from the ground turns machines.</a:t>
+              <a:t>Hot steam from the ground turns machines (turbines).</a:t>
             </a:r>
             <a:endParaRPr lang="en-US" sz="4000" dirty="0"/>
           </a:p>
@@ -10449,7 +11072,7 @@
         <p:spPr>
           <a:xfrm>
             <a:off x="0" y="658368"/>
-            <a:ext cx="3840480" cy="5833872"/>
+            <a:ext cx="5120640" cy="5833872"/>
           </a:xfrm>
           <a:prstGeom prst="rect">
             <a:avLst/>
@@ -10464,8 +11087,8 @@
         </p:nvSpPr>
         <p:spPr>
           <a:xfrm>
-            <a:off x="4069080" y="1005840"/>
-            <a:ext cx="7802575" cy="731520"/>
+            <a:off x="5349240" y="1005840"/>
+            <a:ext cx="6522415" cy="731520"/>
           </a:xfrm>
           <a:prstGeom prst="rect">
             <a:avLst/>
@@ -10505,8 +11128,8 @@
         </p:nvSpPr>
         <p:spPr>
           <a:xfrm>
-            <a:off x="4069080" y="1783080"/>
-            <a:ext cx="7802575" cy="4663440"/>
+            <a:off x="5349240" y="1783080"/>
+            <a:ext cx="6522415" cy="4663440"/>
           </a:xfrm>
           <a:prstGeom prst="rect">
             <a:avLst/>
@@ -10570,7 +11193,7 @@
                 <a:ea typeface="Times New Roman" pitchFamily="34" charset="-122"/>
                 <a:cs typeface="Times New Roman" pitchFamily="34" charset="-120"/>
               </a:rPr>
-              <a:t>It is an event that can harm people and property.</a:t>
+              <a:t>It is an event that can harm people, property and the environment.</a:t>
             </a:r>
             <a:endParaRPr lang="en-US" sz="4000" dirty="0"/>
           </a:p>
@@ -10590,7 +11213,7 @@
                 <a:ea typeface="Times New Roman" pitchFamily="34" charset="-122"/>
                 <a:cs typeface="Times New Roman" pitchFamily="34" charset="-120"/>
               </a:rPr>
-              <a:t>Geothermal energy: </a:t>
+              <a:t>Resource: </a:t>
             </a:r>
             <a:pPr algn="l" indent="0" marL="0">
               <a:spcAft>
@@ -10607,7 +11230,7 @@
                 <a:ea typeface="Times New Roman" pitchFamily="34" charset="-122"/>
                 <a:cs typeface="Times New Roman" pitchFamily="34" charset="-120"/>
               </a:rPr>
-              <a:t>It is energy produced from the heat inside the Earth.</a:t>
+              <a:t>It is anything in nature that people can use.</a:t>
             </a:r>
             <a:endParaRPr lang="en-US" sz="4000" dirty="0"/>
           </a:p>
@@ -10742,7 +11365,7 @@
         <p:spPr>
           <a:xfrm>
             <a:off x="0" y="658368"/>
-            <a:ext cx="3840480" cy="5833872"/>
+            <a:ext cx="5120640" cy="5833872"/>
           </a:xfrm>
           <a:prstGeom prst="rect">
             <a:avLst/>
@@ -10757,8 +11380,8 @@
         </p:nvSpPr>
         <p:spPr>
           <a:xfrm>
-            <a:off x="4069080" y="1005840"/>
-            <a:ext cx="7802575" cy="731520"/>
+            <a:off x="5349240" y="1005840"/>
+            <a:ext cx="6522415" cy="731520"/>
           </a:xfrm>
           <a:prstGeom prst="rect">
             <a:avLst/>
@@ -10784,7 +11407,7 @@
                 <a:ea typeface="Times New Roman" pitchFamily="34" charset="-122"/>
                 <a:cs typeface="Times New Roman" pitchFamily="34" charset="-120"/>
               </a:rPr>
-              <a:t>1. Volcanic Hazards</a:t>
+              <a:t>DEFINITIONS (continued)</a:t>
             </a:r>
             <a:endParaRPr lang="en-US" sz="3600" dirty="0"/>
           </a:p>
@@ -10798,8 +11421,8 @@
         </p:nvSpPr>
         <p:spPr>
           <a:xfrm>
-            <a:off x="4069080" y="1783080"/>
-            <a:ext cx="7802575" cy="4663440"/>
+            <a:off x="5349240" y="1783080"/>
+            <a:ext cx="6522415" cy="4663440"/>
           </a:xfrm>
           <a:prstGeom prst="rect">
             <a:avLst/>
@@ -10818,7 +11441,7 @@
               <a:buNone/>
             </a:pPr>
             <a:r>
-              <a:rPr lang="en-US" sz="4000" i="1" dirty="0">
+              <a:rPr lang="en-US" sz="4000" b="1" dirty="0">
                 <a:solidFill>
                   <a:srgbClr val="111111"/>
                 </a:solidFill>
@@ -10826,11 +11449,8 @@
                 <a:ea typeface="Times New Roman" pitchFamily="34" charset="-122"/>
                 <a:cs typeface="Times New Roman" pitchFamily="34" charset="-120"/>
               </a:rPr>
-              <a:t>Volcanoes cause the following hazards:</a:t>
-            </a:r>
-            <a:endParaRPr lang="en-US" sz="4000" dirty="0"/>
-          </a:p>
-          <a:p>
+              <a:t>Geothermal energy: </a:t>
+            </a:r>
             <a:pPr algn="l" indent="0" marL="0">
               <a:spcAft>
                 <a:spcPts val="800"/>
@@ -10838,7 +11458,7 @@
               <a:buNone/>
             </a:pPr>
             <a:r>
-              <a:rPr lang="en-US" sz="4000" b="1" dirty="0">
+              <a:rPr lang="en-US" sz="4000" dirty="0">
                 <a:solidFill>
                   <a:srgbClr val="111111"/>
                 </a:solidFill>
@@ -10846,61 +11466,7 @@
                 <a:ea typeface="Times New Roman" pitchFamily="34" charset="-122"/>
                 <a:cs typeface="Times New Roman" pitchFamily="34" charset="-120"/>
               </a:rPr>
-              <a:t>Lava and ash: </a:t>
-            </a:r>
-            <a:pPr algn="l" indent="0" marL="0">
-              <a:spcAft>
-                <a:spcPts val="800"/>
-              </a:spcAft>
-              <a:buNone/>
-            </a:pPr>
-            <a:r>
-              <a:rPr lang="en-US" sz="4000" dirty="0">
-                <a:solidFill>
-                  <a:srgbClr val="111111"/>
-                </a:solidFill>
-                <a:latin typeface="Times New Roman" pitchFamily="34" charset="0"/>
-                <a:ea typeface="Times New Roman" pitchFamily="34" charset="-122"/>
-                <a:cs typeface="Times New Roman" pitchFamily="34" charset="-120"/>
-              </a:rPr>
-              <a:t>They burn and bury houses, farms and roads.</a:t>
-            </a:r>
-            <a:endParaRPr lang="en-US" sz="4000" dirty="0"/>
-          </a:p>
-          <a:p>
-            <a:pPr algn="l" indent="0" marL="0">
-              <a:spcAft>
-                <a:spcPts val="800"/>
-              </a:spcAft>
-              <a:buNone/>
-            </a:pPr>
-            <a:r>
-              <a:rPr lang="en-US" sz="4000" b="1" dirty="0">
-                <a:solidFill>
-                  <a:srgbClr val="111111"/>
-                </a:solidFill>
-                <a:latin typeface="Times New Roman" pitchFamily="34" charset="0"/>
-                <a:ea typeface="Times New Roman" pitchFamily="34" charset="-122"/>
-                <a:cs typeface="Times New Roman" pitchFamily="34" charset="-120"/>
-              </a:rPr>
-              <a:t>Gases: </a:t>
-            </a:r>
-            <a:pPr algn="l" indent="0" marL="0">
-              <a:spcAft>
-                <a:spcPts val="800"/>
-              </a:spcAft>
-              <a:buNone/>
-            </a:pPr>
-            <a:r>
-              <a:rPr lang="en-US" sz="4000" dirty="0">
-                <a:solidFill>
-                  <a:srgbClr val="111111"/>
-                </a:solidFill>
-                <a:latin typeface="Times New Roman" pitchFamily="34" charset="0"/>
-                <a:ea typeface="Times New Roman" pitchFamily="34" charset="-122"/>
-                <a:cs typeface="Times New Roman" pitchFamily="34" charset="-120"/>
-              </a:rPr>
-              <a:t>Poisonous gases from Lake Nyos killed about 1,700 people in 1986.</a:t>
+              <a:t>It is energy produced from the heat inside the Earth.</a:t>
             </a:r>
             <a:endParaRPr lang="en-US" sz="4000" dirty="0"/>
           </a:p>
@@ -12027,9 +12593,129 @@
           </a:p>
         </p:txBody>
       </p:sp>
+      <p:sp>
+        <p:nvSpPr>
+          <p:cNvPr id="3" name="Text 1"/>
+          <p:cNvSpPr/>
+          <p:nvPr/>
+        </p:nvSpPr>
+        <p:spPr>
+          <a:xfrm>
+            <a:off x="365760" y="1005840"/>
+            <a:ext cx="11460175" cy="731520"/>
+          </a:xfrm>
+          <a:prstGeom prst="rect">
+            <a:avLst/>
+          </a:prstGeom>
+          <a:noFill/>
+          <a:ln/>
+        </p:spPr>
+        <p:txBody>
+          <a:bodyPr wrap="square" lIns="0" tIns="0" rIns="0" bIns="0" rtlCol="0" anchor="ctr">
+            <a:normAutofit/>
+          </a:bodyPr>
+          <a:lstStyle/>
+          <a:p>
+            <a:pPr algn="ctr" indent="0" marL="0">
+              <a:buNone/>
+            </a:pPr>
+            <a:r>
+              <a:rPr lang="en-US" sz="3600" b="1" dirty="0">
+                <a:solidFill>
+                  <a:srgbClr val="990011"/>
+                </a:solidFill>
+                <a:latin typeface="Times New Roman" pitchFamily="34" charset="0"/>
+                <a:ea typeface="Times New Roman" pitchFamily="34" charset="-122"/>
+                <a:cs typeface="Times New Roman" pitchFamily="34" charset="-120"/>
+              </a:rPr>
+              <a:t>1. Volcanic Hazards</a:t>
+            </a:r>
+            <a:endParaRPr lang="en-US" sz="3600" dirty="0"/>
+          </a:p>
+        </p:txBody>
+      </p:sp>
+      <p:sp>
+        <p:nvSpPr>
+          <p:cNvPr id="4" name="Text 2"/>
+          <p:cNvSpPr/>
+          <p:nvPr/>
+        </p:nvSpPr>
+        <p:spPr>
+          <a:xfrm>
+            <a:off x="365760" y="1783080"/>
+            <a:ext cx="4846320" cy="4617720"/>
+          </a:xfrm>
+          <a:prstGeom prst="rect">
+            <a:avLst/>
+          </a:prstGeom>
+          <a:noFill/>
+          <a:ln/>
+        </p:spPr>
+        <p:txBody>
+          <a:bodyPr wrap="square" lIns="0" tIns="0" rIns="0" bIns="0" rtlCol="0" anchor="t"/>
+          <a:lstStyle/>
+          <a:p>
+            <a:pPr algn="l" indent="0" marL="0">
+              <a:spcAft>
+                <a:spcPts val="800"/>
+              </a:spcAft>
+              <a:buNone/>
+            </a:pPr>
+            <a:r>
+              <a:rPr lang="en-US" sz="3600" i="1" dirty="0">
+                <a:solidFill>
+                  <a:srgbClr val="111111"/>
+                </a:solidFill>
+                <a:latin typeface="Times New Roman" pitchFamily="34" charset="0"/>
+                <a:ea typeface="Times New Roman" pitchFamily="34" charset="-122"/>
+                <a:cs typeface="Times New Roman" pitchFamily="34" charset="-120"/>
+              </a:rPr>
+              <a:t>Volcanoes cause the following hazards:</a:t>
+            </a:r>
+            <a:endParaRPr lang="en-US" sz="3600" dirty="0"/>
+          </a:p>
+          <a:p>
+            <a:pPr algn="l" indent="0" marL="0">
+              <a:spcAft>
+                <a:spcPts val="800"/>
+              </a:spcAft>
+              <a:buNone/>
+            </a:pPr>
+            <a:r>
+              <a:rPr lang="en-US" sz="3600" b="1" dirty="0">
+                <a:solidFill>
+                  <a:srgbClr val="111111"/>
+                </a:solidFill>
+                <a:latin typeface="Times New Roman" pitchFamily="34" charset="0"/>
+                <a:ea typeface="Times New Roman" pitchFamily="34" charset="-122"/>
+                <a:cs typeface="Times New Roman" pitchFamily="34" charset="-120"/>
+              </a:rPr>
+              <a:t>Lava flows: </a:t>
+            </a:r>
+            <a:pPr algn="l" indent="0" marL="0">
+              <a:spcAft>
+                <a:spcPts val="800"/>
+              </a:spcAft>
+              <a:buNone/>
+            </a:pPr>
+            <a:r>
+              <a:rPr lang="en-US" sz="3600" dirty="0">
+                <a:solidFill>
+                  <a:srgbClr val="111111"/>
+                </a:solidFill>
+                <a:latin typeface="Times New Roman" pitchFamily="34" charset="0"/>
+                <a:ea typeface="Times New Roman" pitchFamily="34" charset="-122"/>
+                <a:cs typeface="Times New Roman" pitchFamily="34" charset="-120"/>
+              </a:rPr>
+              <a:t>They burn and bury houses, farms and roads.</a:t>
+            </a:r>
+            <a:endParaRPr lang="en-US" sz="3600" dirty="0"/>
+          </a:p>
+        </p:txBody>
+      </p:sp>
       <p:pic>
         <p:nvPicPr>
-          <p:cNvPr id="3" name="Image 0" descr="/home/claude/f4/img/minesec_sheet.png">    </p:cNvPr>
+          <p:cNvPr id="5" name="Image 0" descr="/home/claude/f4/img/v2/f4_lavahouse.jpg">    </p:cNvPr>
           <p:cNvPicPr>
             <a:picLocks noChangeAspect="1"/>
           </p:cNvPicPr>
@@ -12043,8 +12729,8 @@
         </p:blipFill>
         <p:spPr>
           <a:xfrm>
-            <a:off x="0" y="658368"/>
-            <a:ext cx="5120640" cy="5833872"/>
+            <a:off x="5349240" y="2071212"/>
+            <a:ext cx="6659575" cy="3693983"/>
           </a:xfrm>
           <a:prstGeom prst="rect">
             <a:avLst/>
@@ -12053,14 +12739,14 @@
       </p:pic>
       <p:sp>
         <p:nvSpPr>
-          <p:cNvPr id="4" name="Text 1"/>
+          <p:cNvPr id="6" name="Text 3"/>
           <p:cNvSpPr/>
           <p:nvPr/>
         </p:nvSpPr>
         <p:spPr>
           <a:xfrm>
-            <a:off x="5349240" y="1005840"/>
-            <a:ext cx="6522415" cy="731520"/>
+            <a:off x="5349240" y="6089904"/>
+            <a:ext cx="6659575" cy="347472"/>
           </a:xfrm>
           <a:prstGeom prst="rect">
             <a:avLst/>
@@ -12069,85 +12755,24 @@
           <a:ln/>
         </p:spPr>
         <p:txBody>
-          <a:bodyPr wrap="square" lIns="0" tIns="0" rIns="0" bIns="0" rtlCol="0" anchor="ctr">
-            <a:normAutofit/>
-          </a:bodyPr>
+          <a:bodyPr wrap="square" lIns="0" tIns="0" rIns="0" bIns="0" rtlCol="0" anchor="ctr"/>
           <a:lstStyle/>
           <a:p>
             <a:pPr algn="ctr" indent="0" marL="0">
               <a:buNone/>
             </a:pPr>
             <a:r>
-              <a:rPr lang="en-US" sz="3600" b="1" dirty="0">
-                <a:solidFill>
-                  <a:srgbClr val="990011"/>
+              <a:rPr lang="en-US" sz="1600" i="1" dirty="0">
+                <a:solidFill>
+                  <a:srgbClr val="555555"/>
                 </a:solidFill>
                 <a:latin typeface="Times New Roman" pitchFamily="34" charset="0"/>
                 <a:ea typeface="Times New Roman" pitchFamily="34" charset="-122"/>
                 <a:cs typeface="Times New Roman" pitchFamily="34" charset="-120"/>
               </a:rPr>
-              <a:t>1. Volcanic Hazards (continued)</a:t>
-            </a:r>
-            <a:endParaRPr lang="en-US" sz="3600" dirty="0"/>
-          </a:p>
-        </p:txBody>
-      </p:sp>
-      <p:sp>
-        <p:nvSpPr>
-          <p:cNvPr id="5" name="Text 2"/>
-          <p:cNvSpPr/>
-          <p:nvPr/>
-        </p:nvSpPr>
-        <p:spPr>
-          <a:xfrm>
-            <a:off x="5349240" y="1783080"/>
-            <a:ext cx="6522415" cy="4663440"/>
-          </a:xfrm>
-          <a:prstGeom prst="rect">
-            <a:avLst/>
-          </a:prstGeom>
-          <a:noFill/>
-          <a:ln/>
-        </p:spPr>
-        <p:txBody>
-          <a:bodyPr wrap="square" lIns="0" tIns="0" rIns="0" bIns="0" rtlCol="0" anchor="t"/>
-          <a:lstStyle/>
-          <a:p>
-            <a:pPr algn="l" indent="0" marL="0">
-              <a:spcAft>
-                <a:spcPts val="800"/>
-              </a:spcAft>
-              <a:buNone/>
-            </a:pPr>
-            <a:r>
-              <a:rPr lang="en-US" sz="4000" b="1" dirty="0">
-                <a:solidFill>
-                  <a:srgbClr val="111111"/>
-                </a:solidFill>
-                <a:latin typeface="Times New Roman" pitchFamily="34" charset="0"/>
-                <a:ea typeface="Times New Roman" pitchFamily="34" charset="-122"/>
-                <a:cs typeface="Times New Roman" pitchFamily="34" charset="-120"/>
-              </a:rPr>
-              <a:t>Earthquakes: </a:t>
-            </a:r>
-            <a:pPr algn="l" indent="0" marL="0">
-              <a:spcAft>
-                <a:spcPts val="800"/>
-              </a:spcAft>
-              <a:buNone/>
-            </a:pPr>
-            <a:r>
-              <a:rPr lang="en-US" sz="4000" dirty="0">
-                <a:solidFill>
-                  <a:srgbClr val="111111"/>
-                </a:solidFill>
-                <a:latin typeface="Times New Roman" pitchFamily="34" charset="0"/>
-                <a:ea typeface="Times New Roman" pitchFamily="34" charset="-122"/>
-                <a:cs typeface="Times New Roman" pitchFamily="34" charset="-120"/>
-              </a:rPr>
-              <a:t>Earthquakes often happen before and during eruptions.</a:t>
-            </a:r>
-            <a:endParaRPr lang="en-US" sz="4000" dirty="0"/>
+              <a:t>Illustration: lava over a road</a:t>
+            </a:r>
+            <a:endParaRPr lang="en-US" sz="1600" dirty="0"/>
           </a:p>
         </p:txBody>
       </p:sp>
@@ -12280,7 +12905,7 @@
         <p:spPr>
           <a:xfrm>
             <a:off x="0" y="658368"/>
-            <a:ext cx="2468880" cy="5833872"/>
+            <a:ext cx="5120640" cy="5833872"/>
           </a:xfrm>
           <a:prstGeom prst="rect">
             <a:avLst/>
@@ -12295,8 +12920,8 @@
         </p:nvSpPr>
         <p:spPr>
           <a:xfrm>
-            <a:off x="2697480" y="1005840"/>
-            <a:ext cx="9174175" cy="731520"/>
+            <a:off x="5349240" y="1005840"/>
+            <a:ext cx="6522415" cy="731520"/>
           </a:xfrm>
           <a:prstGeom prst="rect">
             <a:avLst/>
@@ -12322,7 +12947,7 @@
                 <a:ea typeface="Times New Roman" pitchFamily="34" charset="-122"/>
                 <a:cs typeface="Times New Roman" pitchFamily="34" charset="-120"/>
               </a:rPr>
-              <a:t>2. Importance of Volcanoes</a:t>
+              <a:t>1. Volcanic Hazards</a:t>
             </a:r>
             <a:endParaRPr lang="en-US" sz="3600" dirty="0"/>
           </a:p>
@@ -12336,8 +12961,8 @@
         </p:nvSpPr>
         <p:spPr>
           <a:xfrm>
-            <a:off x="2697480" y="1783080"/>
-            <a:ext cx="9174175" cy="4663440"/>
+            <a:off x="5349240" y="1783080"/>
+            <a:ext cx="6522415" cy="4663440"/>
           </a:xfrm>
           <a:prstGeom prst="rect">
             <a:avLst/>
@@ -12356,7 +12981,7 @@
               <a:buNone/>
             </a:pPr>
             <a:r>
-              <a:rPr lang="en-US" sz="4000" i="1" dirty="0">
+              <a:rPr lang="en-US" sz="4000" b="1" dirty="0">
                 <a:solidFill>
                   <a:srgbClr val="111111"/>
                 </a:solidFill>
@@ -12364,11 +12989,8 @@
                 <a:ea typeface="Times New Roman" pitchFamily="34" charset="-122"/>
                 <a:cs typeface="Times New Roman" pitchFamily="34" charset="-120"/>
               </a:rPr>
-              <a:t>Volcanoes are useful to man in the following ways:</a:t>
-            </a:r>
-            <a:endParaRPr lang="en-US" sz="4000" dirty="0"/>
-          </a:p>
-          <a:p>
+              <a:t>Ash falls: </a:t>
+            </a:r>
             <a:pPr algn="l" indent="0" marL="0">
               <a:spcAft>
                 <a:spcPts val="800"/>
@@ -12376,7 +12998,7 @@
               <a:buNone/>
             </a:pPr>
             <a:r>
-              <a:rPr lang="en-US" sz="4000" b="1" dirty="0">
+              <a:rPr lang="en-US" sz="4000" dirty="0">
                 <a:solidFill>
                   <a:srgbClr val="111111"/>
                 </a:solidFill>
@@ -12384,61 +13006,7 @@
                 <a:ea typeface="Times New Roman" pitchFamily="34" charset="-122"/>
                 <a:cs typeface="Times New Roman" pitchFamily="34" charset="-120"/>
               </a:rPr>
-              <a:t>Fertile soils: </a:t>
-            </a:r>
-            <a:pPr algn="l" indent="0" marL="0">
-              <a:spcAft>
-                <a:spcPts val="800"/>
-              </a:spcAft>
-              <a:buNone/>
-            </a:pPr>
-            <a:r>
-              <a:rPr lang="en-US" sz="4000" dirty="0">
-                <a:solidFill>
-                  <a:srgbClr val="111111"/>
-                </a:solidFill>
-                <a:latin typeface="Times New Roman" pitchFamily="34" charset="0"/>
-                <a:ea typeface="Times New Roman" pitchFamily="34" charset="-122"/>
-                <a:cs typeface="Times New Roman" pitchFamily="34" charset="-120"/>
-              </a:rPr>
-              <a:t>Volcanic soils around Mount Cameroon are good for tea, bananas and cocoa.</a:t>
-            </a:r>
-            <a:endParaRPr lang="en-US" sz="4000" dirty="0"/>
-          </a:p>
-          <a:p>
-            <a:pPr algn="l" indent="0" marL="0">
-              <a:spcAft>
-                <a:spcPts val="800"/>
-              </a:spcAft>
-              <a:buNone/>
-            </a:pPr>
-            <a:r>
-              <a:rPr lang="en-US" sz="4000" b="1" dirty="0">
-                <a:solidFill>
-                  <a:srgbClr val="111111"/>
-                </a:solidFill>
-                <a:latin typeface="Times New Roman" pitchFamily="34" charset="0"/>
-                <a:ea typeface="Times New Roman" pitchFamily="34" charset="-122"/>
-                <a:cs typeface="Times New Roman" pitchFamily="34" charset="-120"/>
-              </a:rPr>
-              <a:t>Energy: </a:t>
-            </a:r>
-            <a:pPr algn="l" indent="0" marL="0">
-              <a:spcAft>
-                <a:spcPts val="800"/>
-              </a:spcAft>
-              <a:buNone/>
-            </a:pPr>
-            <a:r>
-              <a:rPr lang="en-US" sz="4000" dirty="0">
-                <a:solidFill>
-                  <a:srgbClr val="111111"/>
-                </a:solidFill>
-                <a:latin typeface="Times New Roman" pitchFamily="34" charset="0"/>
-                <a:ea typeface="Times New Roman" pitchFamily="34" charset="-122"/>
-                <a:cs typeface="Times New Roman" pitchFamily="34" charset="-120"/>
-              </a:rPr>
-              <a:t>Geothermal power stations produce electricity from volcanic heat.</a:t>
+              <a:t>Ash covers crops, pollutes water, makes roofs collapse and stops aeroplanes.</a:t>
             </a:r>
             <a:endParaRPr lang="en-US" sz="4000" dirty="0"/>
           </a:p>
@@ -12556,9 +13124,109 @@
           </a:p>
         </p:txBody>
       </p:sp>
+      <p:sp>
+        <p:nvSpPr>
+          <p:cNvPr id="3" name="Text 1"/>
+          <p:cNvSpPr/>
+          <p:nvPr/>
+        </p:nvSpPr>
+        <p:spPr>
+          <a:xfrm>
+            <a:off x="365760" y="1005840"/>
+            <a:ext cx="11460175" cy="731520"/>
+          </a:xfrm>
+          <a:prstGeom prst="rect">
+            <a:avLst/>
+          </a:prstGeom>
+          <a:noFill/>
+          <a:ln/>
+        </p:spPr>
+        <p:txBody>
+          <a:bodyPr wrap="square" lIns="0" tIns="0" rIns="0" bIns="0" rtlCol="0" anchor="ctr">
+            <a:normAutofit/>
+          </a:bodyPr>
+          <a:lstStyle/>
+          <a:p>
+            <a:pPr algn="ctr" indent="0" marL="0">
+              <a:buNone/>
+            </a:pPr>
+            <a:r>
+              <a:rPr lang="en-US" sz="3600" b="1" dirty="0">
+                <a:solidFill>
+                  <a:srgbClr val="990011"/>
+                </a:solidFill>
+                <a:latin typeface="Times New Roman" pitchFamily="34" charset="0"/>
+                <a:ea typeface="Times New Roman" pitchFamily="34" charset="-122"/>
+                <a:cs typeface="Times New Roman" pitchFamily="34" charset="-120"/>
+              </a:rPr>
+              <a:t>1. Volcanic Hazards</a:t>
+            </a:r>
+            <a:endParaRPr lang="en-US" sz="3600" dirty="0"/>
+          </a:p>
+        </p:txBody>
+      </p:sp>
+      <p:sp>
+        <p:nvSpPr>
+          <p:cNvPr id="4" name="Text 2"/>
+          <p:cNvSpPr/>
+          <p:nvPr/>
+        </p:nvSpPr>
+        <p:spPr>
+          <a:xfrm>
+            <a:off x="365760" y="1783080"/>
+            <a:ext cx="4846320" cy="4617720"/>
+          </a:xfrm>
+          <a:prstGeom prst="rect">
+            <a:avLst/>
+          </a:prstGeom>
+          <a:noFill/>
+          <a:ln/>
+        </p:spPr>
+        <p:txBody>
+          <a:bodyPr wrap="square" lIns="0" tIns="0" rIns="0" bIns="0" rtlCol="0" anchor="t"/>
+          <a:lstStyle/>
+          <a:p>
+            <a:pPr algn="l" indent="0" marL="0">
+              <a:spcAft>
+                <a:spcPts val="800"/>
+              </a:spcAft>
+              <a:buNone/>
+            </a:pPr>
+            <a:r>
+              <a:rPr lang="en-US" sz="3600" b="1" dirty="0">
+                <a:solidFill>
+                  <a:srgbClr val="111111"/>
+                </a:solidFill>
+                <a:latin typeface="Times New Roman" pitchFamily="34" charset="0"/>
+                <a:ea typeface="Times New Roman" pitchFamily="34" charset="-122"/>
+                <a:cs typeface="Times New Roman" pitchFamily="34" charset="-120"/>
+              </a:rPr>
+              <a:t>Poisonous gases: </a:t>
+            </a:r>
+            <a:pPr algn="l" indent="0" marL="0">
+              <a:spcAft>
+                <a:spcPts val="800"/>
+              </a:spcAft>
+              <a:buNone/>
+            </a:pPr>
+            <a:r>
+              <a:rPr lang="en-US" sz="3600" dirty="0">
+                <a:solidFill>
+                  <a:srgbClr val="111111"/>
+                </a:solidFill>
+                <a:latin typeface="Times New Roman" pitchFamily="34" charset="0"/>
+                <a:ea typeface="Times New Roman" pitchFamily="34" charset="-122"/>
+                <a:cs typeface="Times New Roman" pitchFamily="34" charset="-120"/>
+              </a:rPr>
+              <a:t>Gases from Lake Nyos killed about 1,700 people and many animals in 1986.</a:t>
+            </a:r>
+            <a:endParaRPr lang="en-US" sz="3600" dirty="0"/>
+          </a:p>
+        </p:txBody>
+      </p:sp>
       <p:pic>
         <p:nvPicPr>
-          <p:cNvPr id="3" name="Image 0" descr="/home/claude/f4/img/minesec_sheet.png">    </p:cNvPr>
+          <p:cNvPr id="5" name="Image 0" descr="/home/claude/f4/img/v2/f4_nyos.jpg">    </p:cNvPr>
           <p:cNvPicPr>
             <a:picLocks noChangeAspect="1"/>
           </p:cNvPicPr>
@@ -12572,8 +13240,8 @@
         </p:blipFill>
         <p:spPr>
           <a:xfrm>
-            <a:off x="0" y="658368"/>
-            <a:ext cx="5120640" cy="5833872"/>
+            <a:off x="5349240" y="2071212"/>
+            <a:ext cx="6659575" cy="3693983"/>
           </a:xfrm>
           <a:prstGeom prst="rect">
             <a:avLst/>
@@ -12582,14 +13250,14 @@
       </p:pic>
       <p:sp>
         <p:nvSpPr>
-          <p:cNvPr id="4" name="Text 1"/>
+          <p:cNvPr id="6" name="Text 3"/>
           <p:cNvSpPr/>
           <p:nvPr/>
         </p:nvSpPr>
         <p:spPr>
           <a:xfrm>
-            <a:off x="5349240" y="1005840"/>
-            <a:ext cx="6522415" cy="731520"/>
+            <a:off x="5349240" y="6089904"/>
+            <a:ext cx="6659575" cy="347472"/>
           </a:xfrm>
           <a:prstGeom prst="rect">
             <a:avLst/>
@@ -12598,122 +13266,24 @@
           <a:ln/>
         </p:spPr>
         <p:txBody>
-          <a:bodyPr wrap="square" lIns="0" tIns="0" rIns="0" bIns="0" rtlCol="0" anchor="ctr">
-            <a:normAutofit/>
-          </a:bodyPr>
+          <a:bodyPr wrap="square" lIns="0" tIns="0" rIns="0" bIns="0" rtlCol="0" anchor="ctr"/>
           <a:lstStyle/>
           <a:p>
             <a:pPr algn="ctr" indent="0" marL="0">
               <a:buNone/>
             </a:pPr>
             <a:r>
-              <a:rPr lang="en-US" sz="3600" b="1" dirty="0">
-                <a:solidFill>
-                  <a:srgbClr val="990011"/>
+              <a:rPr lang="en-US" sz="1600" i="1" dirty="0">
+                <a:solidFill>
+                  <a:srgbClr val="555555"/>
                 </a:solidFill>
                 <a:latin typeface="Times New Roman" pitchFamily="34" charset="0"/>
                 <a:ea typeface="Times New Roman" pitchFamily="34" charset="-122"/>
                 <a:cs typeface="Times New Roman" pitchFamily="34" charset="-120"/>
               </a:rPr>
-              <a:t>2. Importance of Volcanoes (continued)</a:t>
-            </a:r>
-            <a:endParaRPr lang="en-US" sz="3600" dirty="0"/>
-          </a:p>
-        </p:txBody>
-      </p:sp>
-      <p:sp>
-        <p:nvSpPr>
-          <p:cNvPr id="5" name="Text 2"/>
-          <p:cNvSpPr/>
-          <p:nvPr/>
-        </p:nvSpPr>
-        <p:spPr>
-          <a:xfrm>
-            <a:off x="5349240" y="1783080"/>
-            <a:ext cx="6522415" cy="4663440"/>
-          </a:xfrm>
-          <a:prstGeom prst="rect">
-            <a:avLst/>
-          </a:prstGeom>
-          <a:noFill/>
-          <a:ln/>
-        </p:spPr>
-        <p:txBody>
-          <a:bodyPr wrap="square" lIns="0" tIns="0" rIns="0" bIns="0" rtlCol="0" anchor="t"/>
-          <a:lstStyle/>
-          <a:p>
-            <a:pPr algn="l" indent="0" marL="0">
-              <a:spcAft>
-                <a:spcPts val="800"/>
-              </a:spcAft>
-              <a:buNone/>
-            </a:pPr>
-            <a:r>
-              <a:rPr lang="en-US" sz="4000" b="1" dirty="0">
-                <a:solidFill>
-                  <a:srgbClr val="111111"/>
-                </a:solidFill>
-                <a:latin typeface="Times New Roman" pitchFamily="34" charset="0"/>
-                <a:ea typeface="Times New Roman" pitchFamily="34" charset="-122"/>
-                <a:cs typeface="Times New Roman" pitchFamily="34" charset="-120"/>
-              </a:rPr>
-              <a:t>Tourism: </a:t>
-            </a:r>
-            <a:pPr algn="l" indent="0" marL="0">
-              <a:spcAft>
-                <a:spcPts val="800"/>
-              </a:spcAft>
-              <a:buNone/>
-            </a:pPr>
-            <a:r>
-              <a:rPr lang="en-US" sz="4000" dirty="0">
-                <a:solidFill>
-                  <a:srgbClr val="111111"/>
-                </a:solidFill>
-                <a:latin typeface="Times New Roman" pitchFamily="34" charset="0"/>
-                <a:ea typeface="Times New Roman" pitchFamily="34" charset="-122"/>
-                <a:cs typeface="Times New Roman" pitchFamily="34" charset="-120"/>
-              </a:rPr>
-              <a:t>Many tourists visit volcanoes, such as Mount Cameroon.</a:t>
-            </a:r>
-            <a:endParaRPr lang="en-US" sz="4000" dirty="0"/>
-          </a:p>
-          <a:p>
-            <a:pPr algn="l" indent="0" marL="0">
-              <a:spcAft>
-                <a:spcPts val="800"/>
-              </a:spcAft>
-              <a:buNone/>
-            </a:pPr>
-            <a:r>
-              <a:rPr lang="en-US" sz="4000" b="1" dirty="0">
-                <a:solidFill>
-                  <a:srgbClr val="111111"/>
-                </a:solidFill>
-                <a:latin typeface="Times New Roman" pitchFamily="34" charset="0"/>
-                <a:ea typeface="Times New Roman" pitchFamily="34" charset="-122"/>
-                <a:cs typeface="Times New Roman" pitchFamily="34" charset="-120"/>
-              </a:rPr>
-              <a:t>Building materials: </a:t>
-            </a:r>
-            <a:pPr algn="l" indent="0" marL="0">
-              <a:spcAft>
-                <a:spcPts val="800"/>
-              </a:spcAft>
-              <a:buNone/>
-            </a:pPr>
-            <a:r>
-              <a:rPr lang="en-US" sz="4000" dirty="0">
-                <a:solidFill>
-                  <a:srgbClr val="111111"/>
-                </a:solidFill>
-                <a:latin typeface="Times New Roman" pitchFamily="34" charset="0"/>
-                <a:ea typeface="Times New Roman" pitchFamily="34" charset="-122"/>
-                <a:cs typeface="Times New Roman" pitchFamily="34" charset="-120"/>
-              </a:rPr>
-              <a:t>Basalt and pozzolana are used for building roads and houses.</a:t>
-            </a:r>
-            <a:endParaRPr lang="en-US" sz="4000" dirty="0"/>
+              <a:t>Illustration: Lake Nyos</a:t>
+            </a:r>
+            <a:endParaRPr lang="en-US" sz="1600" dirty="0"/>
           </a:p>
         </p:txBody>
       </p:sp>
@@ -12846,7 +13416,7 @@
         <p:spPr>
           <a:xfrm>
             <a:off x="0" y="658368"/>
-            <a:ext cx="2468880" cy="5833872"/>
+            <a:ext cx="5120640" cy="5833872"/>
           </a:xfrm>
           <a:prstGeom prst="rect">
             <a:avLst/>
@@ -12861,8 +13431,8 @@
         </p:nvSpPr>
         <p:spPr>
           <a:xfrm>
-            <a:off x="2697480" y="1005840"/>
-            <a:ext cx="9174175" cy="731520"/>
+            <a:off x="5349240" y="1005840"/>
+            <a:ext cx="6522415" cy="731520"/>
           </a:xfrm>
           <a:prstGeom prst="rect">
             <a:avLst/>
@@ -12888,7 +13458,7 @@
                 <a:ea typeface="Times New Roman" pitchFamily="34" charset="-122"/>
                 <a:cs typeface="Times New Roman" pitchFamily="34" charset="-120"/>
               </a:rPr>
-              <a:t>3. Adaptation, Mitigation and Prevention</a:t>
+              <a:t>1. Volcanic Hazards</a:t>
             </a:r>
             <a:endParaRPr lang="en-US" sz="3600" dirty="0"/>
           </a:p>
@@ -12902,8 +13472,8 @@
         </p:nvSpPr>
         <p:spPr>
           <a:xfrm>
-            <a:off x="2697480" y="1783080"/>
-            <a:ext cx="9174175" cy="4663440"/>
+            <a:off x="5349240" y="1783080"/>
+            <a:ext cx="6522415" cy="4663440"/>
           </a:xfrm>
           <a:prstGeom prst="rect">
             <a:avLst/>
@@ -12922,7 +13492,7 @@
               <a:buNone/>
             </a:pPr>
             <a:r>
-              <a:rPr lang="en-US" sz="4000" i="1" dirty="0">
+              <a:rPr lang="en-US" sz="4000" b="1" dirty="0">
                 <a:solidFill>
                   <a:srgbClr val="111111"/>
                 </a:solidFill>
@@ -12930,11 +13500,8 @@
                 <a:ea typeface="Times New Roman" pitchFamily="34" charset="-122"/>
                 <a:cs typeface="Times New Roman" pitchFamily="34" charset="-120"/>
               </a:rPr>
-              <a:t>People reduce volcanic dangers with the following measures:</a:t>
-            </a:r>
-            <a:endParaRPr lang="en-US" sz="4000" dirty="0"/>
-          </a:p>
-          <a:p>
+              <a:t>Mudflows (lahars): </a:t>
+            </a:r>
             <a:pPr algn="l" indent="0" marL="0">
               <a:spcAft>
                 <a:spcPts val="800"/>
@@ -12942,7 +13509,7 @@
               <a:buNone/>
             </a:pPr>
             <a:r>
-              <a:rPr lang="en-US" sz="4000" b="1" dirty="0">
+              <a:rPr lang="en-US" sz="4000" dirty="0">
                 <a:solidFill>
                   <a:srgbClr val="111111"/>
                 </a:solidFill>
@@ -12950,8 +13517,11 @@
                 <a:ea typeface="Times New Roman" pitchFamily="34" charset="-122"/>
                 <a:cs typeface="Times New Roman" pitchFamily="34" charset="-120"/>
               </a:rPr>
-              <a:t>Monitoring: </a:t>
-            </a:r>
+              <a:t>Ash mixed with rain flows down the slopes and buries villages.</a:t>
+            </a:r>
+            <a:endParaRPr lang="en-US" sz="4000" dirty="0"/>
+          </a:p>
+          <a:p>
             <a:pPr algn="l" indent="0" marL="0">
               <a:spcAft>
                 <a:spcPts val="800"/>
@@ -12959,7 +13529,7 @@
               <a:buNone/>
             </a:pPr>
             <a:r>
-              <a:rPr lang="en-US" sz="4000" dirty="0">
+              <a:rPr lang="en-US" sz="4000" b="1" dirty="0">
                 <a:solidFill>
                   <a:srgbClr val="111111"/>
                 </a:solidFill>
@@ -12967,11 +13537,8 @@
                 <a:ea typeface="Times New Roman" pitchFamily="34" charset="-122"/>
                 <a:cs typeface="Times New Roman" pitchFamily="34" charset="-120"/>
               </a:rPr>
-              <a:t>Scientists watch volcanoes with instruments to predict eruptions.</a:t>
-            </a:r>
-            <a:endParaRPr lang="en-US" sz="4000" dirty="0"/>
-          </a:p>
-          <a:p>
+              <a:t>Earthquakes and tsunamis: </a:t>
+            </a:r>
             <a:pPr algn="l" indent="0" marL="0">
               <a:spcAft>
                 <a:spcPts val="800"/>
@@ -12979,7 +13546,7 @@
               <a:buNone/>
             </a:pPr>
             <a:r>
-              <a:rPr lang="en-US" sz="4000" b="1" dirty="0">
+              <a:rPr lang="en-US" sz="4000" dirty="0">
                 <a:solidFill>
                   <a:srgbClr val="111111"/>
                 </a:solidFill>
@@ -12987,24 +13554,7 @@
                 <a:ea typeface="Times New Roman" pitchFamily="34" charset="-122"/>
                 <a:cs typeface="Times New Roman" pitchFamily="34" charset="-120"/>
               </a:rPr>
-              <a:t>Warning and evacuation: </a:t>
-            </a:r>
-            <a:pPr algn="l" indent="0" marL="0">
-              <a:spcAft>
-                <a:spcPts val="800"/>
-              </a:spcAft>
-              <a:buNone/>
-            </a:pPr>
-            <a:r>
-              <a:rPr lang="en-US" sz="4000" dirty="0">
-                <a:solidFill>
-                  <a:srgbClr val="111111"/>
-                </a:solidFill>
-                <a:latin typeface="Times New Roman" pitchFamily="34" charset="0"/>
-                <a:ea typeface="Times New Roman" pitchFamily="34" charset="-122"/>
-                <a:cs typeface="Times New Roman" pitchFamily="34" charset="-120"/>
-              </a:rPr>
-              <a:t>People are warned and leave dangerous areas in time.</a:t>
+              <a:t>Eruptions shake the ground and can cause giant sea waves.</a:t>
             </a:r>
             <a:endParaRPr lang="en-US" sz="4000" dirty="0"/>
           </a:p>
@@ -13122,9 +13672,129 @@
           </a:p>
         </p:txBody>
       </p:sp>
+      <p:sp>
+        <p:nvSpPr>
+          <p:cNvPr id="3" name="Text 1"/>
+          <p:cNvSpPr/>
+          <p:nvPr/>
+        </p:nvSpPr>
+        <p:spPr>
+          <a:xfrm>
+            <a:off x="365760" y="1005840"/>
+            <a:ext cx="11460175" cy="731520"/>
+          </a:xfrm>
+          <a:prstGeom prst="rect">
+            <a:avLst/>
+          </a:prstGeom>
+          <a:noFill/>
+          <a:ln/>
+        </p:spPr>
+        <p:txBody>
+          <a:bodyPr wrap="square" lIns="0" tIns="0" rIns="0" bIns="0" rtlCol="0" anchor="ctr">
+            <a:normAutofit/>
+          </a:bodyPr>
+          <a:lstStyle/>
+          <a:p>
+            <a:pPr algn="ctr" indent="0" marL="0">
+              <a:buNone/>
+            </a:pPr>
+            <a:r>
+              <a:rPr lang="en-US" sz="3600" b="1" dirty="0">
+                <a:solidFill>
+                  <a:srgbClr val="990011"/>
+                </a:solidFill>
+                <a:latin typeface="Times New Roman" pitchFamily="34" charset="0"/>
+                <a:ea typeface="Times New Roman" pitchFamily="34" charset="-122"/>
+                <a:cs typeface="Times New Roman" pitchFamily="34" charset="-120"/>
+              </a:rPr>
+              <a:t>2. Importance of Volcanoes</a:t>
+            </a:r>
+            <a:endParaRPr lang="en-US" sz="3600" dirty="0"/>
+          </a:p>
+        </p:txBody>
+      </p:sp>
+      <p:sp>
+        <p:nvSpPr>
+          <p:cNvPr id="4" name="Text 2"/>
+          <p:cNvSpPr/>
+          <p:nvPr/>
+        </p:nvSpPr>
+        <p:spPr>
+          <a:xfrm>
+            <a:off x="365760" y="1783080"/>
+            <a:ext cx="4846320" cy="4617720"/>
+          </a:xfrm>
+          <a:prstGeom prst="rect">
+            <a:avLst/>
+          </a:prstGeom>
+          <a:noFill/>
+          <a:ln/>
+        </p:spPr>
+        <p:txBody>
+          <a:bodyPr wrap="square" lIns="0" tIns="0" rIns="0" bIns="0" rtlCol="0" anchor="t"/>
+          <a:lstStyle/>
+          <a:p>
+            <a:pPr algn="l" indent="0" marL="0">
+              <a:spcAft>
+                <a:spcPts val="800"/>
+              </a:spcAft>
+              <a:buNone/>
+            </a:pPr>
+            <a:r>
+              <a:rPr lang="en-US" sz="3600" i="1" dirty="0">
+                <a:solidFill>
+                  <a:srgbClr val="111111"/>
+                </a:solidFill>
+                <a:latin typeface="Times New Roman" pitchFamily="34" charset="0"/>
+                <a:ea typeface="Times New Roman" pitchFamily="34" charset="-122"/>
+                <a:cs typeface="Times New Roman" pitchFamily="34" charset="-120"/>
+              </a:rPr>
+              <a:t>Volcanoes are useful to man in the following ways:</a:t>
+            </a:r>
+            <a:endParaRPr lang="en-US" sz="3600" dirty="0"/>
+          </a:p>
+          <a:p>
+            <a:pPr algn="l" indent="0" marL="0">
+              <a:spcAft>
+                <a:spcPts val="800"/>
+              </a:spcAft>
+              <a:buNone/>
+            </a:pPr>
+            <a:r>
+              <a:rPr lang="en-US" sz="3600" b="1" dirty="0">
+                <a:solidFill>
+                  <a:srgbClr val="111111"/>
+                </a:solidFill>
+                <a:latin typeface="Times New Roman" pitchFamily="34" charset="0"/>
+                <a:ea typeface="Times New Roman" pitchFamily="34" charset="-122"/>
+                <a:cs typeface="Times New Roman" pitchFamily="34" charset="-120"/>
+              </a:rPr>
+              <a:t>Fertile soils: </a:t>
+            </a:r>
+            <a:pPr algn="l" indent="0" marL="0">
+              <a:spcAft>
+                <a:spcPts val="800"/>
+              </a:spcAft>
+              <a:buNone/>
+            </a:pPr>
+            <a:r>
+              <a:rPr lang="en-US" sz="3600" dirty="0">
+                <a:solidFill>
+                  <a:srgbClr val="111111"/>
+                </a:solidFill>
+                <a:latin typeface="Times New Roman" pitchFamily="34" charset="0"/>
+                <a:ea typeface="Times New Roman" pitchFamily="34" charset="-122"/>
+                <a:cs typeface="Times New Roman" pitchFamily="34" charset="-120"/>
+              </a:rPr>
+              <a:t>Volcanic soils around Mount Cameroon are good for tea, bananas, cocoa and rubber.</a:t>
+            </a:r>
+            <a:endParaRPr lang="en-US" sz="3600" dirty="0"/>
+          </a:p>
+        </p:txBody>
+      </p:sp>
       <p:pic>
         <p:nvPicPr>
-          <p:cNvPr id="3" name="Image 0" descr="/home/claude/f4/img/minesec_sheet.png">    </p:cNvPr>
+          <p:cNvPr id="5" name="Image 0" descr="/home/claude/f4/img/v2/f2t_tea_highlands.jpg">    </p:cNvPr>
           <p:cNvPicPr>
             <a:picLocks noChangeAspect="1"/>
           </p:cNvPicPr>
@@ -13138,8 +13808,8 @@
         </p:blipFill>
         <p:spPr>
           <a:xfrm>
-            <a:off x="0" y="658368"/>
-            <a:ext cx="5120640" cy="5833872"/>
+            <a:off x="5349240" y="2451667"/>
+            <a:ext cx="6659575" cy="2933075"/>
           </a:xfrm>
           <a:prstGeom prst="rect">
             <a:avLst/>
@@ -13148,14 +13818,14 @@
       </p:pic>
       <p:sp>
         <p:nvSpPr>
-          <p:cNvPr id="4" name="Text 1"/>
+          <p:cNvPr id="6" name="Text 3"/>
           <p:cNvSpPr/>
           <p:nvPr/>
         </p:nvSpPr>
         <p:spPr>
           <a:xfrm>
-            <a:off x="5349240" y="1005840"/>
-            <a:ext cx="6522415" cy="731520"/>
+            <a:off x="5349240" y="6089904"/>
+            <a:ext cx="6659575" cy="347472"/>
           </a:xfrm>
           <a:prstGeom prst="rect">
             <a:avLst/>
@@ -13164,85 +13834,24 @@
           <a:ln/>
         </p:spPr>
         <p:txBody>
-          <a:bodyPr wrap="square" lIns="0" tIns="0" rIns="0" bIns="0" rtlCol="0" anchor="ctr">
-            <a:normAutofit/>
-          </a:bodyPr>
+          <a:bodyPr wrap="square" lIns="0" tIns="0" rIns="0" bIns="0" rtlCol="0" anchor="ctr"/>
           <a:lstStyle/>
           <a:p>
             <a:pPr algn="ctr" indent="0" marL="0">
               <a:buNone/>
             </a:pPr>
             <a:r>
-              <a:rPr lang="en-US" sz="3600" b="1" dirty="0">
-                <a:solidFill>
-                  <a:srgbClr val="990011"/>
+              <a:rPr lang="en-US" sz="1600" i="1" dirty="0">
+                <a:solidFill>
+                  <a:srgbClr val="555555"/>
                 </a:solidFill>
                 <a:latin typeface="Times New Roman" pitchFamily="34" charset="0"/>
                 <a:ea typeface="Times New Roman" pitchFamily="34" charset="-122"/>
                 <a:cs typeface="Times New Roman" pitchFamily="34" charset="-120"/>
               </a:rPr>
-              <a:t>3. Adaptation, Mitigation and Prevention (continued)</a:t>
-            </a:r>
-            <a:endParaRPr lang="en-US" sz="3600" dirty="0"/>
-          </a:p>
-        </p:txBody>
-      </p:sp>
-      <p:sp>
-        <p:nvSpPr>
-          <p:cNvPr id="5" name="Text 2"/>
-          <p:cNvSpPr/>
-          <p:nvPr/>
-        </p:nvSpPr>
-        <p:spPr>
-          <a:xfrm>
-            <a:off x="5349240" y="1783080"/>
-            <a:ext cx="6522415" cy="4663440"/>
-          </a:xfrm>
-          <a:prstGeom prst="rect">
-            <a:avLst/>
-          </a:prstGeom>
-          <a:noFill/>
-          <a:ln/>
-        </p:spPr>
-        <p:txBody>
-          <a:bodyPr wrap="square" lIns="0" tIns="0" rIns="0" bIns="0" rtlCol="0" anchor="t"/>
-          <a:lstStyle/>
-          <a:p>
-            <a:pPr algn="l" indent="0" marL="0">
-              <a:spcAft>
-                <a:spcPts val="800"/>
-              </a:spcAft>
-              <a:buNone/>
-            </a:pPr>
-            <a:r>
-              <a:rPr lang="en-US" sz="4000" b="1" dirty="0">
-                <a:solidFill>
-                  <a:srgbClr val="111111"/>
-                </a:solidFill>
-                <a:latin typeface="Times New Roman" pitchFamily="34" charset="0"/>
-                <a:ea typeface="Times New Roman" pitchFamily="34" charset="-122"/>
-                <a:cs typeface="Times New Roman" pitchFamily="34" charset="-120"/>
-              </a:rPr>
-              <a:t>Degassing: </a:t>
-            </a:r>
-            <a:pPr algn="l" indent="0" marL="0">
-              <a:spcAft>
-                <a:spcPts val="800"/>
-              </a:spcAft>
-              <a:buNone/>
-            </a:pPr>
-            <a:r>
-              <a:rPr lang="en-US" sz="4000" dirty="0">
-                <a:solidFill>
-                  <a:srgbClr val="111111"/>
-                </a:solidFill>
-                <a:latin typeface="Times New Roman" pitchFamily="34" charset="0"/>
-                <a:ea typeface="Times New Roman" pitchFamily="34" charset="-122"/>
-                <a:cs typeface="Times New Roman" pitchFamily="34" charset="-120"/>
-              </a:rPr>
-              <a:t>Pipes remove gas from Lake Nyos to prevent another disaster.</a:t>
-            </a:r>
-            <a:endParaRPr lang="en-US" sz="4000" dirty="0"/>
+              <a:t>Illustration: tea on fertile highlands</a:t>
+            </a:r>
+            <a:endParaRPr lang="en-US" sz="1600" dirty="0"/>
           </a:p>
         </p:txBody>
       </p:sp>
@@ -13352,15 +13961,115 @@
                 <a:ea typeface="Calibri" pitchFamily="34" charset="-122"/>
                 <a:cs typeface="Calibri" pitchFamily="34" charset="-120"/>
               </a:rPr>
-              <a:t>FORMATIVE EVALUATION</a:t>
+              <a:t>BOARD SUMMARY</a:t>
             </a:r>
             <a:endParaRPr lang="en-US" sz="1400" dirty="0"/>
+          </a:p>
+        </p:txBody>
+      </p:sp>
+      <p:sp>
+        <p:nvSpPr>
+          <p:cNvPr id="3" name="Text 1"/>
+          <p:cNvSpPr/>
+          <p:nvPr/>
+        </p:nvSpPr>
+        <p:spPr>
+          <a:xfrm>
+            <a:off x="365760" y="1005840"/>
+            <a:ext cx="11460175" cy="731520"/>
+          </a:xfrm>
+          <a:prstGeom prst="rect">
+            <a:avLst/>
+          </a:prstGeom>
+          <a:noFill/>
+          <a:ln/>
+        </p:spPr>
+        <p:txBody>
+          <a:bodyPr wrap="square" lIns="0" tIns="0" rIns="0" bIns="0" rtlCol="0" anchor="ctr">
+            <a:normAutofit/>
+          </a:bodyPr>
+          <a:lstStyle/>
+          <a:p>
+            <a:pPr algn="ctr" indent="0" marL="0">
+              <a:buNone/>
+            </a:pPr>
+            <a:r>
+              <a:rPr lang="en-US" sz="3600" b="1" dirty="0">
+                <a:solidFill>
+                  <a:srgbClr val="990011"/>
+                </a:solidFill>
+                <a:latin typeface="Times New Roman" pitchFamily="34" charset="0"/>
+                <a:ea typeface="Times New Roman" pitchFamily="34" charset="-122"/>
+                <a:cs typeface="Times New Roman" pitchFamily="34" charset="-120"/>
+              </a:rPr>
+              <a:t>2. Importance of Volcanoes</a:t>
+            </a:r>
+            <a:endParaRPr lang="en-US" sz="3600" dirty="0"/>
+          </a:p>
+        </p:txBody>
+      </p:sp>
+      <p:sp>
+        <p:nvSpPr>
+          <p:cNvPr id="4" name="Text 2"/>
+          <p:cNvSpPr/>
+          <p:nvPr/>
+        </p:nvSpPr>
+        <p:spPr>
+          <a:xfrm>
+            <a:off x="365760" y="1783080"/>
+            <a:ext cx="4846320" cy="4617720"/>
+          </a:xfrm>
+          <a:prstGeom prst="rect">
+            <a:avLst/>
+          </a:prstGeom>
+          <a:noFill/>
+          <a:ln/>
+        </p:spPr>
+        <p:txBody>
+          <a:bodyPr wrap="square" lIns="0" tIns="0" rIns="0" bIns="0" rtlCol="0" anchor="t"/>
+          <a:lstStyle/>
+          <a:p>
+            <a:pPr algn="l" indent="0" marL="0">
+              <a:spcAft>
+                <a:spcPts val="800"/>
+              </a:spcAft>
+              <a:buNone/>
+            </a:pPr>
+            <a:r>
+              <a:rPr lang="en-US" sz="3600" b="1" dirty="0">
+                <a:solidFill>
+                  <a:srgbClr val="111111"/>
+                </a:solidFill>
+                <a:latin typeface="Times New Roman" pitchFamily="34" charset="0"/>
+                <a:ea typeface="Times New Roman" pitchFamily="34" charset="-122"/>
+                <a:cs typeface="Times New Roman" pitchFamily="34" charset="-120"/>
+              </a:rPr>
+              <a:t>Geothermal energy: </a:t>
+            </a:r>
+            <a:pPr algn="l" indent="0" marL="0">
+              <a:spcAft>
+                <a:spcPts val="800"/>
+              </a:spcAft>
+              <a:buNone/>
+            </a:pPr>
+            <a:r>
+              <a:rPr lang="en-US" sz="3600" dirty="0">
+                <a:solidFill>
+                  <a:srgbClr val="111111"/>
+                </a:solidFill>
+                <a:latin typeface="Times New Roman" pitchFamily="34" charset="0"/>
+                <a:ea typeface="Times New Roman" pitchFamily="34" charset="-122"/>
+                <a:cs typeface="Times New Roman" pitchFamily="34" charset="-120"/>
+              </a:rPr>
+              <a:t>Power stations produce electricity from volcanic heat, as in Kenya and Iceland.</a:t>
+            </a:r>
+            <a:endParaRPr lang="en-US" sz="3600" dirty="0"/>
           </a:p>
         </p:txBody>
       </p:sp>
       <p:pic>
         <p:nvPicPr>
-          <p:cNvPr id="3" name="Image 0" descr="/home/claude/f4/img/minesec_sheet.png">    </p:cNvPr>
+          <p:cNvPr id="5" name="Image 0" descr="/home/claude/f4/img/v2/f4_geothermal.jpg">    </p:cNvPr>
           <p:cNvPicPr>
             <a:picLocks noChangeAspect="1"/>
           </p:cNvPicPr>
@@ -13374,8 +14083,8 @@
         </p:blipFill>
         <p:spPr>
           <a:xfrm>
-            <a:off x="0" y="658368"/>
-            <a:ext cx="5120640" cy="5833872"/>
+            <a:off x="5477905" y="1783080"/>
+            <a:ext cx="6402246" cy="4270248"/>
           </a:xfrm>
           <a:prstGeom prst="rect">
             <a:avLst/>
@@ -13384,14 +14093,14 @@
       </p:pic>
       <p:sp>
         <p:nvSpPr>
-          <p:cNvPr id="4" name="Text 1"/>
+          <p:cNvPr id="6" name="Text 3"/>
           <p:cNvSpPr/>
           <p:nvPr/>
         </p:nvSpPr>
         <p:spPr>
           <a:xfrm>
-            <a:off x="5349240" y="1005840"/>
-            <a:ext cx="6522415" cy="731520"/>
+            <a:off x="5349240" y="6089904"/>
+            <a:ext cx="6659575" cy="347472"/>
           </a:xfrm>
           <a:prstGeom prst="rect">
             <a:avLst/>
@@ -13400,68 +14109,24 @@
           <a:ln/>
         </p:spPr>
         <p:txBody>
-          <a:bodyPr wrap="square" lIns="0" tIns="0" rIns="0" bIns="0" rtlCol="0" anchor="ctr">
-            <a:normAutofit/>
-          </a:bodyPr>
+          <a:bodyPr wrap="square" lIns="0" tIns="0" rIns="0" bIns="0" rtlCol="0" anchor="ctr"/>
           <a:lstStyle/>
           <a:p>
             <a:pPr algn="ctr" indent="0" marL="0">
               <a:buNone/>
             </a:pPr>
             <a:r>
-              <a:rPr lang="en-US" sz="3600" b="1" dirty="0">
-                <a:solidFill>
-                  <a:srgbClr val="990011"/>
+              <a:rPr lang="en-US" sz="1600" i="1" dirty="0">
+                <a:solidFill>
+                  <a:srgbClr val="555555"/>
                 </a:solidFill>
                 <a:latin typeface="Times New Roman" pitchFamily="34" charset="0"/>
                 <a:ea typeface="Times New Roman" pitchFamily="34" charset="-122"/>
                 <a:cs typeface="Times New Roman" pitchFamily="34" charset="-120"/>
               </a:rPr>
-              <a:t>Evaluation 1</a:t>
-            </a:r>
-            <a:endParaRPr lang="en-US" sz="3600" dirty="0"/>
-          </a:p>
-        </p:txBody>
-      </p:sp>
-      <p:sp>
-        <p:nvSpPr>
-          <p:cNvPr id="5" name="Text 2"/>
-          <p:cNvSpPr/>
-          <p:nvPr/>
-        </p:nvSpPr>
-        <p:spPr>
-          <a:xfrm>
-            <a:off x="5349240" y="1783080"/>
-            <a:ext cx="6522415" cy="4663440"/>
-          </a:xfrm>
-          <a:prstGeom prst="rect">
-            <a:avLst/>
-          </a:prstGeom>
-          <a:noFill/>
-          <a:ln/>
-        </p:spPr>
-        <p:txBody>
-          <a:bodyPr wrap="square" lIns="0" tIns="0" rIns="0" bIns="0" rtlCol="0" anchor="t"/>
-          <a:lstStyle/>
-          <a:p>
-            <a:pPr algn="l" indent="0" marL="0">
-              <a:spcAft>
-                <a:spcPts val="800"/>
-              </a:spcAft>
-              <a:buNone/>
-            </a:pPr>
-            <a:r>
-              <a:rPr lang="en-US" sz="4000" dirty="0">
-                <a:solidFill>
-                  <a:srgbClr val="111111"/>
-                </a:solidFill>
-                <a:latin typeface="Times New Roman" pitchFamily="34" charset="0"/>
-                <a:ea typeface="Times New Roman" pitchFamily="34" charset="-122"/>
-                <a:cs typeface="Times New Roman" pitchFamily="34" charset="-120"/>
-              </a:rPr>
-              <a:t>Give one danger and one benefit of volcanoes.</a:t>
-            </a:r>
-            <a:endParaRPr lang="en-US" sz="4000" dirty="0"/>
+              <a:t>Illustration: a geothermal power station</a:t>
+            </a:r>
+            <a:endParaRPr lang="en-US" sz="1600" dirty="0"/>
           </a:p>
         </p:txBody>
       </p:sp>
@@ -13571,7 +14236,7 @@
                 <a:ea typeface="Calibri" pitchFamily="34" charset="-122"/>
                 <a:cs typeface="Calibri" pitchFamily="34" charset="-120"/>
               </a:rPr>
-              <a:t>FORMATIVE EVALUATION</a:t>
+              <a:t>BOARD SUMMARY</a:t>
             </a:r>
             <a:endParaRPr lang="en-US" sz="1400" dirty="0"/>
           </a:p>
@@ -13594,7 +14259,7 @@
         <p:spPr>
           <a:xfrm>
             <a:off x="0" y="658368"/>
-            <a:ext cx="5120640" cy="5833872"/>
+            <a:ext cx="2468880" cy="5833872"/>
           </a:xfrm>
           <a:prstGeom prst="rect">
             <a:avLst/>
@@ -13609,8 +14274,8 @@
         </p:nvSpPr>
         <p:spPr>
           <a:xfrm>
-            <a:off x="5349240" y="1005840"/>
-            <a:ext cx="6522415" cy="731520"/>
+            <a:off x="2697480" y="1005840"/>
+            <a:ext cx="9174175" cy="731520"/>
           </a:xfrm>
           <a:prstGeom prst="rect">
             <a:avLst/>
@@ -13636,7 +14301,7 @@
                 <a:ea typeface="Times New Roman" pitchFamily="34" charset="-122"/>
                 <a:cs typeface="Times New Roman" pitchFamily="34" charset="-120"/>
               </a:rPr>
-              <a:t>Expected Answer</a:t>
+              <a:t>2. Importance of Volcanoes</a:t>
             </a:r>
             <a:endParaRPr lang="en-US" sz="3600" dirty="0"/>
           </a:p>
@@ -13650,8 +14315,8 @@
         </p:nvSpPr>
         <p:spPr>
           <a:xfrm>
-            <a:off x="5349240" y="1783080"/>
-            <a:ext cx="6522415" cy="4663440"/>
+            <a:off x="2697480" y="1783080"/>
+            <a:ext cx="9174175" cy="4663440"/>
           </a:xfrm>
           <a:prstGeom prst="rect">
             <a:avLst/>
@@ -13670,7 +14335,7 @@
               <a:buNone/>
             </a:pPr>
             <a:r>
-              <a:rPr lang="en-US" sz="4000" dirty="0">
+              <a:rPr lang="en-US" sz="4000" b="1" dirty="0">
                 <a:solidFill>
                   <a:srgbClr val="111111"/>
                 </a:solidFill>
@@ -13678,7 +14343,61 @@
                 <a:ea typeface="Times New Roman" pitchFamily="34" charset="-122"/>
                 <a:cs typeface="Times New Roman" pitchFamily="34" charset="-120"/>
               </a:rPr>
-              <a:t>Danger: lava. Benefit: fertile soils.</a:t>
+              <a:t>Tourism: </a:t>
+            </a:r>
+            <a:pPr algn="l" indent="0" marL="0">
+              <a:spcAft>
+                <a:spcPts val="800"/>
+              </a:spcAft>
+              <a:buNone/>
+            </a:pPr>
+            <a:r>
+              <a:rPr lang="en-US" sz="4000" dirty="0">
+                <a:solidFill>
+                  <a:srgbClr val="111111"/>
+                </a:solidFill>
+                <a:latin typeface="Times New Roman" pitchFamily="34" charset="0"/>
+                <a:ea typeface="Times New Roman" pitchFamily="34" charset="-122"/>
+                <a:cs typeface="Times New Roman" pitchFamily="34" charset="-120"/>
+              </a:rPr>
+              <a:t>Tourists visit volcanoes, craters and crater lakes, and climb Mount Cameroon during the Race of Hope.</a:t>
+            </a:r>
+            <a:endParaRPr lang="en-US" sz="4000" dirty="0"/>
+          </a:p>
+          <a:p>
+            <a:pPr algn="l" indent="0" marL="0">
+              <a:spcAft>
+                <a:spcPts val="800"/>
+              </a:spcAft>
+              <a:buNone/>
+            </a:pPr>
+            <a:r>
+              <a:rPr lang="en-US" sz="4000" b="1" dirty="0">
+                <a:solidFill>
+                  <a:srgbClr val="111111"/>
+                </a:solidFill>
+                <a:latin typeface="Times New Roman" pitchFamily="34" charset="0"/>
+                <a:ea typeface="Times New Roman" pitchFamily="34" charset="-122"/>
+                <a:cs typeface="Times New Roman" pitchFamily="34" charset="-120"/>
+              </a:rPr>
+              <a:t>Building materials and minerals: </a:t>
+            </a:r>
+            <a:pPr algn="l" indent="0" marL="0">
+              <a:spcAft>
+                <a:spcPts val="800"/>
+              </a:spcAft>
+              <a:buNone/>
+            </a:pPr>
+            <a:r>
+              <a:rPr lang="en-US" sz="4000" dirty="0">
+                <a:solidFill>
+                  <a:srgbClr val="111111"/>
+                </a:solidFill>
+                <a:latin typeface="Times New Roman" pitchFamily="34" charset="0"/>
+                <a:ea typeface="Times New Roman" pitchFamily="34" charset="-122"/>
+                <a:cs typeface="Times New Roman" pitchFamily="34" charset="-120"/>
+              </a:rPr>
+              <a:t>Basalt and pozzolana are used for roads and houses, and some minerals come from volcanic rocks.</a:t>
             </a:r>
             <a:endParaRPr lang="en-US" sz="4000" dirty="0"/>
           </a:p>
@@ -13790,7 +14509,7 @@
                 <a:ea typeface="Calibri" pitchFamily="34" charset="-122"/>
                 <a:cs typeface="Calibri" pitchFamily="34" charset="-120"/>
               </a:rPr>
-              <a:t>FORMATIVE EVALUATION</a:t>
+              <a:t>BOARD SUMMARY</a:t>
             </a:r>
             <a:endParaRPr lang="en-US" sz="1400" dirty="0"/>
           </a:p>
@@ -13855,7 +14574,7 @@
                 <a:ea typeface="Times New Roman" pitchFamily="34" charset="-122"/>
                 <a:cs typeface="Times New Roman" pitchFamily="34" charset="-120"/>
               </a:rPr>
-              <a:t>Evaluation 2</a:t>
+              <a:t>2. Importance of Volcanoes (continued)</a:t>
             </a:r>
             <a:endParaRPr lang="en-US" sz="3600" dirty="0"/>
           </a:p>
@@ -13889,7 +14608,7 @@
               <a:buNone/>
             </a:pPr>
             <a:r>
-              <a:rPr lang="en-US" sz="4000" dirty="0">
+              <a:rPr lang="en-US" sz="4000" b="1" dirty="0">
                 <a:solidFill>
                   <a:srgbClr val="111111"/>
                 </a:solidFill>
@@ -13897,7 +14616,24 @@
                 <a:ea typeface="Times New Roman" pitchFamily="34" charset="-122"/>
                 <a:cs typeface="Times New Roman" pitchFamily="34" charset="-120"/>
               </a:rPr>
-              <a:t>What happened at Lake Nyos in 1986?</a:t>
+              <a:t>Hot springs: </a:t>
+            </a:r>
+            <a:pPr algn="l" indent="0" marL="0">
+              <a:spcAft>
+                <a:spcPts val="800"/>
+              </a:spcAft>
+              <a:buNone/>
+            </a:pPr>
+            <a:r>
+              <a:rPr lang="en-US" sz="4000" dirty="0">
+                <a:solidFill>
+                  <a:srgbClr val="111111"/>
+                </a:solidFill>
+                <a:latin typeface="Times New Roman" pitchFamily="34" charset="0"/>
+                <a:ea typeface="Times New Roman" pitchFamily="34" charset="-122"/>
+                <a:cs typeface="Times New Roman" pitchFamily="34" charset="-120"/>
+              </a:rPr>
+              <a:t>Hot springs are used for bathing and health care.</a:t>
             </a:r>
             <a:endParaRPr lang="en-US" sz="4000" dirty="0"/>
           </a:p>
@@ -14009,15 +14745,135 @@
                 <a:ea typeface="Calibri" pitchFamily="34" charset="-122"/>
                 <a:cs typeface="Calibri" pitchFamily="34" charset="-120"/>
               </a:rPr>
-              <a:t>FORMATIVE EVALUATION</a:t>
+              <a:t>BOARD SUMMARY</a:t>
             </a:r>
             <a:endParaRPr lang="en-US" sz="1400" dirty="0"/>
+          </a:p>
+        </p:txBody>
+      </p:sp>
+      <p:sp>
+        <p:nvSpPr>
+          <p:cNvPr id="3" name="Text 1"/>
+          <p:cNvSpPr/>
+          <p:nvPr/>
+        </p:nvSpPr>
+        <p:spPr>
+          <a:xfrm>
+            <a:off x="365760" y="1005840"/>
+            <a:ext cx="11460175" cy="731520"/>
+          </a:xfrm>
+          <a:prstGeom prst="rect">
+            <a:avLst/>
+          </a:prstGeom>
+          <a:noFill/>
+          <a:ln/>
+        </p:spPr>
+        <p:txBody>
+          <a:bodyPr wrap="square" lIns="0" tIns="0" rIns="0" bIns="0" rtlCol="0" anchor="ctr">
+            <a:normAutofit/>
+          </a:bodyPr>
+          <a:lstStyle/>
+          <a:p>
+            <a:pPr algn="ctr" indent="0" marL="0">
+              <a:buNone/>
+            </a:pPr>
+            <a:r>
+              <a:rPr lang="en-US" sz="3600" b="1" dirty="0">
+                <a:solidFill>
+                  <a:srgbClr val="990011"/>
+                </a:solidFill>
+                <a:latin typeface="Times New Roman" pitchFamily="34" charset="0"/>
+                <a:ea typeface="Times New Roman" pitchFamily="34" charset="-122"/>
+                <a:cs typeface="Times New Roman" pitchFamily="34" charset="-120"/>
+              </a:rPr>
+              <a:t>3. Adaptation, Mitigation and Preventive Measures</a:t>
+            </a:r>
+            <a:endParaRPr lang="en-US" sz="3600" dirty="0"/>
+          </a:p>
+        </p:txBody>
+      </p:sp>
+      <p:sp>
+        <p:nvSpPr>
+          <p:cNvPr id="4" name="Text 2"/>
+          <p:cNvSpPr/>
+          <p:nvPr/>
+        </p:nvSpPr>
+        <p:spPr>
+          <a:xfrm>
+            <a:off x="365760" y="1783080"/>
+            <a:ext cx="4846320" cy="4617720"/>
+          </a:xfrm>
+          <a:prstGeom prst="rect">
+            <a:avLst/>
+          </a:prstGeom>
+          <a:noFill/>
+          <a:ln/>
+        </p:spPr>
+        <p:txBody>
+          <a:bodyPr wrap="square" lIns="0" tIns="0" rIns="0" bIns="0" rtlCol="0" anchor="t"/>
+          <a:lstStyle/>
+          <a:p>
+            <a:pPr algn="l" indent="0" marL="0">
+              <a:spcAft>
+                <a:spcPts val="800"/>
+              </a:spcAft>
+              <a:buNone/>
+            </a:pPr>
+            <a:r>
+              <a:rPr lang="en-US" sz="3600" i="1" dirty="0">
+                <a:solidFill>
+                  <a:srgbClr val="111111"/>
+                </a:solidFill>
+                <a:latin typeface="Times New Roman" pitchFamily="34" charset="0"/>
+                <a:ea typeface="Times New Roman" pitchFamily="34" charset="-122"/>
+                <a:cs typeface="Times New Roman" pitchFamily="34" charset="-120"/>
+              </a:rPr>
+              <a:t>People reduce volcanic dangers with the following measures:</a:t>
+            </a:r>
+            <a:endParaRPr lang="en-US" sz="3600" dirty="0"/>
+          </a:p>
+          <a:p>
+            <a:pPr algn="l" indent="0" marL="0">
+              <a:spcAft>
+                <a:spcPts val="800"/>
+              </a:spcAft>
+              <a:buNone/>
+            </a:pPr>
+            <a:r>
+              <a:rPr lang="en-US" sz="3600" b="1" dirty="0">
+                <a:solidFill>
+                  <a:srgbClr val="111111"/>
+                </a:solidFill>
+                <a:latin typeface="Times New Roman" pitchFamily="34" charset="0"/>
+                <a:ea typeface="Times New Roman" pitchFamily="34" charset="-122"/>
+                <a:cs typeface="Times New Roman" pitchFamily="34" charset="-120"/>
+              </a:rPr>
+              <a:t>Monitoring: </a:t>
+            </a:r>
+            <a:pPr algn="l" indent="0" marL="0">
+              <a:spcAft>
+                <a:spcPts val="800"/>
+              </a:spcAft>
+              <a:buNone/>
+            </a:pPr>
+            <a:r>
+              <a:rPr lang="en-US" sz="3600" dirty="0">
+                <a:solidFill>
+                  <a:srgbClr val="111111"/>
+                </a:solidFill>
+                <a:latin typeface="Times New Roman" pitchFamily="34" charset="0"/>
+                <a:ea typeface="Times New Roman" pitchFamily="34" charset="-122"/>
+                <a:cs typeface="Times New Roman" pitchFamily="34" charset="-120"/>
+              </a:rPr>
+              <a:t>Scientists watch volcanoes with instruments to predict eruptions.</a:t>
+            </a:r>
+            <a:endParaRPr lang="en-US" sz="3600" dirty="0"/>
           </a:p>
         </p:txBody>
       </p:sp>
       <p:pic>
         <p:nvPicPr>
-          <p:cNvPr id="3" name="Image 0" descr="/home/claude/f4/img/minesec_sheet.png">    </p:cNvPr>
+          <p:cNvPr id="5" name="Image 0" descr="/home/claude/f4/img/v2/lsa_volcmonitor.jpg">    </p:cNvPr>
           <p:cNvPicPr>
             <a:picLocks noChangeAspect="1"/>
           </p:cNvPicPr>
@@ -14031,8 +14887,8 @@
         </p:blipFill>
         <p:spPr>
           <a:xfrm>
-            <a:off x="0" y="658368"/>
-            <a:ext cx="5120640" cy="5833872"/>
+            <a:off x="5349240" y="2071212"/>
+            <a:ext cx="6659575" cy="3693983"/>
           </a:xfrm>
           <a:prstGeom prst="rect">
             <a:avLst/>
@@ -14041,14 +14897,14 @@
       </p:pic>
       <p:sp>
         <p:nvSpPr>
-          <p:cNvPr id="4" name="Text 1"/>
+          <p:cNvPr id="6" name="Text 3"/>
           <p:cNvSpPr/>
           <p:nvPr/>
         </p:nvSpPr>
         <p:spPr>
           <a:xfrm>
-            <a:off x="5349240" y="1005840"/>
-            <a:ext cx="6522415" cy="731520"/>
+            <a:off x="5349240" y="6089904"/>
+            <a:ext cx="6659575" cy="347472"/>
           </a:xfrm>
           <a:prstGeom prst="rect">
             <a:avLst/>
@@ -14057,68 +14913,24 @@
           <a:ln/>
         </p:spPr>
         <p:txBody>
-          <a:bodyPr wrap="square" lIns="0" tIns="0" rIns="0" bIns="0" rtlCol="0" anchor="ctr">
-            <a:normAutofit/>
-          </a:bodyPr>
+          <a:bodyPr wrap="square" lIns="0" tIns="0" rIns="0" bIns="0" rtlCol="0" anchor="ctr"/>
           <a:lstStyle/>
           <a:p>
             <a:pPr algn="ctr" indent="0" marL="0">
               <a:buNone/>
             </a:pPr>
             <a:r>
-              <a:rPr lang="en-US" sz="3600" b="1" dirty="0">
-                <a:solidFill>
-                  <a:srgbClr val="990011"/>
+              <a:rPr lang="en-US" sz="1600" i="1" dirty="0">
+                <a:solidFill>
+                  <a:srgbClr val="555555"/>
                 </a:solidFill>
                 <a:latin typeface="Times New Roman" pitchFamily="34" charset="0"/>
                 <a:ea typeface="Times New Roman" pitchFamily="34" charset="-122"/>
                 <a:cs typeface="Times New Roman" pitchFamily="34" charset="-120"/>
               </a:rPr>
-              <a:t>Expected Answer</a:t>
-            </a:r>
-            <a:endParaRPr lang="en-US" sz="3600" dirty="0"/>
-          </a:p>
-        </p:txBody>
-      </p:sp>
-      <p:sp>
-        <p:nvSpPr>
-          <p:cNvPr id="5" name="Text 2"/>
-          <p:cNvSpPr/>
-          <p:nvPr/>
-        </p:nvSpPr>
-        <p:spPr>
-          <a:xfrm>
-            <a:off x="5349240" y="1783080"/>
-            <a:ext cx="6522415" cy="4663440"/>
-          </a:xfrm>
-          <a:prstGeom prst="rect">
-            <a:avLst/>
-          </a:prstGeom>
-          <a:noFill/>
-          <a:ln/>
-        </p:spPr>
-        <p:txBody>
-          <a:bodyPr wrap="square" lIns="0" tIns="0" rIns="0" bIns="0" rtlCol="0" anchor="t"/>
-          <a:lstStyle/>
-          <a:p>
-            <a:pPr algn="l" indent="0" marL="0">
-              <a:spcAft>
-                <a:spcPts val="800"/>
-              </a:spcAft>
-              <a:buNone/>
-            </a:pPr>
-            <a:r>
-              <a:rPr lang="en-US" sz="4000" dirty="0">
-                <a:solidFill>
-                  <a:srgbClr val="111111"/>
-                </a:solidFill>
-                <a:latin typeface="Times New Roman" pitchFamily="34" charset="0"/>
-                <a:ea typeface="Times New Roman" pitchFamily="34" charset="-122"/>
-                <a:cs typeface="Times New Roman" pitchFamily="34" charset="-120"/>
-              </a:rPr>
-              <a:t>A cloud of gas killed about 1,700 people.</a:t>
-            </a:r>
-            <a:endParaRPr lang="en-US" sz="4000" dirty="0"/>
+              <a:t>Illustration: monitoring a volcano</a:t>
+            </a:r>
+            <a:endParaRPr lang="en-US" sz="1600" dirty="0"/>
           </a:p>
         </p:txBody>
       </p:sp>
@@ -14228,7 +15040,7 @@
                 <a:ea typeface="Calibri" pitchFamily="34" charset="-122"/>
                 <a:cs typeface="Calibri" pitchFamily="34" charset="-120"/>
               </a:rPr>
-              <a:t>REMEDIATION</a:t>
+              <a:t>BOARD SUMMARY</a:t>
             </a:r>
             <a:endParaRPr lang="en-US" sz="1400" dirty="0"/>
           </a:p>
@@ -14251,7 +15063,7 @@
         <p:spPr>
           <a:xfrm>
             <a:off x="0" y="658368"/>
-            <a:ext cx="2468880" cy="5833872"/>
+            <a:ext cx="1463040" cy="5833872"/>
           </a:xfrm>
           <a:prstGeom prst="rect">
             <a:avLst/>
@@ -14266,8 +15078,8 @@
         </p:nvSpPr>
         <p:spPr>
           <a:xfrm>
-            <a:off x="2697480" y="1005840"/>
-            <a:ext cx="9174175" cy="731520"/>
+            <a:off x="1691640" y="1005840"/>
+            <a:ext cx="10180015" cy="731520"/>
           </a:xfrm>
           <a:prstGeom prst="rect">
             <a:avLst/>
@@ -14293,7 +15105,7 @@
                 <a:ea typeface="Times New Roman" pitchFamily="34" charset="-122"/>
                 <a:cs typeface="Times New Roman" pitchFamily="34" charset="-120"/>
               </a:rPr>
-              <a:t>Remediation</a:t>
+              <a:t>3. Adaptation, Mitigation and Preventive Measures</a:t>
             </a:r>
             <a:endParaRPr lang="en-US" sz="3600" dirty="0"/>
           </a:p>
@@ -14307,8 +15119,8 @@
         </p:nvSpPr>
         <p:spPr>
           <a:xfrm>
-            <a:off x="2697480" y="1783080"/>
-            <a:ext cx="9174175" cy="4663440"/>
+            <a:off x="1691640" y="1783080"/>
+            <a:ext cx="10180015" cy="4663440"/>
           </a:xfrm>
           <a:prstGeom prst="rect">
             <a:avLst/>
@@ -14335,18 +15147,13 @@
                 <a:ea typeface="Times New Roman" pitchFamily="34" charset="-122"/>
                 <a:cs typeface="Times New Roman" pitchFamily="34" charset="-120"/>
               </a:rPr>
-              <a:t>Fill in the blanks:</a:t>
-            </a:r>
-            <a:endParaRPr lang="en-US" sz="4000" dirty="0"/>
-          </a:p>
-          <a:p>
-            <a:pPr algn="l" marL="342900" indent="-342900">
+              <a:t>Warning and evacuation: </a:t>
+            </a:r>
+            <a:pPr algn="l" indent="0" marL="0">
               <a:spcAft>
                 <a:spcPts val="800"/>
               </a:spcAft>
-              <a:buSzPct val="100000"/>
-              <a:buFont typeface="+mj-lt"/>
-              <a:buAutoNum type="arabicPeriod" startAt="1"/>
+              <a:buNone/>
             </a:pPr>
             <a:r>
               <a:rPr lang="en-US" sz="4000" dirty="0">
@@ -14357,21 +15164,19 @@
                 <a:ea typeface="Times New Roman" pitchFamily="34" charset="-122"/>
                 <a:cs typeface="Times New Roman" pitchFamily="34" charset="-120"/>
               </a:rPr>
-              <a:t>Energy from the heat of the Earth is ______ energy.</a:t>
+              <a:t>People are warned and leave dangerous areas in time.</a:t>
             </a:r>
             <a:endParaRPr lang="en-US" sz="4000" dirty="0"/>
           </a:p>
           <a:p>
-            <a:pPr algn="l" marL="342900" indent="-342900">
+            <a:pPr algn="l" indent="0" marL="0">
               <a:spcAft>
                 <a:spcPts val="800"/>
               </a:spcAft>
-              <a:buSzPct val="100000"/>
-              <a:buFont typeface="+mj-lt"/>
-              <a:buAutoNum type="arabicPeriod" startAt="1"/>
+              <a:buNone/>
             </a:pPr>
             <a:r>
-              <a:rPr lang="en-US" sz="4000" dirty="0">
+              <a:rPr lang="en-US" sz="4000" b="1" dirty="0">
                 <a:solidFill>
                   <a:srgbClr val="111111"/>
                 </a:solidFill>
@@ -14379,18 +15184,13 @@
                 <a:ea typeface="Times New Roman" pitchFamily="34" charset="-122"/>
                 <a:cs typeface="Times New Roman" pitchFamily="34" charset="-120"/>
               </a:rPr>
-              <a:t>In 1986, gas came out of Lake ______.</a:t>
-            </a:r>
-            <a:endParaRPr lang="en-US" sz="4000" dirty="0"/>
-          </a:p>
-          <a:p>
-            <a:pPr algn="l" marL="342900" indent="-342900">
+              <a:t>Land-use planning: </a:t>
+            </a:r>
+            <a:pPr algn="l" indent="0" marL="0">
               <a:spcAft>
                 <a:spcPts val="800"/>
               </a:spcAft>
-              <a:buSzPct val="100000"/>
-              <a:buFont typeface="+mj-lt"/>
-              <a:buAutoNum type="arabicPeriod" startAt="1"/>
+              <a:buNone/>
             </a:pPr>
             <a:r>
               <a:rPr lang="en-US" sz="4000" dirty="0">
@@ -14401,7 +15201,44 @@
                 <a:ea typeface="Times New Roman" pitchFamily="34" charset="-122"/>
                 <a:cs typeface="Times New Roman" pitchFamily="34" charset="-120"/>
               </a:rPr>
-              <a:t>The soils near volcanoes are very ______.</a:t>
+              <a:t>Houses and schools are not built in the paths of old lava flows.</a:t>
+            </a:r>
+            <a:endParaRPr lang="en-US" sz="4000" dirty="0"/>
+          </a:p>
+          <a:p>
+            <a:pPr algn="l" indent="0" marL="0">
+              <a:spcAft>
+                <a:spcPts val="800"/>
+              </a:spcAft>
+              <a:buNone/>
+            </a:pPr>
+            <a:r>
+              <a:rPr lang="en-US" sz="4000" b="1" dirty="0">
+                <a:solidFill>
+                  <a:srgbClr val="111111"/>
+                </a:solidFill>
+                <a:latin typeface="Times New Roman" pitchFamily="34" charset="0"/>
+                <a:ea typeface="Times New Roman" pitchFamily="34" charset="-122"/>
+                <a:cs typeface="Times New Roman" pitchFamily="34" charset="-120"/>
+              </a:rPr>
+              <a:t>Degassing: </a:t>
+            </a:r>
+            <a:pPr algn="l" indent="0" marL="0">
+              <a:spcAft>
+                <a:spcPts val="800"/>
+              </a:spcAft>
+              <a:buNone/>
+            </a:pPr>
+            <a:r>
+              <a:rPr lang="en-US" sz="4000" dirty="0">
+                <a:solidFill>
+                  <a:srgbClr val="111111"/>
+                </a:solidFill>
+                <a:latin typeface="Times New Roman" pitchFamily="34" charset="0"/>
+                <a:ea typeface="Times New Roman" pitchFamily="34" charset="-122"/>
+                <a:cs typeface="Times New Roman" pitchFamily="34" charset="-120"/>
+              </a:rPr>
+              <a:t>Pipes remove the gas from Lake Nyos to prevent another disaster.</a:t>
             </a:r>
             <a:endParaRPr lang="en-US" sz="4000" dirty="0"/>
           </a:p>
@@ -14752,7 +15589,7 @@
                 <a:ea typeface="Calibri" pitchFamily="34" charset="-122"/>
                 <a:cs typeface="Calibri" pitchFamily="34" charset="-120"/>
               </a:rPr>
-              <a:t>HOMEWORK</a:t>
+              <a:t>BOARD SUMMARY</a:t>
             </a:r>
             <a:endParaRPr lang="en-US" sz="1400" dirty="0"/>
           </a:p>
@@ -14817,7 +15654,7 @@
                 <a:ea typeface="Times New Roman" pitchFamily="34" charset="-122"/>
                 <a:cs typeface="Times New Roman" pitchFamily="34" charset="-120"/>
               </a:rPr>
-              <a:t>Homework</a:t>
+              <a:t>3. Adaptation, Mitigation and Preventive Measures (continued)</a:t>
             </a:r>
             <a:endParaRPr lang="en-US" sz="3600" dirty="0"/>
           </a:p>
@@ -14851,7 +15688,7 @@
               <a:buNone/>
             </a:pPr>
             <a:r>
-              <a:rPr lang="en-US" sz="4000" dirty="0">
+              <a:rPr lang="en-US" sz="4000" b="1" dirty="0">
                 <a:solidFill>
                   <a:srgbClr val="111111"/>
                 </a:solidFill>
@@ -14859,7 +15696,24 @@
                 <a:ea typeface="Times New Roman" pitchFamily="34" charset="-122"/>
                 <a:cs typeface="Times New Roman" pitchFamily="34" charset="-120"/>
               </a:rPr>
-              <a:t>Ask your parents if they have ever felt the ground shake. Write where and when it happened, and what they felt.</a:t>
+              <a:t>Diverting lava: </a:t>
+            </a:r>
+            <a:pPr algn="l" indent="0" marL="0">
+              <a:spcAft>
+                <a:spcPts val="800"/>
+              </a:spcAft>
+              <a:buNone/>
+            </a:pPr>
+            <a:r>
+              <a:rPr lang="en-US" sz="4000" dirty="0">
+                <a:solidFill>
+                  <a:srgbClr val="111111"/>
+                </a:solidFill>
+                <a:latin typeface="Times New Roman" pitchFamily="34" charset="0"/>
+                <a:ea typeface="Times New Roman" pitchFamily="34" charset="-122"/>
+                <a:cs typeface="Times New Roman" pitchFamily="34" charset="-120"/>
+              </a:rPr>
+              <a:t>Walls and channels can turn lava away from towns.</a:t>
             </a:r>
             <a:endParaRPr lang="en-US" sz="4000" dirty="0"/>
           </a:p>
@@ -14971,7 +15825,7 @@
                 <a:ea typeface="Calibri" pitchFamily="34" charset="-122"/>
                 <a:cs typeface="Calibri" pitchFamily="34" charset="-120"/>
               </a:rPr>
-              <a:t>NEXT LESSON</a:t>
+              <a:t>FORMATIVE EVALUATION</a:t>
             </a:r>
             <a:endParaRPr lang="en-US" sz="1400" dirty="0"/>
           </a:p>
@@ -15036,7 +15890,7 @@
                 <a:ea typeface="Times New Roman" pitchFamily="34" charset="-122"/>
                 <a:cs typeface="Times New Roman" pitchFamily="34" charset="-120"/>
               </a:rPr>
-              <a:t>Next Lesson</a:t>
+              <a:t>Evaluation 1</a:t>
             </a:r>
             <a:endParaRPr lang="en-US" sz="3600" dirty="0"/>
           </a:p>
@@ -15060,17 +15914,17 @@
           <a:ln/>
         </p:spPr>
         <p:txBody>
-          <a:bodyPr wrap="square" lIns="0" tIns="0" rIns="0" bIns="0" rtlCol="0" anchor="ctr"/>
-          <a:lstStyle/>
-          <a:p>
-            <a:pPr algn="ctr" indent="0" marL="0">
+          <a:bodyPr wrap="square" lIns="0" tIns="0" rIns="0" bIns="0" rtlCol="0" anchor="t"/>
+          <a:lstStyle/>
+          <a:p>
+            <a:pPr algn="l" indent="0" marL="0">
               <a:spcAft>
                 <a:spcPts val="800"/>
               </a:spcAft>
               <a:buNone/>
             </a:pPr>
             <a:r>
-              <a:rPr lang="en-US" sz="4000" b="1" dirty="0">
+              <a:rPr lang="en-US" sz="4000" dirty="0">
                 <a:solidFill>
                   <a:srgbClr val="111111"/>
                 </a:solidFill>
@@ -15078,27 +15932,7 @@
                 <a:ea typeface="Times New Roman" pitchFamily="34" charset="-122"/>
                 <a:cs typeface="Times New Roman" pitchFamily="34" charset="-120"/>
               </a:rPr>
-              <a:t>Our next lesson will be on:</a:t>
-            </a:r>
-            <a:endParaRPr lang="en-US" sz="4000" dirty="0"/>
-          </a:p>
-          <a:p>
-            <a:pPr algn="ctr" indent="0" marL="0">
-              <a:spcAft>
-                <a:spcPts val="800"/>
-              </a:spcAft>
-              <a:buNone/>
-            </a:pPr>
-            <a:r>
-              <a:rPr lang="en-US" sz="4000" b="1" dirty="0">
-                <a:solidFill>
-                  <a:srgbClr val="990011"/>
-                </a:solidFill>
-                <a:latin typeface="Times New Roman" pitchFamily="34" charset="0"/>
-                <a:ea typeface="Times New Roman" pitchFamily="34" charset="-122"/>
-                <a:cs typeface="Times New Roman" pitchFamily="34" charset="-120"/>
-              </a:rPr>
-              <a:t>Lesson 13: Earthquakes</a:t>
+              <a:t>Give one danger and one benefit of volcanoes.</a:t>
             </a:r>
             <a:endParaRPr lang="en-US" sz="4000" dirty="0"/>
           </a:p>
@@ -15210,6 +16044,1406 @@
                 <a:ea typeface="Calibri" pitchFamily="34" charset="-122"/>
                 <a:cs typeface="Calibri" pitchFamily="34" charset="-120"/>
               </a:rPr>
+              <a:t>FORMATIVE EVALUATION</a:t>
+            </a:r>
+            <a:endParaRPr lang="en-US" sz="1400" dirty="0"/>
+          </a:p>
+        </p:txBody>
+      </p:sp>
+      <p:pic>
+        <p:nvPicPr>
+          <p:cNvPr id="3" name="Image 0" descr="/home/claude/f4/img/minesec_sheet.png">    </p:cNvPr>
+          <p:cNvPicPr>
+            <a:picLocks noChangeAspect="1"/>
+          </p:cNvPicPr>
+          <p:nvPr/>
+        </p:nvPicPr>
+        <p:blipFill>
+          <a:blip r:embed="rId1"/>
+          <a:stretch>
+            <a:fillRect/>
+          </a:stretch>
+        </p:blipFill>
+        <p:spPr>
+          <a:xfrm>
+            <a:off x="0" y="658368"/>
+            <a:ext cx="5120640" cy="5833872"/>
+          </a:xfrm>
+          <a:prstGeom prst="rect">
+            <a:avLst/>
+          </a:prstGeom>
+        </p:spPr>
+      </p:pic>
+      <p:sp>
+        <p:nvSpPr>
+          <p:cNvPr id="4" name="Text 1"/>
+          <p:cNvSpPr/>
+          <p:nvPr/>
+        </p:nvSpPr>
+        <p:spPr>
+          <a:xfrm>
+            <a:off x="5349240" y="1005840"/>
+            <a:ext cx="6522415" cy="731520"/>
+          </a:xfrm>
+          <a:prstGeom prst="rect">
+            <a:avLst/>
+          </a:prstGeom>
+          <a:noFill/>
+          <a:ln/>
+        </p:spPr>
+        <p:txBody>
+          <a:bodyPr wrap="square" lIns="0" tIns="0" rIns="0" bIns="0" rtlCol="0" anchor="ctr">
+            <a:normAutofit/>
+          </a:bodyPr>
+          <a:lstStyle/>
+          <a:p>
+            <a:pPr algn="ctr" indent="0" marL="0">
+              <a:buNone/>
+            </a:pPr>
+            <a:r>
+              <a:rPr lang="en-US" sz="3600" b="1" dirty="0">
+                <a:solidFill>
+                  <a:srgbClr val="990011"/>
+                </a:solidFill>
+                <a:latin typeface="Times New Roman" pitchFamily="34" charset="0"/>
+                <a:ea typeface="Times New Roman" pitchFamily="34" charset="-122"/>
+                <a:cs typeface="Times New Roman" pitchFamily="34" charset="-120"/>
+              </a:rPr>
+              <a:t>Expected Answer</a:t>
+            </a:r>
+            <a:endParaRPr lang="en-US" sz="3600" dirty="0"/>
+          </a:p>
+        </p:txBody>
+      </p:sp>
+      <p:sp>
+        <p:nvSpPr>
+          <p:cNvPr id="5" name="Text 2"/>
+          <p:cNvSpPr/>
+          <p:nvPr/>
+        </p:nvSpPr>
+        <p:spPr>
+          <a:xfrm>
+            <a:off x="5349240" y="1783080"/>
+            <a:ext cx="6522415" cy="4663440"/>
+          </a:xfrm>
+          <a:prstGeom prst="rect">
+            <a:avLst/>
+          </a:prstGeom>
+          <a:noFill/>
+          <a:ln/>
+        </p:spPr>
+        <p:txBody>
+          <a:bodyPr wrap="square" lIns="0" tIns="0" rIns="0" bIns="0" rtlCol="0" anchor="t"/>
+          <a:lstStyle/>
+          <a:p>
+            <a:pPr algn="l" indent="0" marL="0">
+              <a:spcAft>
+                <a:spcPts val="800"/>
+              </a:spcAft>
+              <a:buNone/>
+            </a:pPr>
+            <a:r>
+              <a:rPr lang="en-US" sz="4000" dirty="0">
+                <a:solidFill>
+                  <a:srgbClr val="111111"/>
+                </a:solidFill>
+                <a:latin typeface="Times New Roman" pitchFamily="34" charset="0"/>
+                <a:ea typeface="Times New Roman" pitchFamily="34" charset="-122"/>
+                <a:cs typeface="Times New Roman" pitchFamily="34" charset="-120"/>
+              </a:rPr>
+              <a:t>Danger: lava. Benefit: fertile soils.</a:t>
+            </a:r>
+            <a:endParaRPr lang="en-US" sz="4000" dirty="0"/>
+          </a:p>
+        </p:txBody>
+      </p:sp>
+      <p:sp>
+        <p:nvSpPr>
+          <p:cNvPr id="25" name="Slide Number Placeholder 0"/>
+          <p:cNvSpPr>
+            <a:spLocks noGrp="1"/>
+          </p:cNvSpPr>
+          <p:nvPr>
+            <p:ph type="sldNum" sz="quarter" idx="4294967295"/>
+          </p:nvPr>
+        </p:nvSpPr>
+        <p:spPr>
+          <a:xfrm>
+            <a:off x="27432" y="91440"/>
+            <a:ext cx="585216" cy="475488"/>
+          </a:xfrm>
+          <a:prstGeom prst="rect">
+            <a:avLst/>
+          </a:prstGeom>
+          <a:extLst>
+            <a:ext uri="{C572A759-6A51-4108-AA02-DFA0A04FC94B}">
+              <ma14:wrappingTextBoxFlag xmlns:ma14="http://schemas.microsoft.com/office/mac/drawingml/2011/main" val="0"/>
+            </a:ext>
+          </a:extLst>
+        </p:spPr>
+        <p:txBody>
+          <a:bodyPr/>
+          <a:lstStyle>
+            <a:lvl1pPr>
+              <a:defRPr sz="2000">
+                <a:solidFill>
+                  <a:srgbClr val="FFFFFF"/>
+                </a:solidFill>
+                <a:latin typeface="Calibri"/>
+                <a:ea typeface="Calibri"/>
+                <a:cs typeface="Calibri"/>
+              </a:defRPr>
+            </a:lvl1pPr>
+          </a:lstStyle>
+          <a:p>
+            <a:pPr algn="ctr"/>
+            <a:fld id="{F7021451-1387-4CA6-816F-3879F97B5CBC}" type="slidenum">
+              <a:rPr b="1" lang="en-US"/>
+              <a:t>42</a:t>
+            </a:fld>
+            <a:endParaRPr lang="en-US"/>
+          </a:p>
+        </p:txBody>
+      </p:sp>
+    </p:spTree>
+  </p:cSld>
+  <p:clrMapOvr>
+    <a:masterClrMapping/>
+  </p:clrMapOvr>
+</p:sld>
+</file>
+
+<file path=ppt/slides/slide43.xml><?xml version="1.0" encoding="utf-8"?>
+<p:sld xmlns:a="http://schemas.openxmlformats.org/drawingml/2006/main" xmlns:r="http://schemas.openxmlformats.org/officeDocument/2006/relationships" xmlns:p="http://schemas.openxmlformats.org/presentationml/2006/main">
+  <p:cSld name="Slide 43">
+    <p:spTree>
+      <p:nvGrpSpPr>
+        <p:cNvPr id="1" name=""/>
+        <p:cNvGrpSpPr/>
+        <p:nvPr/>
+      </p:nvGrpSpPr>
+      <p:grpSpPr>
+        <a:xfrm>
+          <a:off x="0" y="0"/>
+          <a:ext cx="0" cy="0"/>
+          <a:chOff x="0" y="0"/>
+          <a:chExt cx="0" cy="0"/>
+        </a:xfrm>
+      </p:grpSpPr>
+      <p:sp>
+        <p:nvSpPr>
+          <p:cNvPr id="2" name="Text 0"/>
+          <p:cNvSpPr/>
+          <p:nvPr/>
+        </p:nvSpPr>
+        <p:spPr>
+          <a:xfrm>
+            <a:off x="457200" y="713232"/>
+            <a:ext cx="11368735" cy="274320"/>
+          </a:xfrm>
+          <a:prstGeom prst="rect">
+            <a:avLst/>
+          </a:prstGeom>
+          <a:noFill/>
+          <a:ln/>
+        </p:spPr>
+        <p:txBody>
+          <a:bodyPr wrap="square" lIns="0" tIns="0" rIns="0" bIns="0" rtlCol="0" anchor="ctr"/>
+          <a:lstStyle/>
+          <a:p>
+            <a:pPr algn="r" indent="0" marL="0">
+              <a:buNone/>
+            </a:pPr>
+            <a:r>
+              <a:rPr lang="en-US" sz="1400" b="1" dirty="0">
+                <a:solidFill>
+                  <a:srgbClr val="1C3F6E"/>
+                </a:solidFill>
+                <a:latin typeface="Calibri" pitchFamily="34" charset="0"/>
+                <a:ea typeface="Calibri" pitchFamily="34" charset="-122"/>
+                <a:cs typeface="Calibri" pitchFamily="34" charset="-120"/>
+              </a:rPr>
+              <a:t>FORMATIVE EVALUATION</a:t>
+            </a:r>
+            <a:endParaRPr lang="en-US" sz="1400" dirty="0"/>
+          </a:p>
+        </p:txBody>
+      </p:sp>
+      <p:pic>
+        <p:nvPicPr>
+          <p:cNvPr id="3" name="Image 0" descr="/home/claude/f4/img/minesec_sheet.png">    </p:cNvPr>
+          <p:cNvPicPr>
+            <a:picLocks noChangeAspect="1"/>
+          </p:cNvPicPr>
+          <p:nvPr/>
+        </p:nvPicPr>
+        <p:blipFill>
+          <a:blip r:embed="rId1"/>
+          <a:stretch>
+            <a:fillRect/>
+          </a:stretch>
+        </p:blipFill>
+        <p:spPr>
+          <a:xfrm>
+            <a:off x="0" y="658368"/>
+            <a:ext cx="5120640" cy="5833872"/>
+          </a:xfrm>
+          <a:prstGeom prst="rect">
+            <a:avLst/>
+          </a:prstGeom>
+        </p:spPr>
+      </p:pic>
+      <p:sp>
+        <p:nvSpPr>
+          <p:cNvPr id="4" name="Text 1"/>
+          <p:cNvSpPr/>
+          <p:nvPr/>
+        </p:nvSpPr>
+        <p:spPr>
+          <a:xfrm>
+            <a:off x="5349240" y="1005840"/>
+            <a:ext cx="6522415" cy="731520"/>
+          </a:xfrm>
+          <a:prstGeom prst="rect">
+            <a:avLst/>
+          </a:prstGeom>
+          <a:noFill/>
+          <a:ln/>
+        </p:spPr>
+        <p:txBody>
+          <a:bodyPr wrap="square" lIns="0" tIns="0" rIns="0" bIns="0" rtlCol="0" anchor="ctr">
+            <a:normAutofit/>
+          </a:bodyPr>
+          <a:lstStyle/>
+          <a:p>
+            <a:pPr algn="ctr" indent="0" marL="0">
+              <a:buNone/>
+            </a:pPr>
+            <a:r>
+              <a:rPr lang="en-US" sz="3600" b="1" dirty="0">
+                <a:solidFill>
+                  <a:srgbClr val="990011"/>
+                </a:solidFill>
+                <a:latin typeface="Times New Roman" pitchFamily="34" charset="0"/>
+                <a:ea typeface="Times New Roman" pitchFamily="34" charset="-122"/>
+                <a:cs typeface="Times New Roman" pitchFamily="34" charset="-120"/>
+              </a:rPr>
+              <a:t>Evaluation 2</a:t>
+            </a:r>
+            <a:endParaRPr lang="en-US" sz="3600" dirty="0"/>
+          </a:p>
+        </p:txBody>
+      </p:sp>
+      <p:sp>
+        <p:nvSpPr>
+          <p:cNvPr id="5" name="Text 2"/>
+          <p:cNvSpPr/>
+          <p:nvPr/>
+        </p:nvSpPr>
+        <p:spPr>
+          <a:xfrm>
+            <a:off x="5349240" y="1783080"/>
+            <a:ext cx="6522415" cy="4663440"/>
+          </a:xfrm>
+          <a:prstGeom prst="rect">
+            <a:avLst/>
+          </a:prstGeom>
+          <a:noFill/>
+          <a:ln/>
+        </p:spPr>
+        <p:txBody>
+          <a:bodyPr wrap="square" lIns="0" tIns="0" rIns="0" bIns="0" rtlCol="0" anchor="t"/>
+          <a:lstStyle/>
+          <a:p>
+            <a:pPr algn="l" indent="0" marL="0">
+              <a:spcAft>
+                <a:spcPts val="800"/>
+              </a:spcAft>
+              <a:buNone/>
+            </a:pPr>
+            <a:r>
+              <a:rPr lang="en-US" sz="4000" dirty="0">
+                <a:solidFill>
+                  <a:srgbClr val="111111"/>
+                </a:solidFill>
+                <a:latin typeface="Times New Roman" pitchFamily="34" charset="0"/>
+                <a:ea typeface="Times New Roman" pitchFamily="34" charset="-122"/>
+                <a:cs typeface="Times New Roman" pitchFamily="34" charset="-120"/>
+              </a:rPr>
+              <a:t>What happened at Lake Nyos in 1986?</a:t>
+            </a:r>
+            <a:endParaRPr lang="en-US" sz="4000" dirty="0"/>
+          </a:p>
+        </p:txBody>
+      </p:sp>
+      <p:sp>
+        <p:nvSpPr>
+          <p:cNvPr id="25" name="Slide Number Placeholder 0"/>
+          <p:cNvSpPr>
+            <a:spLocks noGrp="1"/>
+          </p:cNvSpPr>
+          <p:nvPr>
+            <p:ph type="sldNum" sz="quarter" idx="4294967295"/>
+          </p:nvPr>
+        </p:nvSpPr>
+        <p:spPr>
+          <a:xfrm>
+            <a:off x="27432" y="91440"/>
+            <a:ext cx="585216" cy="475488"/>
+          </a:xfrm>
+          <a:prstGeom prst="rect">
+            <a:avLst/>
+          </a:prstGeom>
+          <a:extLst>
+            <a:ext uri="{C572A759-6A51-4108-AA02-DFA0A04FC94B}">
+              <ma14:wrappingTextBoxFlag xmlns:ma14="http://schemas.microsoft.com/office/mac/drawingml/2011/main" val="0"/>
+            </a:ext>
+          </a:extLst>
+        </p:spPr>
+        <p:txBody>
+          <a:bodyPr/>
+          <a:lstStyle>
+            <a:lvl1pPr>
+              <a:defRPr sz="2000">
+                <a:solidFill>
+                  <a:srgbClr val="FFFFFF"/>
+                </a:solidFill>
+                <a:latin typeface="Calibri"/>
+                <a:ea typeface="Calibri"/>
+                <a:cs typeface="Calibri"/>
+              </a:defRPr>
+            </a:lvl1pPr>
+          </a:lstStyle>
+          <a:p>
+            <a:pPr algn="ctr"/>
+            <a:fld id="{F7021451-1387-4CA6-816F-3879F97B5CBC}" type="slidenum">
+              <a:rPr b="1" lang="en-US"/>
+              <a:t>43</a:t>
+            </a:fld>
+            <a:endParaRPr lang="en-US"/>
+          </a:p>
+        </p:txBody>
+      </p:sp>
+    </p:spTree>
+  </p:cSld>
+  <p:clrMapOvr>
+    <a:masterClrMapping/>
+  </p:clrMapOvr>
+</p:sld>
+</file>
+
+<file path=ppt/slides/slide44.xml><?xml version="1.0" encoding="utf-8"?>
+<p:sld xmlns:a="http://schemas.openxmlformats.org/drawingml/2006/main" xmlns:r="http://schemas.openxmlformats.org/officeDocument/2006/relationships" xmlns:p="http://schemas.openxmlformats.org/presentationml/2006/main">
+  <p:cSld name="Slide 44">
+    <p:spTree>
+      <p:nvGrpSpPr>
+        <p:cNvPr id="1" name=""/>
+        <p:cNvGrpSpPr/>
+        <p:nvPr/>
+      </p:nvGrpSpPr>
+      <p:grpSpPr>
+        <a:xfrm>
+          <a:off x="0" y="0"/>
+          <a:ext cx="0" cy="0"/>
+          <a:chOff x="0" y="0"/>
+          <a:chExt cx="0" cy="0"/>
+        </a:xfrm>
+      </p:grpSpPr>
+      <p:sp>
+        <p:nvSpPr>
+          <p:cNvPr id="2" name="Text 0"/>
+          <p:cNvSpPr/>
+          <p:nvPr/>
+        </p:nvSpPr>
+        <p:spPr>
+          <a:xfrm>
+            <a:off x="457200" y="713232"/>
+            <a:ext cx="11368735" cy="274320"/>
+          </a:xfrm>
+          <a:prstGeom prst="rect">
+            <a:avLst/>
+          </a:prstGeom>
+          <a:noFill/>
+          <a:ln/>
+        </p:spPr>
+        <p:txBody>
+          <a:bodyPr wrap="square" lIns="0" tIns="0" rIns="0" bIns="0" rtlCol="0" anchor="ctr"/>
+          <a:lstStyle/>
+          <a:p>
+            <a:pPr algn="r" indent="0" marL="0">
+              <a:buNone/>
+            </a:pPr>
+            <a:r>
+              <a:rPr lang="en-US" sz="1400" b="1" dirty="0">
+                <a:solidFill>
+                  <a:srgbClr val="1C3F6E"/>
+                </a:solidFill>
+                <a:latin typeface="Calibri" pitchFamily="34" charset="0"/>
+                <a:ea typeface="Calibri" pitchFamily="34" charset="-122"/>
+                <a:cs typeface="Calibri" pitchFamily="34" charset="-120"/>
+              </a:rPr>
+              <a:t>FORMATIVE EVALUATION</a:t>
+            </a:r>
+            <a:endParaRPr lang="en-US" sz="1400" dirty="0"/>
+          </a:p>
+        </p:txBody>
+      </p:sp>
+      <p:pic>
+        <p:nvPicPr>
+          <p:cNvPr id="3" name="Image 0" descr="/home/claude/f4/img/minesec_sheet.png">    </p:cNvPr>
+          <p:cNvPicPr>
+            <a:picLocks noChangeAspect="1"/>
+          </p:cNvPicPr>
+          <p:nvPr/>
+        </p:nvPicPr>
+        <p:blipFill>
+          <a:blip r:embed="rId1"/>
+          <a:stretch>
+            <a:fillRect/>
+          </a:stretch>
+        </p:blipFill>
+        <p:spPr>
+          <a:xfrm>
+            <a:off x="0" y="658368"/>
+            <a:ext cx="5120640" cy="5833872"/>
+          </a:xfrm>
+          <a:prstGeom prst="rect">
+            <a:avLst/>
+          </a:prstGeom>
+        </p:spPr>
+      </p:pic>
+      <p:sp>
+        <p:nvSpPr>
+          <p:cNvPr id="4" name="Text 1"/>
+          <p:cNvSpPr/>
+          <p:nvPr/>
+        </p:nvSpPr>
+        <p:spPr>
+          <a:xfrm>
+            <a:off x="5349240" y="1005840"/>
+            <a:ext cx="6522415" cy="731520"/>
+          </a:xfrm>
+          <a:prstGeom prst="rect">
+            <a:avLst/>
+          </a:prstGeom>
+          <a:noFill/>
+          <a:ln/>
+        </p:spPr>
+        <p:txBody>
+          <a:bodyPr wrap="square" lIns="0" tIns="0" rIns="0" bIns="0" rtlCol="0" anchor="ctr">
+            <a:normAutofit/>
+          </a:bodyPr>
+          <a:lstStyle/>
+          <a:p>
+            <a:pPr algn="ctr" indent="0" marL="0">
+              <a:buNone/>
+            </a:pPr>
+            <a:r>
+              <a:rPr lang="en-US" sz="3600" b="1" dirty="0">
+                <a:solidFill>
+                  <a:srgbClr val="990011"/>
+                </a:solidFill>
+                <a:latin typeface="Times New Roman" pitchFamily="34" charset="0"/>
+                <a:ea typeface="Times New Roman" pitchFamily="34" charset="-122"/>
+                <a:cs typeface="Times New Roman" pitchFamily="34" charset="-120"/>
+              </a:rPr>
+              <a:t>Expected Answer</a:t>
+            </a:r>
+            <a:endParaRPr lang="en-US" sz="3600" dirty="0"/>
+          </a:p>
+        </p:txBody>
+      </p:sp>
+      <p:sp>
+        <p:nvSpPr>
+          <p:cNvPr id="5" name="Text 2"/>
+          <p:cNvSpPr/>
+          <p:nvPr/>
+        </p:nvSpPr>
+        <p:spPr>
+          <a:xfrm>
+            <a:off x="5349240" y="1783080"/>
+            <a:ext cx="6522415" cy="4663440"/>
+          </a:xfrm>
+          <a:prstGeom prst="rect">
+            <a:avLst/>
+          </a:prstGeom>
+          <a:noFill/>
+          <a:ln/>
+        </p:spPr>
+        <p:txBody>
+          <a:bodyPr wrap="square" lIns="0" tIns="0" rIns="0" bIns="0" rtlCol="0" anchor="t"/>
+          <a:lstStyle/>
+          <a:p>
+            <a:pPr algn="l" indent="0" marL="0">
+              <a:spcAft>
+                <a:spcPts val="800"/>
+              </a:spcAft>
+              <a:buNone/>
+            </a:pPr>
+            <a:r>
+              <a:rPr lang="en-US" sz="4000" dirty="0">
+                <a:solidFill>
+                  <a:srgbClr val="111111"/>
+                </a:solidFill>
+                <a:latin typeface="Times New Roman" pitchFamily="34" charset="0"/>
+                <a:ea typeface="Times New Roman" pitchFamily="34" charset="-122"/>
+                <a:cs typeface="Times New Roman" pitchFamily="34" charset="-120"/>
+              </a:rPr>
+              <a:t>A cloud of gas killed about 1,700 people.</a:t>
+            </a:r>
+            <a:endParaRPr lang="en-US" sz="4000" dirty="0"/>
+          </a:p>
+        </p:txBody>
+      </p:sp>
+      <p:sp>
+        <p:nvSpPr>
+          <p:cNvPr id="25" name="Slide Number Placeholder 0"/>
+          <p:cNvSpPr>
+            <a:spLocks noGrp="1"/>
+          </p:cNvSpPr>
+          <p:nvPr>
+            <p:ph type="sldNum" sz="quarter" idx="4294967295"/>
+          </p:nvPr>
+        </p:nvSpPr>
+        <p:spPr>
+          <a:xfrm>
+            <a:off x="27432" y="91440"/>
+            <a:ext cx="585216" cy="475488"/>
+          </a:xfrm>
+          <a:prstGeom prst="rect">
+            <a:avLst/>
+          </a:prstGeom>
+          <a:extLst>
+            <a:ext uri="{C572A759-6A51-4108-AA02-DFA0A04FC94B}">
+              <ma14:wrappingTextBoxFlag xmlns:ma14="http://schemas.microsoft.com/office/mac/drawingml/2011/main" val="0"/>
+            </a:ext>
+          </a:extLst>
+        </p:spPr>
+        <p:txBody>
+          <a:bodyPr/>
+          <a:lstStyle>
+            <a:lvl1pPr>
+              <a:defRPr sz="2000">
+                <a:solidFill>
+                  <a:srgbClr val="FFFFFF"/>
+                </a:solidFill>
+                <a:latin typeface="Calibri"/>
+                <a:ea typeface="Calibri"/>
+                <a:cs typeface="Calibri"/>
+              </a:defRPr>
+            </a:lvl1pPr>
+          </a:lstStyle>
+          <a:p>
+            <a:pPr algn="ctr"/>
+            <a:fld id="{F7021451-1387-4CA6-816F-3879F97B5CBC}" type="slidenum">
+              <a:rPr b="1" lang="en-US"/>
+              <a:t>44</a:t>
+            </a:fld>
+            <a:endParaRPr lang="en-US"/>
+          </a:p>
+        </p:txBody>
+      </p:sp>
+    </p:spTree>
+  </p:cSld>
+  <p:clrMapOvr>
+    <a:masterClrMapping/>
+  </p:clrMapOvr>
+</p:sld>
+</file>
+
+<file path=ppt/slides/slide45.xml><?xml version="1.0" encoding="utf-8"?>
+<p:sld xmlns:a="http://schemas.openxmlformats.org/drawingml/2006/main" xmlns:r="http://schemas.openxmlformats.org/officeDocument/2006/relationships" xmlns:p="http://schemas.openxmlformats.org/presentationml/2006/main">
+  <p:cSld name="Slide 45">
+    <p:spTree>
+      <p:nvGrpSpPr>
+        <p:cNvPr id="1" name=""/>
+        <p:cNvGrpSpPr/>
+        <p:nvPr/>
+      </p:nvGrpSpPr>
+      <p:grpSpPr>
+        <a:xfrm>
+          <a:off x="0" y="0"/>
+          <a:ext cx="0" cy="0"/>
+          <a:chOff x="0" y="0"/>
+          <a:chExt cx="0" cy="0"/>
+        </a:xfrm>
+      </p:grpSpPr>
+      <p:sp>
+        <p:nvSpPr>
+          <p:cNvPr id="2" name="Text 0"/>
+          <p:cNvSpPr/>
+          <p:nvPr/>
+        </p:nvSpPr>
+        <p:spPr>
+          <a:xfrm>
+            <a:off x="457200" y="713232"/>
+            <a:ext cx="11368735" cy="274320"/>
+          </a:xfrm>
+          <a:prstGeom prst="rect">
+            <a:avLst/>
+          </a:prstGeom>
+          <a:noFill/>
+          <a:ln/>
+        </p:spPr>
+        <p:txBody>
+          <a:bodyPr wrap="square" lIns="0" tIns="0" rIns="0" bIns="0" rtlCol="0" anchor="ctr"/>
+          <a:lstStyle/>
+          <a:p>
+            <a:pPr algn="r" indent="0" marL="0">
+              <a:buNone/>
+            </a:pPr>
+            <a:r>
+              <a:rPr lang="en-US" sz="1400" b="1" dirty="0">
+                <a:solidFill>
+                  <a:srgbClr val="1C3F6E"/>
+                </a:solidFill>
+                <a:latin typeface="Calibri" pitchFamily="34" charset="0"/>
+                <a:ea typeface="Calibri" pitchFamily="34" charset="-122"/>
+                <a:cs typeface="Calibri" pitchFamily="34" charset="-120"/>
+              </a:rPr>
+              <a:t>REMEDIATION</a:t>
+            </a:r>
+            <a:endParaRPr lang="en-US" sz="1400" dirty="0"/>
+          </a:p>
+        </p:txBody>
+      </p:sp>
+      <p:pic>
+        <p:nvPicPr>
+          <p:cNvPr id="3" name="Image 0" descr="/home/claude/f4/img/minesec_sheet.png">    </p:cNvPr>
+          <p:cNvPicPr>
+            <a:picLocks noChangeAspect="1"/>
+          </p:cNvPicPr>
+          <p:nvPr/>
+        </p:nvPicPr>
+        <p:blipFill>
+          <a:blip r:embed="rId1"/>
+          <a:stretch>
+            <a:fillRect/>
+          </a:stretch>
+        </p:blipFill>
+        <p:spPr>
+          <a:xfrm>
+            <a:off x="0" y="658368"/>
+            <a:ext cx="2468880" cy="5833872"/>
+          </a:xfrm>
+          <a:prstGeom prst="rect">
+            <a:avLst/>
+          </a:prstGeom>
+        </p:spPr>
+      </p:pic>
+      <p:sp>
+        <p:nvSpPr>
+          <p:cNvPr id="4" name="Text 1"/>
+          <p:cNvSpPr/>
+          <p:nvPr/>
+        </p:nvSpPr>
+        <p:spPr>
+          <a:xfrm>
+            <a:off x="2697480" y="1005840"/>
+            <a:ext cx="9174175" cy="731520"/>
+          </a:xfrm>
+          <a:prstGeom prst="rect">
+            <a:avLst/>
+          </a:prstGeom>
+          <a:noFill/>
+          <a:ln/>
+        </p:spPr>
+        <p:txBody>
+          <a:bodyPr wrap="square" lIns="0" tIns="0" rIns="0" bIns="0" rtlCol="0" anchor="ctr">
+            <a:normAutofit/>
+          </a:bodyPr>
+          <a:lstStyle/>
+          <a:p>
+            <a:pPr algn="ctr" indent="0" marL="0">
+              <a:buNone/>
+            </a:pPr>
+            <a:r>
+              <a:rPr lang="en-US" sz="3600" b="1" dirty="0">
+                <a:solidFill>
+                  <a:srgbClr val="990011"/>
+                </a:solidFill>
+                <a:latin typeface="Times New Roman" pitchFamily="34" charset="0"/>
+                <a:ea typeface="Times New Roman" pitchFamily="34" charset="-122"/>
+                <a:cs typeface="Times New Roman" pitchFamily="34" charset="-120"/>
+              </a:rPr>
+              <a:t>Remediation</a:t>
+            </a:r>
+            <a:endParaRPr lang="en-US" sz="3600" dirty="0"/>
+          </a:p>
+        </p:txBody>
+      </p:sp>
+      <p:sp>
+        <p:nvSpPr>
+          <p:cNvPr id="5" name="Text 2"/>
+          <p:cNvSpPr/>
+          <p:nvPr/>
+        </p:nvSpPr>
+        <p:spPr>
+          <a:xfrm>
+            <a:off x="2697480" y="1783080"/>
+            <a:ext cx="9174175" cy="4663440"/>
+          </a:xfrm>
+          <a:prstGeom prst="rect">
+            <a:avLst/>
+          </a:prstGeom>
+          <a:noFill/>
+          <a:ln/>
+        </p:spPr>
+        <p:txBody>
+          <a:bodyPr wrap="square" lIns="0" tIns="0" rIns="0" bIns="0" rtlCol="0" anchor="t"/>
+          <a:lstStyle/>
+          <a:p>
+            <a:pPr algn="l" indent="0" marL="0">
+              <a:spcAft>
+                <a:spcPts val="800"/>
+              </a:spcAft>
+              <a:buNone/>
+            </a:pPr>
+            <a:r>
+              <a:rPr lang="en-US" sz="4000" b="1" dirty="0">
+                <a:solidFill>
+                  <a:srgbClr val="111111"/>
+                </a:solidFill>
+                <a:latin typeface="Times New Roman" pitchFamily="34" charset="0"/>
+                <a:ea typeface="Times New Roman" pitchFamily="34" charset="-122"/>
+                <a:cs typeface="Times New Roman" pitchFamily="34" charset="-120"/>
+              </a:rPr>
+              <a:t>Fill in the blanks:</a:t>
+            </a:r>
+            <a:endParaRPr lang="en-US" sz="4000" dirty="0"/>
+          </a:p>
+          <a:p>
+            <a:pPr algn="l" marL="342900" indent="-342900">
+              <a:spcAft>
+                <a:spcPts val="800"/>
+              </a:spcAft>
+              <a:buSzPct val="100000"/>
+              <a:buFont typeface="+mj-lt"/>
+              <a:buAutoNum type="arabicPeriod" startAt="1"/>
+            </a:pPr>
+            <a:r>
+              <a:rPr lang="en-US" sz="4000" dirty="0">
+                <a:solidFill>
+                  <a:srgbClr val="111111"/>
+                </a:solidFill>
+                <a:latin typeface="Times New Roman" pitchFamily="34" charset="0"/>
+                <a:ea typeface="Times New Roman" pitchFamily="34" charset="-122"/>
+                <a:cs typeface="Times New Roman" pitchFamily="34" charset="-120"/>
+              </a:rPr>
+              <a:t>Energy from the heat of the Earth is ______ energy.</a:t>
+            </a:r>
+            <a:endParaRPr lang="en-US" sz="4000" dirty="0"/>
+          </a:p>
+          <a:p>
+            <a:pPr algn="l" marL="342900" indent="-342900">
+              <a:spcAft>
+                <a:spcPts val="800"/>
+              </a:spcAft>
+              <a:buSzPct val="100000"/>
+              <a:buFont typeface="+mj-lt"/>
+              <a:buAutoNum type="arabicPeriod" startAt="1"/>
+            </a:pPr>
+            <a:r>
+              <a:rPr lang="en-US" sz="4000" dirty="0">
+                <a:solidFill>
+                  <a:srgbClr val="111111"/>
+                </a:solidFill>
+                <a:latin typeface="Times New Roman" pitchFamily="34" charset="0"/>
+                <a:ea typeface="Times New Roman" pitchFamily="34" charset="-122"/>
+                <a:cs typeface="Times New Roman" pitchFamily="34" charset="-120"/>
+              </a:rPr>
+              <a:t>In 1986, gas came out of Lake ______.</a:t>
+            </a:r>
+            <a:endParaRPr lang="en-US" sz="4000" dirty="0"/>
+          </a:p>
+          <a:p>
+            <a:pPr algn="l" marL="342900" indent="-342900">
+              <a:spcAft>
+                <a:spcPts val="800"/>
+              </a:spcAft>
+              <a:buSzPct val="100000"/>
+              <a:buFont typeface="+mj-lt"/>
+              <a:buAutoNum type="arabicPeriod" startAt="1"/>
+            </a:pPr>
+            <a:r>
+              <a:rPr lang="en-US" sz="4000" dirty="0">
+                <a:solidFill>
+                  <a:srgbClr val="111111"/>
+                </a:solidFill>
+                <a:latin typeface="Times New Roman" pitchFamily="34" charset="0"/>
+                <a:ea typeface="Times New Roman" pitchFamily="34" charset="-122"/>
+                <a:cs typeface="Times New Roman" pitchFamily="34" charset="-120"/>
+              </a:rPr>
+              <a:t>The soils near volcanoes are very ______.</a:t>
+            </a:r>
+            <a:endParaRPr lang="en-US" sz="4000" dirty="0"/>
+          </a:p>
+        </p:txBody>
+      </p:sp>
+      <p:sp>
+        <p:nvSpPr>
+          <p:cNvPr id="25" name="Slide Number Placeholder 0"/>
+          <p:cNvSpPr>
+            <a:spLocks noGrp="1"/>
+          </p:cNvSpPr>
+          <p:nvPr>
+            <p:ph type="sldNum" sz="quarter" idx="4294967295"/>
+          </p:nvPr>
+        </p:nvSpPr>
+        <p:spPr>
+          <a:xfrm>
+            <a:off x="27432" y="91440"/>
+            <a:ext cx="585216" cy="475488"/>
+          </a:xfrm>
+          <a:prstGeom prst="rect">
+            <a:avLst/>
+          </a:prstGeom>
+          <a:extLst>
+            <a:ext uri="{C572A759-6A51-4108-AA02-DFA0A04FC94B}">
+              <ma14:wrappingTextBoxFlag xmlns:ma14="http://schemas.microsoft.com/office/mac/drawingml/2011/main" val="0"/>
+            </a:ext>
+          </a:extLst>
+        </p:spPr>
+        <p:txBody>
+          <a:bodyPr/>
+          <a:lstStyle>
+            <a:lvl1pPr>
+              <a:defRPr sz="2000">
+                <a:solidFill>
+                  <a:srgbClr val="FFFFFF"/>
+                </a:solidFill>
+                <a:latin typeface="Calibri"/>
+                <a:ea typeface="Calibri"/>
+                <a:cs typeface="Calibri"/>
+              </a:defRPr>
+            </a:lvl1pPr>
+          </a:lstStyle>
+          <a:p>
+            <a:pPr algn="ctr"/>
+            <a:fld id="{F7021451-1387-4CA6-816F-3879F97B5CBC}" type="slidenum">
+              <a:rPr b="1" lang="en-US"/>
+              <a:t>45</a:t>
+            </a:fld>
+            <a:endParaRPr lang="en-US"/>
+          </a:p>
+        </p:txBody>
+      </p:sp>
+    </p:spTree>
+  </p:cSld>
+  <p:clrMapOvr>
+    <a:masterClrMapping/>
+  </p:clrMapOvr>
+</p:sld>
+</file>
+
+<file path=ppt/slides/slide46.xml><?xml version="1.0" encoding="utf-8"?>
+<p:sld xmlns:a="http://schemas.openxmlformats.org/drawingml/2006/main" xmlns:r="http://schemas.openxmlformats.org/officeDocument/2006/relationships" xmlns:p="http://schemas.openxmlformats.org/presentationml/2006/main">
+  <p:cSld name="Slide 46">
+    <p:spTree>
+      <p:nvGrpSpPr>
+        <p:cNvPr id="1" name=""/>
+        <p:cNvGrpSpPr/>
+        <p:nvPr/>
+      </p:nvGrpSpPr>
+      <p:grpSpPr>
+        <a:xfrm>
+          <a:off x="0" y="0"/>
+          <a:ext cx="0" cy="0"/>
+          <a:chOff x="0" y="0"/>
+          <a:chExt cx="0" cy="0"/>
+        </a:xfrm>
+      </p:grpSpPr>
+      <p:sp>
+        <p:nvSpPr>
+          <p:cNvPr id="2" name="Text 0"/>
+          <p:cNvSpPr/>
+          <p:nvPr/>
+        </p:nvSpPr>
+        <p:spPr>
+          <a:xfrm>
+            <a:off x="457200" y="713232"/>
+            <a:ext cx="11368735" cy="274320"/>
+          </a:xfrm>
+          <a:prstGeom prst="rect">
+            <a:avLst/>
+          </a:prstGeom>
+          <a:noFill/>
+          <a:ln/>
+        </p:spPr>
+        <p:txBody>
+          <a:bodyPr wrap="square" lIns="0" tIns="0" rIns="0" bIns="0" rtlCol="0" anchor="ctr"/>
+          <a:lstStyle/>
+          <a:p>
+            <a:pPr algn="r" indent="0" marL="0">
+              <a:buNone/>
+            </a:pPr>
+            <a:r>
+              <a:rPr lang="en-US" sz="1400" b="1" dirty="0">
+                <a:solidFill>
+                  <a:srgbClr val="1C3F6E"/>
+                </a:solidFill>
+                <a:latin typeface="Calibri" pitchFamily="34" charset="0"/>
+                <a:ea typeface="Calibri" pitchFamily="34" charset="-122"/>
+                <a:cs typeface="Calibri" pitchFamily="34" charset="-120"/>
+              </a:rPr>
+              <a:t>HOMEWORK</a:t>
+            </a:r>
+            <a:endParaRPr lang="en-US" sz="1400" dirty="0"/>
+          </a:p>
+        </p:txBody>
+      </p:sp>
+      <p:pic>
+        <p:nvPicPr>
+          <p:cNvPr id="3" name="Image 0" descr="/home/claude/f4/img/minesec_sheet.png">    </p:cNvPr>
+          <p:cNvPicPr>
+            <a:picLocks noChangeAspect="1"/>
+          </p:cNvPicPr>
+          <p:nvPr/>
+        </p:nvPicPr>
+        <p:blipFill>
+          <a:blip r:embed="rId1"/>
+          <a:stretch>
+            <a:fillRect/>
+          </a:stretch>
+        </p:blipFill>
+        <p:spPr>
+          <a:xfrm>
+            <a:off x="0" y="658368"/>
+            <a:ext cx="5120640" cy="5833872"/>
+          </a:xfrm>
+          <a:prstGeom prst="rect">
+            <a:avLst/>
+          </a:prstGeom>
+        </p:spPr>
+      </p:pic>
+      <p:sp>
+        <p:nvSpPr>
+          <p:cNvPr id="4" name="Text 1"/>
+          <p:cNvSpPr/>
+          <p:nvPr/>
+        </p:nvSpPr>
+        <p:spPr>
+          <a:xfrm>
+            <a:off x="5349240" y="1005840"/>
+            <a:ext cx="6522415" cy="731520"/>
+          </a:xfrm>
+          <a:prstGeom prst="rect">
+            <a:avLst/>
+          </a:prstGeom>
+          <a:noFill/>
+          <a:ln/>
+        </p:spPr>
+        <p:txBody>
+          <a:bodyPr wrap="square" lIns="0" tIns="0" rIns="0" bIns="0" rtlCol="0" anchor="ctr">
+            <a:normAutofit/>
+          </a:bodyPr>
+          <a:lstStyle/>
+          <a:p>
+            <a:pPr algn="ctr" indent="0" marL="0">
+              <a:buNone/>
+            </a:pPr>
+            <a:r>
+              <a:rPr lang="en-US" sz="3600" b="1" dirty="0">
+                <a:solidFill>
+                  <a:srgbClr val="990011"/>
+                </a:solidFill>
+                <a:latin typeface="Times New Roman" pitchFamily="34" charset="0"/>
+                <a:ea typeface="Times New Roman" pitchFamily="34" charset="-122"/>
+                <a:cs typeface="Times New Roman" pitchFamily="34" charset="-120"/>
+              </a:rPr>
+              <a:t>Homework</a:t>
+            </a:r>
+            <a:endParaRPr lang="en-US" sz="3600" dirty="0"/>
+          </a:p>
+        </p:txBody>
+      </p:sp>
+      <p:sp>
+        <p:nvSpPr>
+          <p:cNvPr id="5" name="Text 2"/>
+          <p:cNvSpPr/>
+          <p:nvPr/>
+        </p:nvSpPr>
+        <p:spPr>
+          <a:xfrm>
+            <a:off x="5349240" y="1783080"/>
+            <a:ext cx="6522415" cy="4663440"/>
+          </a:xfrm>
+          <a:prstGeom prst="rect">
+            <a:avLst/>
+          </a:prstGeom>
+          <a:noFill/>
+          <a:ln/>
+        </p:spPr>
+        <p:txBody>
+          <a:bodyPr wrap="square" lIns="0" tIns="0" rIns="0" bIns="0" rtlCol="0" anchor="t"/>
+          <a:lstStyle/>
+          <a:p>
+            <a:pPr algn="l" indent="0" marL="0">
+              <a:spcAft>
+                <a:spcPts val="800"/>
+              </a:spcAft>
+              <a:buNone/>
+            </a:pPr>
+            <a:r>
+              <a:rPr lang="en-US" sz="4000" dirty="0">
+                <a:solidFill>
+                  <a:srgbClr val="111111"/>
+                </a:solidFill>
+                <a:latin typeface="Times New Roman" pitchFamily="34" charset="0"/>
+                <a:ea typeface="Times New Roman" pitchFamily="34" charset="-122"/>
+                <a:cs typeface="Times New Roman" pitchFamily="34" charset="-120"/>
+              </a:rPr>
+              <a:t>Ask your parents if they have ever felt the ground shake. Write where and when it happened, and what they felt.</a:t>
+            </a:r>
+            <a:endParaRPr lang="en-US" sz="4000" dirty="0"/>
+          </a:p>
+        </p:txBody>
+      </p:sp>
+      <p:sp>
+        <p:nvSpPr>
+          <p:cNvPr id="25" name="Slide Number Placeholder 0"/>
+          <p:cNvSpPr>
+            <a:spLocks noGrp="1"/>
+          </p:cNvSpPr>
+          <p:nvPr>
+            <p:ph type="sldNum" sz="quarter" idx="4294967295"/>
+          </p:nvPr>
+        </p:nvSpPr>
+        <p:spPr>
+          <a:xfrm>
+            <a:off x="27432" y="91440"/>
+            <a:ext cx="585216" cy="475488"/>
+          </a:xfrm>
+          <a:prstGeom prst="rect">
+            <a:avLst/>
+          </a:prstGeom>
+          <a:extLst>
+            <a:ext uri="{C572A759-6A51-4108-AA02-DFA0A04FC94B}">
+              <ma14:wrappingTextBoxFlag xmlns:ma14="http://schemas.microsoft.com/office/mac/drawingml/2011/main" val="0"/>
+            </a:ext>
+          </a:extLst>
+        </p:spPr>
+        <p:txBody>
+          <a:bodyPr/>
+          <a:lstStyle>
+            <a:lvl1pPr>
+              <a:defRPr sz="2000">
+                <a:solidFill>
+                  <a:srgbClr val="FFFFFF"/>
+                </a:solidFill>
+                <a:latin typeface="Calibri"/>
+                <a:ea typeface="Calibri"/>
+                <a:cs typeface="Calibri"/>
+              </a:defRPr>
+            </a:lvl1pPr>
+          </a:lstStyle>
+          <a:p>
+            <a:pPr algn="ctr"/>
+            <a:fld id="{F7021451-1387-4CA6-816F-3879F97B5CBC}" type="slidenum">
+              <a:rPr b="1" lang="en-US"/>
+              <a:t>46</a:t>
+            </a:fld>
+            <a:endParaRPr lang="en-US"/>
+          </a:p>
+        </p:txBody>
+      </p:sp>
+    </p:spTree>
+  </p:cSld>
+  <p:clrMapOvr>
+    <a:masterClrMapping/>
+  </p:clrMapOvr>
+</p:sld>
+</file>
+
+<file path=ppt/slides/slide47.xml><?xml version="1.0" encoding="utf-8"?>
+<p:sld xmlns:a="http://schemas.openxmlformats.org/drawingml/2006/main" xmlns:r="http://schemas.openxmlformats.org/officeDocument/2006/relationships" xmlns:p="http://schemas.openxmlformats.org/presentationml/2006/main">
+  <p:cSld name="Slide 47">
+    <p:spTree>
+      <p:nvGrpSpPr>
+        <p:cNvPr id="1" name=""/>
+        <p:cNvGrpSpPr/>
+        <p:nvPr/>
+      </p:nvGrpSpPr>
+      <p:grpSpPr>
+        <a:xfrm>
+          <a:off x="0" y="0"/>
+          <a:ext cx="0" cy="0"/>
+          <a:chOff x="0" y="0"/>
+          <a:chExt cx="0" cy="0"/>
+        </a:xfrm>
+      </p:grpSpPr>
+      <p:sp>
+        <p:nvSpPr>
+          <p:cNvPr id="2" name="Text 0"/>
+          <p:cNvSpPr/>
+          <p:nvPr/>
+        </p:nvSpPr>
+        <p:spPr>
+          <a:xfrm>
+            <a:off x="457200" y="713232"/>
+            <a:ext cx="11368735" cy="274320"/>
+          </a:xfrm>
+          <a:prstGeom prst="rect">
+            <a:avLst/>
+          </a:prstGeom>
+          <a:noFill/>
+          <a:ln/>
+        </p:spPr>
+        <p:txBody>
+          <a:bodyPr wrap="square" lIns="0" tIns="0" rIns="0" bIns="0" rtlCol="0" anchor="ctr"/>
+          <a:lstStyle/>
+          <a:p>
+            <a:pPr algn="r" indent="0" marL="0">
+              <a:buNone/>
+            </a:pPr>
+            <a:r>
+              <a:rPr lang="en-US" sz="1400" b="1" dirty="0">
+                <a:solidFill>
+                  <a:srgbClr val="1C3F6E"/>
+                </a:solidFill>
+                <a:latin typeface="Calibri" pitchFamily="34" charset="0"/>
+                <a:ea typeface="Calibri" pitchFamily="34" charset="-122"/>
+                <a:cs typeface="Calibri" pitchFamily="34" charset="-120"/>
+              </a:rPr>
+              <a:t>NEXT LESSON</a:t>
+            </a:r>
+            <a:endParaRPr lang="en-US" sz="1400" dirty="0"/>
+          </a:p>
+        </p:txBody>
+      </p:sp>
+      <p:pic>
+        <p:nvPicPr>
+          <p:cNvPr id="3" name="Image 0" descr="/home/claude/f4/img/minesec_sheet.png">    </p:cNvPr>
+          <p:cNvPicPr>
+            <a:picLocks noChangeAspect="1"/>
+          </p:cNvPicPr>
+          <p:nvPr/>
+        </p:nvPicPr>
+        <p:blipFill>
+          <a:blip r:embed="rId1"/>
+          <a:stretch>
+            <a:fillRect/>
+          </a:stretch>
+        </p:blipFill>
+        <p:spPr>
+          <a:xfrm>
+            <a:off x="0" y="658368"/>
+            <a:ext cx="5120640" cy="5833872"/>
+          </a:xfrm>
+          <a:prstGeom prst="rect">
+            <a:avLst/>
+          </a:prstGeom>
+        </p:spPr>
+      </p:pic>
+      <p:sp>
+        <p:nvSpPr>
+          <p:cNvPr id="4" name="Text 1"/>
+          <p:cNvSpPr/>
+          <p:nvPr/>
+        </p:nvSpPr>
+        <p:spPr>
+          <a:xfrm>
+            <a:off x="5349240" y="1005840"/>
+            <a:ext cx="6522415" cy="731520"/>
+          </a:xfrm>
+          <a:prstGeom prst="rect">
+            <a:avLst/>
+          </a:prstGeom>
+          <a:noFill/>
+          <a:ln/>
+        </p:spPr>
+        <p:txBody>
+          <a:bodyPr wrap="square" lIns="0" tIns="0" rIns="0" bIns="0" rtlCol="0" anchor="ctr">
+            <a:normAutofit/>
+          </a:bodyPr>
+          <a:lstStyle/>
+          <a:p>
+            <a:pPr algn="ctr" indent="0" marL="0">
+              <a:buNone/>
+            </a:pPr>
+            <a:r>
+              <a:rPr lang="en-US" sz="3600" b="1" dirty="0">
+                <a:solidFill>
+                  <a:srgbClr val="990011"/>
+                </a:solidFill>
+                <a:latin typeface="Times New Roman" pitchFamily="34" charset="0"/>
+                <a:ea typeface="Times New Roman" pitchFamily="34" charset="-122"/>
+                <a:cs typeface="Times New Roman" pitchFamily="34" charset="-120"/>
+              </a:rPr>
+              <a:t>Next Lesson</a:t>
+            </a:r>
+            <a:endParaRPr lang="en-US" sz="3600" dirty="0"/>
+          </a:p>
+        </p:txBody>
+      </p:sp>
+      <p:sp>
+        <p:nvSpPr>
+          <p:cNvPr id="5" name="Text 2"/>
+          <p:cNvSpPr/>
+          <p:nvPr/>
+        </p:nvSpPr>
+        <p:spPr>
+          <a:xfrm>
+            <a:off x="5349240" y="1783080"/>
+            <a:ext cx="6522415" cy="4663440"/>
+          </a:xfrm>
+          <a:prstGeom prst="rect">
+            <a:avLst/>
+          </a:prstGeom>
+          <a:noFill/>
+          <a:ln/>
+        </p:spPr>
+        <p:txBody>
+          <a:bodyPr wrap="square" lIns="0" tIns="0" rIns="0" bIns="0" rtlCol="0" anchor="ctr"/>
+          <a:lstStyle/>
+          <a:p>
+            <a:pPr algn="ctr" indent="0" marL="0">
+              <a:spcAft>
+                <a:spcPts val="800"/>
+              </a:spcAft>
+              <a:buNone/>
+            </a:pPr>
+            <a:r>
+              <a:rPr lang="en-US" sz="4000" b="1" dirty="0">
+                <a:solidFill>
+                  <a:srgbClr val="111111"/>
+                </a:solidFill>
+                <a:latin typeface="Times New Roman" pitchFamily="34" charset="0"/>
+                <a:ea typeface="Times New Roman" pitchFamily="34" charset="-122"/>
+                <a:cs typeface="Times New Roman" pitchFamily="34" charset="-120"/>
+              </a:rPr>
+              <a:t>Our next lesson will be on:</a:t>
+            </a:r>
+            <a:endParaRPr lang="en-US" sz="4000" dirty="0"/>
+          </a:p>
+          <a:p>
+            <a:pPr algn="ctr" indent="0" marL="0">
+              <a:spcAft>
+                <a:spcPts val="800"/>
+              </a:spcAft>
+              <a:buNone/>
+            </a:pPr>
+            <a:r>
+              <a:rPr lang="en-US" sz="4000" b="1" dirty="0">
+                <a:solidFill>
+                  <a:srgbClr val="990011"/>
+                </a:solidFill>
+                <a:latin typeface="Times New Roman" pitchFamily="34" charset="0"/>
+                <a:ea typeface="Times New Roman" pitchFamily="34" charset="-122"/>
+                <a:cs typeface="Times New Roman" pitchFamily="34" charset="-120"/>
+              </a:rPr>
+              <a:t>Lesson 13: Earthquakes</a:t>
+            </a:r>
+            <a:endParaRPr lang="en-US" sz="4000" dirty="0"/>
+          </a:p>
+        </p:txBody>
+      </p:sp>
+      <p:sp>
+        <p:nvSpPr>
+          <p:cNvPr id="25" name="Slide Number Placeholder 0"/>
+          <p:cNvSpPr>
+            <a:spLocks noGrp="1"/>
+          </p:cNvSpPr>
+          <p:nvPr>
+            <p:ph type="sldNum" sz="quarter" idx="4294967295"/>
+          </p:nvPr>
+        </p:nvSpPr>
+        <p:spPr>
+          <a:xfrm>
+            <a:off x="27432" y="91440"/>
+            <a:ext cx="585216" cy="475488"/>
+          </a:xfrm>
+          <a:prstGeom prst="rect">
+            <a:avLst/>
+          </a:prstGeom>
+          <a:extLst>
+            <a:ext uri="{C572A759-6A51-4108-AA02-DFA0A04FC94B}">
+              <ma14:wrappingTextBoxFlag xmlns:ma14="http://schemas.microsoft.com/office/mac/drawingml/2011/main" val="0"/>
+            </a:ext>
+          </a:extLst>
+        </p:spPr>
+        <p:txBody>
+          <a:bodyPr/>
+          <a:lstStyle>
+            <a:lvl1pPr>
+              <a:defRPr sz="2000">
+                <a:solidFill>
+                  <a:srgbClr val="FFFFFF"/>
+                </a:solidFill>
+                <a:latin typeface="Calibri"/>
+                <a:ea typeface="Calibri"/>
+                <a:cs typeface="Calibri"/>
+              </a:defRPr>
+            </a:lvl1pPr>
+          </a:lstStyle>
+          <a:p>
+            <a:pPr algn="ctr"/>
+            <a:fld id="{F7021451-1387-4CA6-816F-3879F97B5CBC}" type="slidenum">
+              <a:rPr b="1" lang="en-US"/>
+              <a:t>47</a:t>
+            </a:fld>
+            <a:endParaRPr lang="en-US"/>
+          </a:p>
+        </p:txBody>
+      </p:sp>
+    </p:spTree>
+  </p:cSld>
+  <p:clrMapOvr>
+    <a:masterClrMapping/>
+  </p:clrMapOvr>
+</p:sld>
+</file>
+
+<file path=ppt/slides/slide48.xml><?xml version="1.0" encoding="utf-8"?>
+<p:sld xmlns:a="http://schemas.openxmlformats.org/drawingml/2006/main" xmlns:r="http://schemas.openxmlformats.org/officeDocument/2006/relationships" xmlns:p="http://schemas.openxmlformats.org/presentationml/2006/main">
+  <p:cSld name="Slide 48">
+    <p:spTree>
+      <p:nvGrpSpPr>
+        <p:cNvPr id="1" name=""/>
+        <p:cNvGrpSpPr/>
+        <p:nvPr/>
+      </p:nvGrpSpPr>
+      <p:grpSpPr>
+        <a:xfrm>
+          <a:off x="0" y="0"/>
+          <a:ext cx="0" cy="0"/>
+          <a:chOff x="0" y="0"/>
+          <a:chExt cx="0" cy="0"/>
+        </a:xfrm>
+      </p:grpSpPr>
+      <p:sp>
+        <p:nvSpPr>
+          <p:cNvPr id="2" name="Text 0"/>
+          <p:cNvSpPr/>
+          <p:nvPr/>
+        </p:nvSpPr>
+        <p:spPr>
+          <a:xfrm>
+            <a:off x="457200" y="713232"/>
+            <a:ext cx="11368735" cy="274320"/>
+          </a:xfrm>
+          <a:prstGeom prst="rect">
+            <a:avLst/>
+          </a:prstGeom>
+          <a:noFill/>
+          <a:ln/>
+        </p:spPr>
+        <p:txBody>
+          <a:bodyPr wrap="square" lIns="0" tIns="0" rIns="0" bIns="0" rtlCol="0" anchor="ctr"/>
+          <a:lstStyle/>
+          <a:p>
+            <a:pPr algn="r" indent="0" marL="0">
+              <a:buNone/>
+            </a:pPr>
+            <a:r>
+              <a:rPr lang="en-US" sz="1400" b="1" dirty="0">
+                <a:solidFill>
+                  <a:srgbClr val="1C3F6E"/>
+                </a:solidFill>
+                <a:latin typeface="Calibri" pitchFamily="34" charset="0"/>
+                <a:ea typeface="Calibri" pitchFamily="34" charset="-122"/>
+                <a:cs typeface="Calibri" pitchFamily="34" charset="-120"/>
+              </a:rPr>
               <a:t>BILINGUAL GAME</a:t>
             </a:r>
             <a:endParaRPr lang="en-US" sz="1400" dirty="0"/>
@@ -15257,7 +17491,7 @@
       </p:sp>
       <p:graphicFrame>
         <p:nvGraphicFramePr>
-          <p:cNvPr id="43" name="Table 0"/>
+          <p:cNvPr id="49" name="Table 0"/>
           <p:cNvGraphicFramePr>
             <a:graphicFrameLocks noGrp="1"/>
           </p:cNvGraphicFramePr>
@@ -16569,7 +18803,7 @@
             <a:pPr algn="ctr"/>
             <a:fld id="{F7021451-1387-4CA6-816F-3879F97B5CBC}" type="slidenum">
               <a:rPr b="1" lang="en-US"/>
-              <a:t>42</a:t>
+              <a:t>48</a:t>
             </a:fld>
             <a:endParaRPr lang="en-US"/>
           </a:p>
@@ -16583,9 +18817,9 @@
 </p:sld>
 </file>
 
-<file path=ppt/slides/slide43.xml><?xml version="1.0" encoding="utf-8"?>
+<file path=ppt/slides/slide49.xml><?xml version="1.0" encoding="utf-8"?>
 <p:sld xmlns:a="http://schemas.openxmlformats.org/drawingml/2006/main" xmlns:r="http://schemas.openxmlformats.org/officeDocument/2006/relationships" xmlns:p="http://schemas.openxmlformats.org/presentationml/2006/main">
-  <p:cSld name="Slide 43">
+  <p:cSld name="Slide 49">
     <p:spTree>
       <p:nvGrpSpPr>
         <p:cNvPr id="1" name=""/>
@@ -16680,7 +18914,7 @@
       </p:sp>
       <p:graphicFrame>
         <p:nvGraphicFramePr>
-          <p:cNvPr id="44" name="Table 0"/>
+          <p:cNvPr id="50" name="Table 0"/>
           <p:cNvGraphicFramePr>
             <a:graphicFrameLocks noGrp="1"/>
           </p:cNvGraphicFramePr>
@@ -17302,7 +19536,7 @@
             <a:pPr algn="ctr"/>
             <a:fld id="{F7021451-1387-4CA6-816F-3879F97B5CBC}" type="slidenum">
               <a:rPr b="1" lang="en-US"/>
-              <a:t>43</a:t>
+              <a:t>49</a:t>
             </a:fld>
             <a:endParaRPr lang="en-US"/>
           </a:p>
@@ -17316,9 +19550,9 @@
 </p:sld>
 </file>
 
-<file path=ppt/slides/slide44.xml><?xml version="1.0" encoding="utf-8"?>
+<file path=ppt/slides/slide5.xml><?xml version="1.0" encoding="utf-8"?>
 <p:sld xmlns:a="http://schemas.openxmlformats.org/drawingml/2006/main" xmlns:r="http://schemas.openxmlformats.org/officeDocument/2006/relationships" xmlns:p="http://schemas.openxmlformats.org/presentationml/2006/main">
-  <p:cSld name="Slide 44">
+  <p:cSld name="Slide 5">
     <p:spTree>
       <p:nvGrpSpPr>
         <p:cNvPr id="1" name=""/>
@@ -17366,6 +19600,225 @@
                 <a:ea typeface="Calibri" pitchFamily="34" charset="-122"/>
                 <a:cs typeface="Calibri" pitchFamily="34" charset="-120"/>
               </a:rPr>
+              <a:t>HOMEWORK CORRECTION</a:t>
+            </a:r>
+            <a:endParaRPr lang="en-US" sz="1400" dirty="0"/>
+          </a:p>
+        </p:txBody>
+      </p:sp>
+      <p:pic>
+        <p:nvPicPr>
+          <p:cNvPr id="3" name="Image 0" descr="/home/claude/f4/img/minesec_sheet.png">    </p:cNvPr>
+          <p:cNvPicPr>
+            <a:picLocks noChangeAspect="1"/>
+          </p:cNvPicPr>
+          <p:nvPr/>
+        </p:nvPicPr>
+        <p:blipFill>
+          <a:blip r:embed="rId1"/>
+          <a:stretch>
+            <a:fillRect/>
+          </a:stretch>
+        </p:blipFill>
+        <p:spPr>
+          <a:xfrm>
+            <a:off x="0" y="658368"/>
+            <a:ext cx="5120640" cy="5833872"/>
+          </a:xfrm>
+          <a:prstGeom prst="rect">
+            <a:avLst/>
+          </a:prstGeom>
+        </p:spPr>
+      </p:pic>
+      <p:sp>
+        <p:nvSpPr>
+          <p:cNvPr id="4" name="Text 1"/>
+          <p:cNvSpPr/>
+          <p:nvPr/>
+        </p:nvSpPr>
+        <p:spPr>
+          <a:xfrm>
+            <a:off x="5349240" y="1005840"/>
+            <a:ext cx="6522415" cy="731520"/>
+          </a:xfrm>
+          <a:prstGeom prst="rect">
+            <a:avLst/>
+          </a:prstGeom>
+          <a:noFill/>
+          <a:ln/>
+        </p:spPr>
+        <p:txBody>
+          <a:bodyPr wrap="square" lIns="0" tIns="0" rIns="0" bIns="0" rtlCol="0" anchor="ctr">
+            <a:normAutofit/>
+          </a:bodyPr>
+          <a:lstStyle/>
+          <a:p>
+            <a:pPr algn="ctr" indent="0" marL="0">
+              <a:buNone/>
+            </a:pPr>
+            <a:r>
+              <a:rPr lang="en-US" sz="3600" b="1" dirty="0">
+                <a:solidFill>
+                  <a:srgbClr val="990011"/>
+                </a:solidFill>
+                <a:latin typeface="Times New Roman" pitchFamily="34" charset="0"/>
+                <a:ea typeface="Times New Roman" pitchFamily="34" charset="-122"/>
+                <a:cs typeface="Times New Roman" pitchFamily="34" charset="-120"/>
+              </a:rPr>
+              <a:t>Correction: Possible Answer</a:t>
+            </a:r>
+            <a:endParaRPr lang="en-US" sz="3600" dirty="0"/>
+          </a:p>
+        </p:txBody>
+      </p:sp>
+      <p:sp>
+        <p:nvSpPr>
+          <p:cNvPr id="5" name="Text 2"/>
+          <p:cNvSpPr/>
+          <p:nvPr/>
+        </p:nvSpPr>
+        <p:spPr>
+          <a:xfrm>
+            <a:off x="5349240" y="1783080"/>
+            <a:ext cx="6522415" cy="4663440"/>
+          </a:xfrm>
+          <a:prstGeom prst="rect">
+            <a:avLst/>
+          </a:prstGeom>
+          <a:noFill/>
+          <a:ln/>
+        </p:spPr>
+        <p:txBody>
+          <a:bodyPr wrap="square" lIns="0" tIns="0" rIns="0" bIns="0" rtlCol="0" anchor="t"/>
+          <a:lstStyle/>
+          <a:p>
+            <a:pPr algn="l" indent="0" marL="0">
+              <a:spcAft>
+                <a:spcPts val="800"/>
+              </a:spcAft>
+              <a:buNone/>
+            </a:pPr>
+            <a:r>
+              <a:rPr lang="en-US" sz="4000" dirty="0">
+                <a:solidFill>
+                  <a:srgbClr val="111111"/>
+                </a:solidFill>
+                <a:latin typeface="Times New Roman" pitchFamily="34" charset="0"/>
+                <a:ea typeface="Times New Roman" pitchFamily="34" charset="-122"/>
+                <a:cs typeface="Times New Roman" pitchFamily="34" charset="-120"/>
+              </a:rPr>
+              <a:t>Reasons: very fertile volcanic soils; cool climate and good rainfall for crops. Dangers: lava flows can destroy farms; earthquakes and gases can harm people.</a:t>
+            </a:r>
+            <a:endParaRPr lang="en-US" sz="4000" dirty="0"/>
+          </a:p>
+        </p:txBody>
+      </p:sp>
+      <p:sp>
+        <p:nvSpPr>
+          <p:cNvPr id="25" name="Slide Number Placeholder 0"/>
+          <p:cNvSpPr>
+            <a:spLocks noGrp="1"/>
+          </p:cNvSpPr>
+          <p:nvPr>
+            <p:ph type="sldNum" sz="quarter" idx="4294967295"/>
+          </p:nvPr>
+        </p:nvSpPr>
+        <p:spPr>
+          <a:xfrm>
+            <a:off x="27432" y="91440"/>
+            <a:ext cx="585216" cy="475488"/>
+          </a:xfrm>
+          <a:prstGeom prst="rect">
+            <a:avLst/>
+          </a:prstGeom>
+          <a:extLst>
+            <a:ext uri="{C572A759-6A51-4108-AA02-DFA0A04FC94B}">
+              <ma14:wrappingTextBoxFlag xmlns:ma14="http://schemas.microsoft.com/office/mac/drawingml/2011/main" val="0"/>
+            </a:ext>
+          </a:extLst>
+        </p:spPr>
+        <p:txBody>
+          <a:bodyPr/>
+          <a:lstStyle>
+            <a:lvl1pPr>
+              <a:defRPr sz="2000">
+                <a:solidFill>
+                  <a:srgbClr val="FFFFFF"/>
+                </a:solidFill>
+                <a:latin typeface="Calibri"/>
+                <a:ea typeface="Calibri"/>
+                <a:cs typeface="Calibri"/>
+              </a:defRPr>
+            </a:lvl1pPr>
+          </a:lstStyle>
+          <a:p>
+            <a:pPr algn="ctr"/>
+            <a:fld id="{F7021451-1387-4CA6-816F-3879F97B5CBC}" type="slidenum">
+              <a:rPr b="1" lang="en-US"/>
+              <a:t>5</a:t>
+            </a:fld>
+            <a:endParaRPr lang="en-US"/>
+          </a:p>
+        </p:txBody>
+      </p:sp>
+    </p:spTree>
+  </p:cSld>
+  <p:clrMapOvr>
+    <a:masterClrMapping/>
+  </p:clrMapOvr>
+</p:sld>
+</file>
+
+<file path=ppt/slides/slide50.xml><?xml version="1.0" encoding="utf-8"?>
+<p:sld xmlns:a="http://schemas.openxmlformats.org/drawingml/2006/main" xmlns:r="http://schemas.openxmlformats.org/officeDocument/2006/relationships" xmlns:p="http://schemas.openxmlformats.org/presentationml/2006/main">
+  <p:cSld name="Slide 50">
+    <p:spTree>
+      <p:nvGrpSpPr>
+        <p:cNvPr id="1" name=""/>
+        <p:cNvGrpSpPr/>
+        <p:nvPr/>
+      </p:nvGrpSpPr>
+      <p:grpSpPr>
+        <a:xfrm>
+          <a:off x="0" y="0"/>
+          <a:ext cx="0" cy="0"/>
+          <a:chOff x="0" y="0"/>
+          <a:chExt cx="0" cy="0"/>
+        </a:xfrm>
+      </p:grpSpPr>
+      <p:sp>
+        <p:nvSpPr>
+          <p:cNvPr id="2" name="Text 0"/>
+          <p:cNvSpPr/>
+          <p:nvPr/>
+        </p:nvSpPr>
+        <p:spPr>
+          <a:xfrm>
+            <a:off x="457200" y="713232"/>
+            <a:ext cx="11368735" cy="274320"/>
+          </a:xfrm>
+          <a:prstGeom prst="rect">
+            <a:avLst/>
+          </a:prstGeom>
+          <a:noFill/>
+          <a:ln/>
+        </p:spPr>
+        <p:txBody>
+          <a:bodyPr wrap="square" lIns="0" tIns="0" rIns="0" bIns="0" rtlCol="0" anchor="ctr"/>
+          <a:lstStyle/>
+          <a:p>
+            <a:pPr algn="r" indent="0" marL="0">
+              <a:buNone/>
+            </a:pPr>
+            <a:r>
+              <a:rPr lang="en-US" sz="1400" b="1" dirty="0">
+                <a:solidFill>
+                  <a:srgbClr val="1C3F6E"/>
+                </a:solidFill>
+                <a:latin typeface="Calibri" pitchFamily="34" charset="0"/>
+                <a:ea typeface="Calibri" pitchFamily="34" charset="-122"/>
+                <a:cs typeface="Calibri" pitchFamily="34" charset="-120"/>
+              </a:rPr>
               <a:t>LOGBOOK</a:t>
             </a:r>
             <a:endParaRPr lang="en-US" sz="1400" dirty="0"/>
@@ -17413,7 +19866,7 @@
       </p:sp>
       <p:graphicFrame>
         <p:nvGraphicFramePr>
-          <p:cNvPr id="45" name="Table 0"/>
+          <p:cNvPr id="51" name="Table 0"/>
           <p:cNvGraphicFramePr>
             <a:graphicFrameLocks noGrp="1"/>
           </p:cNvGraphicFramePr>
@@ -17523,7 +19976,7 @@
                           <a:ea typeface="Calibri" pitchFamily="34" charset="-122"/>
                           <a:cs typeface="Calibri" pitchFamily="34" charset="-120"/>
                         </a:rPr>
-                        <a:t>DEFINITIONS; Volcanic Hazards; Importance of Volcanoes; Adaptation, Mitigation and Prevention.</a:t>
+                        <a:t>DEFINITIONS; Volcanic Hazards; Importance of Volcanoes; Adaptation, Mitigation and Preventive Measures.</a:t>
                       </a:r>
                       <a:endParaRPr lang="en-US" sz="1600" dirty="0">
                         <a:latin typeface="Calibri" charset="0"/>
@@ -18173,7 +20626,7 @@
             <a:pPr algn="ctr"/>
             <a:fld id="{F7021451-1387-4CA6-816F-3879F97B5CBC}" type="slidenum">
               <a:rPr b="1" lang="en-US"/>
-              <a:t>44</a:t>
+              <a:t>50</a:t>
             </a:fld>
             <a:endParaRPr lang="en-US"/>
           </a:p>
@@ -18187,9 +20640,9 @@
 </p:sld>
 </file>
 
-<file path=ppt/slides/slide45.xml><?xml version="1.0" encoding="utf-8"?>
+<file path=ppt/slides/slide51.xml><?xml version="1.0" encoding="utf-8"?>
 <p:sld xmlns:a="http://schemas.openxmlformats.org/drawingml/2006/main" xmlns:r="http://schemas.openxmlformats.org/officeDocument/2006/relationships" xmlns:p="http://schemas.openxmlformats.org/presentationml/2006/main">
-  <p:cSld name="Slide 45">
+  <p:cSld name="Slide 51">
     <p:spTree>
       <p:nvGrpSpPr>
         <p:cNvPr id="1" name=""/>
@@ -18456,7 +20909,7 @@
             <a:pPr algn="ctr"/>
             <a:fld id="{F7021451-1387-4CA6-816F-3879F97B5CBC}" type="slidenum">
               <a:rPr b="1" lang="en-US"/>
-              <a:t>45</a:t>
+              <a:t>51</a:t>
             </a:fld>
             <a:endParaRPr lang="en-US"/>
           </a:p>
@@ -18470,9 +20923,9 @@
 </p:sld>
 </file>
 
-<file path=ppt/slides/slide46.xml><?xml version="1.0" encoding="utf-8"?>
+<file path=ppt/slides/slide52.xml><?xml version="1.0" encoding="utf-8"?>
 <p:sld xmlns:a="http://schemas.openxmlformats.org/drawingml/2006/main" xmlns:r="http://schemas.openxmlformats.org/officeDocument/2006/relationships" xmlns:p="http://schemas.openxmlformats.org/presentationml/2006/main">
-  <p:cSld name="Slide 46">
+  <p:cSld name="Slide 52">
     <p:spTree>
       <p:nvGrpSpPr>
         <p:cNvPr id="1" name=""/>
@@ -18733,7 +21186,7 @@
                 <a:ea typeface="Calibri" pitchFamily="34" charset="-122"/>
                 <a:cs typeface="Calibri" pitchFamily="34" charset="-120"/>
               </a:rPr>
-              <a:t>Diagrams and animations: drawn for this lesson (Geography Department).</a:t>
+              <a:t>Photo, board summary (Fertile soils): “Carlo in the tea” by luigig, CC BY 2.0, via Flickr (https://www.flickr.com/photos/51035803402@N01/3175986747)</a:t>
             </a:r>
             <a:endParaRPr lang="en-US" sz="1800" dirty="0"/>
           </a:p>
@@ -18781,7 +21234,7 @@
             <a:pPr algn="ctr"/>
             <a:fld id="{F7021451-1387-4CA6-816F-3879F97B5CBC}" type="slidenum">
               <a:rPr b="1" lang="en-US"/>
-              <a:t>46</a:t>
+              <a:t>52</a:t>
             </a:fld>
             <a:endParaRPr lang="en-US"/>
           </a:p>
@@ -18795,9 +21248,9 @@
 </p:sld>
 </file>
 
-<file path=ppt/slides/slide5.xml><?xml version="1.0" encoding="utf-8"?>
+<file path=ppt/slides/slide53.xml><?xml version="1.0" encoding="utf-8"?>
 <p:sld xmlns:a="http://schemas.openxmlformats.org/drawingml/2006/main" xmlns:r="http://schemas.openxmlformats.org/officeDocument/2006/relationships" xmlns:p="http://schemas.openxmlformats.org/presentationml/2006/main">
-  <p:cSld name="Slide 5">
+  <p:cSld name="Slide 53">
     <p:spTree>
       <p:nvGrpSpPr>
         <p:cNvPr id="1" name=""/>
@@ -18845,7 +21298,7 @@
                 <a:ea typeface="Calibri" pitchFamily="34" charset="-122"/>
                 <a:cs typeface="Calibri" pitchFamily="34" charset="-120"/>
               </a:rPr>
-              <a:t>HOMEWORK CORRECTION</a:t>
+              <a:t>REFERENCES</a:t>
             </a:r>
             <a:endParaRPr lang="en-US" sz="1400" dirty="0"/>
           </a:p>
@@ -18910,7 +21363,7 @@
                 <a:ea typeface="Times New Roman" pitchFamily="34" charset="-122"/>
                 <a:cs typeface="Times New Roman" pitchFamily="34" charset="-120"/>
               </a:rPr>
-              <a:t>Correction: Possible Answer</a:t>
+              <a:t>References (continued)</a:t>
             </a:r>
             <a:endParaRPr lang="en-US" sz="3600" dirty="0"/>
           </a:p>
@@ -18937,24 +21390,46 @@
           <a:bodyPr wrap="square" lIns="0" tIns="0" rIns="0" bIns="0" rtlCol="0" anchor="t"/>
           <a:lstStyle/>
           <a:p>
-            <a:pPr algn="l" indent="0" marL="0">
+            <a:pPr algn="l" marL="342900" indent="-342900">
               <a:spcAft>
                 <a:spcPts val="800"/>
               </a:spcAft>
-              <a:buNone/>
+              <a:buSzPct val="100000"/>
+              <a:buChar char="•"/>
             </a:pPr>
             <a:r>
-              <a:rPr lang="en-US" sz="4000" dirty="0">
+              <a:rPr lang="en-US" sz="1800" dirty="0">
                 <a:solidFill>
                   <a:srgbClr val="111111"/>
                 </a:solidFill>
-                <a:latin typeface="Times New Roman" pitchFamily="34" charset="0"/>
-                <a:ea typeface="Times New Roman" pitchFamily="34" charset="-122"/>
-                <a:cs typeface="Times New Roman" pitchFamily="34" charset="-120"/>
+                <a:latin typeface="Calibri" pitchFamily="34" charset="0"/>
+                <a:ea typeface="Calibri" pitchFamily="34" charset="-122"/>
+                <a:cs typeface="Calibri" pitchFamily="34" charset="-120"/>
               </a:rPr>
-              <a:t>Reasons: very fertile volcanic soils; cool climate and good rainfall for crops. Dangers: lava flows can destroy farms; earthquakes and gases can harm people.</a:t>
-            </a:r>
-            <a:endParaRPr lang="en-US" sz="4000" dirty="0"/>
+              <a:t>Photo, board summary (Monitoring): “Hawaiian Volcano Observatory, Hawaiʻi Volcanoes National Park, Hawaii” by Ken Lund, CC BY-SA 2.0, via Flickr (https://www.flickr.com/photos/75683070@N00/4528702285)</a:t>
+            </a:r>
+            <a:endParaRPr lang="en-US" sz="1800" dirty="0"/>
+          </a:p>
+          <a:p>
+            <a:pPr algn="l" marL="342900" indent="-342900">
+              <a:spcAft>
+                <a:spcPts val="800"/>
+              </a:spcAft>
+              <a:buSzPct val="100000"/>
+              <a:buChar char="•"/>
+            </a:pPr>
+            <a:r>
+              <a:rPr lang="en-US" sz="1800" dirty="0">
+                <a:solidFill>
+                  <a:srgbClr val="111111"/>
+                </a:solidFill>
+                <a:latin typeface="Calibri" pitchFamily="34" charset="0"/>
+                <a:ea typeface="Calibri" pitchFamily="34" charset="-122"/>
+                <a:cs typeface="Calibri" pitchFamily="34" charset="-120"/>
+              </a:rPr>
+              <a:t>Diagrams and animations: drawn for this lesson (Geography Department).</a:t>
+            </a:r>
+            <a:endParaRPr lang="en-US" sz="1800" dirty="0"/>
           </a:p>
         </p:txBody>
       </p:sp>
@@ -19000,7 +21475,7 @@
             <a:pPr algn="ctr"/>
             <a:fld id="{F7021451-1387-4CA6-816F-3879F97B5CBC}" type="slidenum">
               <a:rPr b="1" lang="en-US"/>
-              <a:t>5</a:t>
+              <a:t>53</a:t>
             </a:fld>
             <a:endParaRPr lang="en-US"/>
           </a:p>
@@ -19965,7 +22440,7 @@
         <p:spPr>
           <a:xfrm>
             <a:off x="0" y="658368"/>
-            <a:ext cx="5120640" cy="5833872"/>
+            <a:ext cx="1463040" cy="5833872"/>
           </a:xfrm>
           <a:prstGeom prst="rect">
             <a:avLst/>
@@ -19980,8 +22455,8 @@
         </p:nvSpPr>
         <p:spPr>
           <a:xfrm>
-            <a:off x="5349240" y="1005840"/>
-            <a:ext cx="6522415" cy="731520"/>
+            <a:off x="1691640" y="1005840"/>
+            <a:ext cx="10180015" cy="731520"/>
           </a:xfrm>
           <a:prstGeom prst="rect">
             <a:avLst/>
@@ -20021,8 +22496,8 @@
         </p:nvSpPr>
         <p:spPr>
           <a:xfrm>
-            <a:off x="5349240" y="1783080"/>
-            <a:ext cx="6522415" cy="4663440"/>
+            <a:off x="1691640" y="1783080"/>
+            <a:ext cx="10180015" cy="4663440"/>
           </a:xfrm>
           <a:prstGeom prst="rect">
             <a:avLst/>
@@ -20049,7 +22524,7 @@
                 <a:ea typeface="Times New Roman" pitchFamily="34" charset="-122"/>
                 <a:cs typeface="Times New Roman" pitchFamily="34" charset="-120"/>
               </a:rPr>
-              <a:t>A friend of Aboubakar's family wants to start a farm near Buea because the soil is very fertile. Another friend says, "It is dangerous! You will live near an active volcano."</a:t>
+              <a:t>A friend of Aboubakar's family wants to start a farm near Buea because the soil is very fertile. Another friend warns him: "It is dangerous! You will live near an active volcano." The farmer asks: "Is a volcano only a danger, or can it also be useful, and how can we live safely near it?"</a:t>
             </a:r>
             <a:endParaRPr lang="en-US" sz="4000" dirty="0"/>
           </a:p>

--- a/lecons/F3/15_FORM4_LESSON12_Impact_of_Volcanicity_on_Man.pptx
+++ b/lecons/F3/15_FORM4_LESSON12_Impact_of_Volcanicity_on_Man.pptx
@@ -10889,7 +10889,7 @@
               <a:buNone/>
             </a:pPr>
             <a:r>
-              <a:rPr lang="en-US" sz="4000" b="1" dirty="0">
+              <a:rPr lang="en-US" sz="3200" b="1" dirty="0">
                 <a:solidFill>
                   <a:srgbClr val="111111"/>
                 </a:solidFill>
@@ -10899,7 +10899,7 @@
               </a:rPr>
               <a:t>Topic: The Structure of the Earth: Building Processes and Impacts on Man</a:t>
             </a:r>
-            <a:endParaRPr lang="en-US" sz="4000" dirty="0"/>
+            <a:endParaRPr lang="en-US" sz="3200" dirty="0"/>
           </a:p>
           <a:p>
             <a:pPr algn="l" indent="0" marL="0">
@@ -10909,7 +10909,7 @@
               <a:buNone/>
             </a:pPr>
             <a:r>
-              <a:rPr lang="en-US" sz="4000" b="1" dirty="0">
+              <a:rPr lang="en-US" sz="3200" b="1" dirty="0">
                 <a:solidFill>
                   <a:srgbClr val="111111"/>
                 </a:solidFill>
@@ -10919,7 +10919,7 @@
               </a:rPr>
               <a:t>Sub-topic: Volcanoes and People</a:t>
             </a:r>
-            <a:endParaRPr lang="en-US" sz="4000" dirty="0"/>
+            <a:endParaRPr lang="en-US" sz="3200" dirty="0"/>
           </a:p>
           <a:p>
             <a:pPr algn="l" indent="0" marL="0">
@@ -10929,7 +10929,7 @@
               <a:buNone/>
             </a:pPr>
             <a:r>
-              <a:rPr lang="en-US" sz="4000" b="1" dirty="0">
+              <a:rPr lang="en-US" sz="3200" b="1" dirty="0">
                 <a:solidFill>
                   <a:srgbClr val="990011"/>
                 </a:solidFill>
@@ -10939,7 +10939,7 @@
               </a:rPr>
               <a:t>Lesson 12: The Impact of Volcanicity on Man</a:t>
             </a:r>
-            <a:endParaRPr lang="en-US" sz="4000" dirty="0"/>
+            <a:endParaRPr lang="en-US" sz="3200" dirty="0"/>
           </a:p>
         </p:txBody>
       </p:sp>

--- a/lecons/F3/15_FORM4_LESSON12_Impact_of_Volcanicity_on_Man.pptx
+++ b/lecons/F3/15_FORM4_LESSON12_Impact_of_Volcanicity_on_Man.pptx
@@ -3458,7 +3458,7 @@
           <a:p>
             <a:r>
               <a:rPr lang="en-US" dirty="0"/>
-              <a:t>Before we start the new lesson, let us correct the homework I gave you at the end of Lesson 11: Volcanoes. The question was: Imagine a friend wants to farm near Buea, on Mount Cameroon. Write two good reasons to go and two dangers. Take out your exercise books.</a:t>
+              <a:t>Before we start the new lesson, let us correct the homework I gave you at the end of Lesson 11: Volcanoes. The question was: Give one danger and one advantage of volcanoes. Take out your exercise books.</a:t>
             </a:r>
             <a:endParaRPr lang="en-US" dirty="0"/>
           </a:p>
@@ -4074,7 +4074,7 @@
           <a:p>
             <a:r>
               <a:rPr lang="en-US" dirty="0"/>
-              <a:t>For your homework: Ask your parents if they have ever felt the ground shake. Write where and when it happened, and what they felt. We shall correct it at the beginning of our next lesson.</a:t>
+              <a:t>For your homework: Define an earthquake. We shall correct it at the beginning of our next lesson.</a:t>
             </a:r>
             <a:endParaRPr lang="en-US" dirty="0"/>
           </a:p>
@@ -4426,7 +4426,7 @@
           <a:p>
             <a:r>
               <a:rPr lang="en-US" dirty="0"/>
-              <a:t>Here is a good answer. Reasons: very fertile volcanic soils; cool climate and good rainfall for crops. Dangers: lava flows can destroy farms; earthquakes and gases can harm people. Compare it with your own answer and correct your work in red.</a:t>
+              <a:t>Here is a good answer. Danger: lava flows (or poisonous gases). Advantage: fertile soils. Compare it with your own answer and correct your work in red.</a:t>
             </a:r>
             <a:endParaRPr lang="en-US" dirty="0"/>
           </a:p>
@@ -15477,7 +15477,7 @@
                 <a:ea typeface="Times New Roman" pitchFamily="34" charset="-122"/>
                 <a:cs typeface="Times New Roman" pitchFamily="34" charset="-120"/>
               </a:rPr>
-              <a:t>Imagine a friend wants to farm near Buea, on Mount Cameroon. Write two good reasons to go and two dangers.</a:t>
+              <a:t>Give one danger and one advantage of volcanoes.</a:t>
             </a:r>
             <a:endParaRPr lang="en-US" sz="4000" dirty="0"/>
           </a:p>
@@ -17093,7 +17093,7 @@
                 <a:ea typeface="Times New Roman" pitchFamily="34" charset="-122"/>
                 <a:cs typeface="Times New Roman" pitchFamily="34" charset="-120"/>
               </a:rPr>
-              <a:t>Ask your parents if they have ever felt the ground shake. Write where and when it happened, and what they felt.</a:t>
+              <a:t>Define an earthquake.</a:t>
             </a:r>
             <a:endParaRPr lang="en-US" sz="4000" dirty="0"/>
           </a:p>
@@ -19707,7 +19707,7 @@
                 <a:ea typeface="Times New Roman" pitchFamily="34" charset="-122"/>
                 <a:cs typeface="Times New Roman" pitchFamily="34" charset="-120"/>
               </a:rPr>
-              <a:t>Reasons: very fertile volcanic soils; cool climate and good rainfall for crops. Dangers: lava flows can destroy farms; earthquakes and gases can harm people.</a:t>
+              <a:t>Danger: lava flows (or poisonous gases). Advantage: fertile soils.</a:t>
             </a:r>
             <a:endParaRPr lang="en-US" sz="4000" dirty="0"/>
           </a:p>
@@ -20252,7 +20252,7 @@
                           <a:ea typeface="Calibri" pitchFamily="34" charset="-122"/>
                           <a:cs typeface="Calibri" pitchFamily="34" charset="-120"/>
                         </a:rPr>
-                        <a:t>Ask your parents if they have ever felt the ground shake. Write where and when it happened, and what they felt.</a:t>
+                        <a:t>Define an earthquake.</a:t>
                       </a:r>
                       <a:endParaRPr lang="en-US" sz="1600" dirty="0">
                         <a:latin typeface="Calibri" charset="0"/>
